--- a/docs/helix/06-iterate/deliverables/assets/DEL-001-helix-evaluation-deck.pptx
+++ b/docs/helix/06-iterate/deliverables/assets/DEL-001-helix-evaluation-deck.pptx
@@ -19,9 +19,11 @@
     <p:sldId id="267" r:id="rId13"/>
     <p:sldId id="268" r:id="rId14"/>
     <p:sldId id="269" r:id="rId15"/>
+    <p:sldId id="270" r:id="rId16"/>
+    <p:sldId id="271" r:id="rId17"/>
   </p:sldIdLst>
   <p:notesMasterIdLst>
-    <p:notesMasterId r:id="rId16"/>
+    <p:notesMasterId r:id="rId18"/>
   </p:notesMasterIdLst>
   <p:sldSz cx="12192000" cy="6858000"/>
   <p:notesSz cx="6858000" cy="12192000"/>
@@ -603,7 +605,7 @@
           <a:p>
             <a:r>
               <a:rPr lang="en-US" dirty="0"/>
-              <a:t>The discipline is not only for engineers. The iteration documents exist for people who coordinate, and the present mode exists for people outside the project. Say that this deck is the worked example: its script, its sources, and its inspection record are in the repository.</a:t>
+              <a:t>The two strands of the helix share one loop with different jobs. Low autonomy asks before each step, medium pauses on ambiguity, high records assumptions and proceeds, and a hard floor of stop triggers holds at every level. Nothing here needs a new tool: no command-line tool, tracker, queue, or execution engine ships with HELIX, and it installs on six hosts today.</a:t>
             </a:r>
             <a:endParaRPr lang="en-US" dirty="0"/>
           </a:p>
@@ -997,6 +999,182 @@
 </p:notes>
 </file>
 
+<file path=ppt/notesSlides/notesSlide15.xml><?xml version="1.0" encoding="utf-8"?>
+<p:notes xmlns:a="http://schemas.openxmlformats.org/drawingml/2006/main" xmlns:r="http://schemas.openxmlformats.org/officeDocument/2006/relationships" xmlns:p="http://schemas.openxmlformats.org/presentationml/2006/main">
+  <p:cSld>
+    <p:spTree>
+      <p:nvGrpSpPr>
+        <p:cNvPr id="1" name=""/>
+        <p:cNvGrpSpPr/>
+        <p:nvPr/>
+      </p:nvGrpSpPr>
+      <p:grpSpPr>
+        <a:xfrm>
+          <a:off x="0" y="0"/>
+          <a:ext cx="0" cy="0"/>
+          <a:chOff x="0" y="0"/>
+          <a:chExt cx="0" cy="0"/>
+        </a:xfrm>
+      </p:grpSpPr>
+      <p:sp>
+        <p:nvSpPr>
+          <p:cNvPr id="2" name="Slide Image Placeholder 1"/>
+          <p:cNvSpPr>
+            <a:spLocks noGrp="1" noRot="1" noChangeAspect="1"/>
+          </p:cNvSpPr>
+          <p:nvPr>
+            <p:ph type="sldImg"/>
+          </p:nvPr>
+        </p:nvSpPr>
+        <p:spPr/>
+      </p:sp>
+      <p:sp>
+        <p:nvSpPr>
+          <p:cNvPr id="3" name="Notes Placeholder 2"/>
+          <p:cNvSpPr>
+            <a:spLocks noGrp="1"/>
+          </p:cNvSpPr>
+          <p:nvPr>
+            <p:ph type="body" idx="1"/>
+          </p:nvPr>
+        </p:nvSpPr>
+        <p:spPr/>
+        <p:txBody>
+          <a:bodyPr/>
+          <a:lstStyle/>
+          <a:p>
+            <a:r>
+              <a:rPr lang="en-US" dirty="0"/>
+              <a:t/>
+            </a:r>
+            <a:endParaRPr lang="en-US" dirty="0"/>
+          </a:p>
+        </p:txBody>
+      </p:sp>
+      <p:sp>
+        <p:nvSpPr>
+          <p:cNvPr id="4" name="Slide Number Placeholder 3"/>
+          <p:cNvSpPr>
+            <a:spLocks noGrp="1"/>
+          </p:cNvSpPr>
+          <p:nvPr>
+            <p:ph type="sldNum" sz="quarter" idx="10"/>
+          </p:nvPr>
+        </p:nvSpPr>
+        <p:spPr/>
+        <p:txBody>
+          <a:bodyPr/>
+          <a:lstStyle/>
+          <a:p>
+            <a:fld id="{F7021451-1387-4CA6-816F-3879F97B5CBC}" type="slidenum">
+              <a:rPr lang="en-US"/>
+              <a:t>15</a:t>
+            </a:fld>
+            <a:endParaRPr lang="en-US"/>
+          </a:p>
+        </p:txBody>
+      </p:sp>
+    </p:spTree>
+    <p:extLst>
+      <p:ext uri="{BB962C8B-B14F-4D97-AF65-F5344CB8AC3E}">
+        <p14:creationId xmlns:p14="http://schemas.microsoft.com/office/powerpoint/2010/main" val="1024086991"/>
+      </p:ext>
+    </p:extLst>
+  </p:cSld>
+  <p:clrMapOvr>
+    <a:masterClrMapping/>
+  </p:clrMapOvr>
+</p:notes>
+</file>
+
+<file path=ppt/notesSlides/notesSlide16.xml><?xml version="1.0" encoding="utf-8"?>
+<p:notes xmlns:a="http://schemas.openxmlformats.org/drawingml/2006/main" xmlns:r="http://schemas.openxmlformats.org/officeDocument/2006/relationships" xmlns:p="http://schemas.openxmlformats.org/presentationml/2006/main">
+  <p:cSld>
+    <p:spTree>
+      <p:nvGrpSpPr>
+        <p:cNvPr id="1" name=""/>
+        <p:cNvGrpSpPr/>
+        <p:nvPr/>
+      </p:nvGrpSpPr>
+      <p:grpSpPr>
+        <a:xfrm>
+          <a:off x="0" y="0"/>
+          <a:ext cx="0" cy="0"/>
+          <a:chOff x="0" y="0"/>
+          <a:chExt cx="0" cy="0"/>
+        </a:xfrm>
+      </p:grpSpPr>
+      <p:sp>
+        <p:nvSpPr>
+          <p:cNvPr id="2" name="Slide Image Placeholder 1"/>
+          <p:cNvSpPr>
+            <a:spLocks noGrp="1" noRot="1" noChangeAspect="1"/>
+          </p:cNvSpPr>
+          <p:nvPr>
+            <p:ph type="sldImg"/>
+          </p:nvPr>
+        </p:nvSpPr>
+        <p:spPr/>
+      </p:sp>
+      <p:sp>
+        <p:nvSpPr>
+          <p:cNvPr id="3" name="Notes Placeholder 2"/>
+          <p:cNvSpPr>
+            <a:spLocks noGrp="1"/>
+          </p:cNvSpPr>
+          <p:nvPr>
+            <p:ph type="body" idx="1"/>
+          </p:nvPr>
+        </p:nvSpPr>
+        <p:spPr/>
+        <p:txBody>
+          <a:bodyPr/>
+          <a:lstStyle/>
+          <a:p>
+            <a:r>
+              <a:rPr lang="en-US" dirty="0"/>
+              <a:t/>
+            </a:r>
+            <a:endParaRPr lang="en-US" dirty="0"/>
+          </a:p>
+        </p:txBody>
+      </p:sp>
+      <p:sp>
+        <p:nvSpPr>
+          <p:cNvPr id="4" name="Slide Number Placeholder 3"/>
+          <p:cNvSpPr>
+            <a:spLocks noGrp="1"/>
+          </p:cNvSpPr>
+          <p:nvPr>
+            <p:ph type="sldNum" sz="quarter" idx="10"/>
+          </p:nvPr>
+        </p:nvSpPr>
+        <p:spPr/>
+        <p:txBody>
+          <a:bodyPr/>
+          <a:lstStyle/>
+          <a:p>
+            <a:fld id="{F7021451-1387-4CA6-816F-3879F97B5CBC}" type="slidenum">
+              <a:rPr lang="en-US"/>
+              <a:t>16</a:t>
+            </a:fld>
+            <a:endParaRPr lang="en-US"/>
+          </a:p>
+        </p:txBody>
+      </p:sp>
+    </p:spTree>
+    <p:extLst>
+      <p:ext uri="{BB962C8B-B14F-4D97-AF65-F5344CB8AC3E}">
+        <p14:creationId xmlns:p14="http://schemas.microsoft.com/office/powerpoint/2010/main" val="1024086991"/>
+      </p:ext>
+    </p:extLst>
+  </p:cSld>
+  <p:clrMapOvr>
+    <a:masterClrMapping/>
+  </p:clrMapOvr>
+</p:notes>
+</file>
+
 <file path=ppt/notesSlides/notesSlide2.xml><?xml version="1.0" encoding="utf-8"?>
 <p:notes xmlns:a="http://schemas.openxmlformats.org/drawingml/2006/main" xmlns:r="http://schemas.openxmlformats.org/officeDocument/2006/relationships" xmlns:p="http://schemas.openxmlformats.org/presentationml/2006/main">
   <p:cSld>
@@ -1395,7 +1573,7 @@
           <a:p>
             <a:r>
               <a:rPr lang="en-US" dirty="0"/>
-              <a:t>This is the four-step contract the requirements document commits to. On one OAuth change in the vision's worked example, the alignment check found three affected specs, one conflicting decision, and four missing stories before anyone wrote code.</a:t>
+              <a:t>This is the mechanism, not a filing order. An agent may act only within what the layer above authorizes. On one OAuth change the vision's worked example starts with the security architecture, then the specs, then the stories, and no code moves until then; slide 9 shows the count.</a:t>
             </a:r>
             <a:endParaRPr lang="en-US" dirty="0"/>
           </a:p>
@@ -1483,7 +1661,7 @@
           <a:p>
             <a:r>
               <a:rPr lang="en-US" dirty="0"/>
-              <a:t>This is what keeps a team's agents consistent with each other as well as with the specs. The team selects a concern once during framing; it then propagates and nobody re-decides it per task. Slots are why two agents cannot pick two frontend frameworks.</a:t>
+              <a:t>Fifty concerns in the library, each with practices keyed to the activity they apply in. Exclusive slots (one frontend framework, one runtime, one auth provider) are why two agents cannot make two different choices. The artifact-honesty rule closes the loop: a claim without evidence blocks.</a:t>
             </a:r>
             <a:endParaRPr lang="en-US" dirty="0"/>
           </a:p>
@@ -1571,7 +1749,7 @@
           <a:p>
             <a:r>
               <a:rPr lang="en-US" dirty="0"/>
-              <a:t>The artifact-honesty rule: any assertion of a test, a coverage figure, or a metric that does not exist is a blocking finding, not a style note. A quality floor, once reached, never slides back. The templates' own checks now run as scripts.</a:t>
+              <a:t>The discipline is not only for engineers. A client cut of a status report may subset the internal one but never contradict it. Say that this deck is the worked example: its script, its sources, and its inspection record are in the repository.</a:t>
             </a:r>
             <a:endParaRPr lang="en-US" dirty="0"/>
           </a:p>
@@ -1659,7 +1837,7 @@
           <a:p>
             <a:r>
               <a:rPr lang="en-US" dirty="0"/>
-              <a:t>The non-goals from the requirements document, and the autonomy decision: low asks before each step, medium pauses on ambiguity, high records assumptions and proceeds, and a hard floor of stop triggers holds at every level. This answers the objection every platform team is forming by now.</a:t>
+              <a:t>This is the worked example in the product vision, not a customer result. The order matters: the plan starts with the security architecture revision, then the specs, then the stories. The bar the product sets for itself, under 3 findings per check on a healthy project, is a target and belongs to the ask.</a:t>
             </a:r>
             <a:endParaRPr lang="en-US" dirty="0"/>
           </a:p>
@@ -2059,7 +2237,7 @@
               <a:buNone/>
             </a:pPr>
             <a:r>
-              <a:rPr lang="en-US" sz="4000" b="1" dirty="0">
+              <a:rPr lang="en-US" sz="3600" b="1" dirty="0">
                 <a:solidFill>
                   <a:srgbClr val="EEF2F7"/>
                 </a:solidFill>
@@ -2069,7 +2247,7 @@
               </a:rPr>
               <a:t>One document discipline governs agent work from intent to release</a:t>
             </a:r>
-            <a:endParaRPr lang="en-US" sz="4000" dirty="0"/>
+            <a:endParaRPr lang="en-US" sz="3600" dirty="0"/>
           </a:p>
         </p:txBody>
       </p:sp>
@@ -2311,7 +2489,7 @@
                 <a:ea typeface="Georgia" pitchFamily="34" charset="-122"/>
                 <a:cs typeface="Georgia" pitchFamily="34" charset="-120"/>
               </a:rPr>
-              <a:t>Those documents also become the decks and status reports people read</a:t>
+              <a:t>At every gate a person decides and an agent drafts</a:t>
             </a:r>
             <a:endParaRPr lang="en-US" sz="3600" dirty="0"/>
           </a:p>
@@ -2350,7 +2528,7 @@
                 <a:ea typeface="Arial" pitchFamily="34" charset="-122"/>
                 <a:cs typeface="Arial" pitchFamily="34" charset="-120"/>
               </a:rPr>
-              <a:t>Sources: S16, S17 (appendix)</a:t>
+              <a:t>Sources: S21, S22, S15, S13, S14 (appendix)</a:t>
             </a:r>
             <a:endParaRPr lang="en-US" sz="900" dirty="0"/>
           </a:p>
@@ -2397,14 +2575,41 @@
       </p:sp>
       <p:sp>
         <p:nvSpPr>
-          <p:cNvPr id="8" name="Text 5"/>
+          <p:cNvPr id="8" name="Shape 5"/>
+          <p:cNvSpPr/>
+          <p:nvPr/>
+        </p:nvSpPr>
+        <p:spPr>
+          <a:xfrm>
+            <a:off x="548640" y="1965960"/>
+            <a:ext cx="5410048" cy="3108960"/>
+          </a:xfrm>
+          <a:prstGeom prst="roundRect">
+            <a:avLst>
+              <a:gd name="adj" fmla="val 2941"/>
+            </a:avLst>
+          </a:prstGeom>
+          <a:solidFill>
+            <a:srgbClr val="FFFFFF"/>
+          </a:solidFill>
+          <a:ln w="9525">
+            <a:solidFill>
+              <a:srgbClr val="D6DCE4"/>
+            </a:solidFill>
+            <a:prstDash val="solid"/>
+          </a:ln>
+        </p:spPr>
+      </p:sp>
+      <p:sp>
+        <p:nvSpPr>
+          <p:cNvPr id="9" name="Text 6"/>
           <p:cNvSpPr txBox="1"/>
           <p:nvPr/>
         </p:nvSpPr>
         <p:spPr>
           <a:xfrm>
-            <a:off x="548640" y="1965960"/>
-            <a:ext cx="4462653" cy="3840480"/>
+            <a:off x="822960" y="2148840"/>
+            <a:ext cx="4861408" cy="457200"/>
           </a:xfrm>
           <a:prstGeom prst="rect">
             <a:avLst/>
@@ -2413,18 +2618,121 @@
           <a:ln/>
         </p:spPr>
         <p:txBody>
-          <a:bodyPr wrap="square" lIns="0" tIns="0" rIns="0" bIns="0" rtlCol="0" anchor="t"/>
+          <a:bodyPr wrap="square" lIns="0" tIns="0" rIns="0" bIns="0" rtlCol="0" anchor="t">
+            <a:normAutofit/>
+          </a:bodyPr>
           <a:lstStyle/>
           <a:p>
-            <a:pPr marL="228600" indent="-228600">
-              <a:spcAft>
-                <a:spcPts val="1080"/>
-              </a:spcAft>
-              <a:buSzPct val="100000"/>
-              <a:buChar char="•"/>
+            <a:pPr algn="l" indent="0" marL="0">
+              <a:buNone/>
             </a:pPr>
             <a:r>
-              <a:rPr lang="en-US" sz="1800" dirty="0">
+              <a:rPr lang="en-US" sz="2000" b="1" dirty="0">
+                <a:solidFill>
+                  <a:srgbClr val="3B6BA8"/>
+                </a:solidFill>
+                <a:latin typeface="Georgia" pitchFamily="34" charset="0"/>
+                <a:ea typeface="Georgia" pitchFamily="34" charset="-122"/>
+                <a:cs typeface="Georgia" pitchFamily="34" charset="-120"/>
+              </a:rPr>
+              <a:t>People hold</a:t>
+            </a:r>
+            <a:endParaRPr lang="en-US" sz="2000" dirty="0"/>
+          </a:p>
+        </p:txBody>
+      </p:sp>
+      <p:sp>
+        <p:nvSpPr>
+          <p:cNvPr id="10" name="Shape 7"/>
+          <p:cNvSpPr/>
+          <p:nvPr/>
+        </p:nvSpPr>
+        <p:spPr>
+          <a:xfrm>
+            <a:off x="822960" y="2743200"/>
+            <a:ext cx="292608" cy="292608"/>
+          </a:xfrm>
+          <a:prstGeom prst="ellipse">
+            <a:avLst/>
+          </a:prstGeom>
+          <a:solidFill>
+            <a:srgbClr val="3B6BA8"/>
+          </a:solidFill>
+          <a:ln w="12700">
+            <a:solidFill>
+              <a:srgbClr val="3B6BA8"/>
+            </a:solidFill>
+            <a:prstDash val="solid"/>
+          </a:ln>
+        </p:spPr>
+      </p:sp>
+      <p:sp>
+        <p:nvSpPr>
+          <p:cNvPr id="11" name="Text 8"/>
+          <p:cNvSpPr txBox="1"/>
+          <p:nvPr/>
+        </p:nvSpPr>
+        <p:spPr>
+          <a:xfrm>
+            <a:off x="822960" y="2743200"/>
+            <a:ext cx="292608" cy="292608"/>
+          </a:xfrm>
+          <a:prstGeom prst="rect">
+            <a:avLst/>
+          </a:prstGeom>
+          <a:noFill/>
+          <a:ln/>
+        </p:spPr>
+        <p:txBody>
+          <a:bodyPr wrap="square" lIns="0" tIns="0" rIns="0" bIns="0" rtlCol="0" anchor="ctr"/>
+          <a:lstStyle/>
+          <a:p>
+            <a:pPr algn="ctr" indent="0" marL="0">
+              <a:buNone/>
+            </a:pPr>
+            <a:r>
+              <a:rPr lang="en-US" sz="1200" b="1" dirty="0">
+                <a:solidFill>
+                  <a:srgbClr val="FFFFFF"/>
+                </a:solidFill>
+                <a:latin typeface="Georgia" pitchFamily="34" charset="0"/>
+                <a:ea typeface="Georgia" pitchFamily="34" charset="-122"/>
+                <a:cs typeface="Georgia" pitchFamily="34" charset="-120"/>
+              </a:rPr>
+              <a:t>✓</a:t>
+            </a:r>
+            <a:endParaRPr lang="en-US" sz="1200" dirty="0"/>
+          </a:p>
+        </p:txBody>
+      </p:sp>
+      <p:sp>
+        <p:nvSpPr>
+          <p:cNvPr id="12" name="Text 9"/>
+          <p:cNvSpPr txBox="1"/>
+          <p:nvPr/>
+        </p:nvSpPr>
+        <p:spPr>
+          <a:xfrm>
+            <a:off x="1280160" y="2697480"/>
+            <a:ext cx="4404208" cy="411480"/>
+          </a:xfrm>
+          <a:prstGeom prst="rect">
+            <a:avLst/>
+          </a:prstGeom>
+          <a:noFill/>
+          <a:ln/>
+        </p:spPr>
+        <p:txBody>
+          <a:bodyPr wrap="square" lIns="0" tIns="0" rIns="0" bIns="0" rtlCol="0" anchor="t">
+            <a:normAutofit/>
+          </a:bodyPr>
+          <a:lstStyle/>
+          <a:p>
+            <a:pPr algn="l" indent="0" marL="0">
+              <a:buNone/>
+            </a:pPr>
+            <a:r>
+              <a:rPr lang="en-US" sz="1500" dirty="0">
                 <a:solidFill>
                   <a:srgbClr val="1F2933"/>
                 </a:solidFill>
@@ -2432,20 +2740,104 @@
                 <a:ea typeface="Arial" pitchFamily="34" charset="-122"/>
                 <a:cs typeface="Arial" pitchFamily="34" charset="-120"/>
               </a:rPr>
-              <a:t>Roadmaps, iteration plans, and status reports come from the same governed documents</a:t>
+              <a:t>What to build and which decision stands</a:t>
             </a:r>
-            <a:endParaRPr lang="en-US" sz="1800" dirty="0"/>
-          </a:p>
-          <a:p>
-            <a:pPr marL="228600" indent="-228600">
-              <a:spcAft>
-                <a:spcPts val="1080"/>
-              </a:spcAft>
-              <a:buSzPct val="100000"/>
-              <a:buChar char="•"/>
+            <a:endParaRPr lang="en-US" sz="1500" dirty="0"/>
+          </a:p>
+        </p:txBody>
+      </p:sp>
+      <p:sp>
+        <p:nvSpPr>
+          <p:cNvPr id="13" name="Shape 10"/>
+          <p:cNvSpPr/>
+          <p:nvPr/>
+        </p:nvSpPr>
+        <p:spPr>
+          <a:xfrm>
+            <a:off x="822960" y="3291840"/>
+            <a:ext cx="292608" cy="292608"/>
+          </a:xfrm>
+          <a:prstGeom prst="ellipse">
+            <a:avLst/>
+          </a:prstGeom>
+          <a:solidFill>
+            <a:srgbClr val="3B6BA8"/>
+          </a:solidFill>
+          <a:ln w="12700">
+            <a:solidFill>
+              <a:srgbClr val="3B6BA8"/>
+            </a:solidFill>
+            <a:prstDash val="solid"/>
+          </a:ln>
+        </p:spPr>
+      </p:sp>
+      <p:sp>
+        <p:nvSpPr>
+          <p:cNvPr id="14" name="Text 11"/>
+          <p:cNvSpPr txBox="1"/>
+          <p:nvPr/>
+        </p:nvSpPr>
+        <p:spPr>
+          <a:xfrm>
+            <a:off x="822960" y="3291840"/>
+            <a:ext cx="292608" cy="292608"/>
+          </a:xfrm>
+          <a:prstGeom prst="rect">
+            <a:avLst/>
+          </a:prstGeom>
+          <a:noFill/>
+          <a:ln/>
+        </p:spPr>
+        <p:txBody>
+          <a:bodyPr wrap="square" lIns="0" tIns="0" rIns="0" bIns="0" rtlCol="0" anchor="ctr"/>
+          <a:lstStyle/>
+          <a:p>
+            <a:pPr algn="ctr" indent="0" marL="0">
+              <a:buNone/>
             </a:pPr>
             <a:r>
-              <a:rPr lang="en-US" sz="1800" dirty="0">
+              <a:rPr lang="en-US" sz="1200" b="1" dirty="0">
+                <a:solidFill>
+                  <a:srgbClr val="FFFFFF"/>
+                </a:solidFill>
+                <a:latin typeface="Georgia" pitchFamily="34" charset="0"/>
+                <a:ea typeface="Georgia" pitchFamily="34" charset="-122"/>
+                <a:cs typeface="Georgia" pitchFamily="34" charset="-120"/>
+              </a:rPr>
+              <a:t>✓</a:t>
+            </a:r>
+            <a:endParaRPr lang="en-US" sz="1200" dirty="0"/>
+          </a:p>
+        </p:txBody>
+      </p:sp>
+      <p:sp>
+        <p:nvSpPr>
+          <p:cNvPr id="15" name="Text 12"/>
+          <p:cNvSpPr txBox="1"/>
+          <p:nvPr/>
+        </p:nvSpPr>
+        <p:spPr>
+          <a:xfrm>
+            <a:off x="1280160" y="3246120"/>
+            <a:ext cx="4404208" cy="411480"/>
+          </a:xfrm>
+          <a:prstGeom prst="rect">
+            <a:avLst/>
+          </a:prstGeom>
+          <a:noFill/>
+          <a:ln/>
+        </p:spPr>
+        <p:txBody>
+          <a:bodyPr wrap="square" lIns="0" tIns="0" rIns="0" bIns="0" rtlCol="0" anchor="t">
+            <a:normAutofit/>
+          </a:bodyPr>
+          <a:lstStyle/>
+          <a:p>
+            <a:pPr algn="l" indent="0" marL="0">
+              <a:buNone/>
+            </a:pPr>
+            <a:r>
+              <a:rPr lang="en-US" sz="1500" dirty="0">
                 <a:solidFill>
                   <a:srgbClr val="1F2933"/>
                 </a:solidFill>
@@ -2453,20 +2845,104 @@
                 <a:ea typeface="Arial" pitchFamily="34" charset="-122"/>
                 <a:cs typeface="Arial" pitchFamily="34" charset="-120"/>
               </a:rPr>
-              <a:t>A status report cites evidence per claim; a client cut never contradicts it</a:t>
+              <a:t>Approval that turns a draft into authority</a:t>
             </a:r>
-            <a:endParaRPr lang="en-US" sz="1800" dirty="0"/>
-          </a:p>
-          <a:p>
-            <a:pPr marL="228600" indent="-228600">
-              <a:spcAft>
-                <a:spcPts val="1080"/>
-              </a:spcAft>
-              <a:buSzPct val="100000"/>
-              <a:buChar char="•"/>
+            <a:endParaRPr lang="en-US" sz="1500" dirty="0"/>
+          </a:p>
+        </p:txBody>
+      </p:sp>
+      <p:sp>
+        <p:nvSpPr>
+          <p:cNvPr id="16" name="Shape 13"/>
+          <p:cNvSpPr/>
+          <p:nvPr/>
+        </p:nvSpPr>
+        <p:spPr>
+          <a:xfrm>
+            <a:off x="822960" y="3840480"/>
+            <a:ext cx="292608" cy="292608"/>
+          </a:xfrm>
+          <a:prstGeom prst="ellipse">
+            <a:avLst/>
+          </a:prstGeom>
+          <a:solidFill>
+            <a:srgbClr val="3B6BA8"/>
+          </a:solidFill>
+          <a:ln w="12700">
+            <a:solidFill>
+              <a:srgbClr val="3B6BA8"/>
+            </a:solidFill>
+            <a:prstDash val="solid"/>
+          </a:ln>
+        </p:spPr>
+      </p:sp>
+      <p:sp>
+        <p:nvSpPr>
+          <p:cNvPr id="17" name="Text 14"/>
+          <p:cNvSpPr txBox="1"/>
+          <p:nvPr/>
+        </p:nvSpPr>
+        <p:spPr>
+          <a:xfrm>
+            <a:off x="822960" y="3840480"/>
+            <a:ext cx="292608" cy="292608"/>
+          </a:xfrm>
+          <a:prstGeom prst="rect">
+            <a:avLst/>
+          </a:prstGeom>
+          <a:noFill/>
+          <a:ln/>
+        </p:spPr>
+        <p:txBody>
+          <a:bodyPr wrap="square" lIns="0" tIns="0" rIns="0" bIns="0" rtlCol="0" anchor="ctr"/>
+          <a:lstStyle/>
+          <a:p>
+            <a:pPr algn="ctr" indent="0" marL="0">
+              <a:buNone/>
             </a:pPr>
             <a:r>
-              <a:rPr lang="en-US" sz="1800" dirty="0">
+              <a:rPr lang="en-US" sz="1200" b="1" dirty="0">
+                <a:solidFill>
+                  <a:srgbClr val="FFFFFF"/>
+                </a:solidFill>
+                <a:latin typeface="Georgia" pitchFamily="34" charset="0"/>
+                <a:ea typeface="Georgia" pitchFamily="34" charset="-122"/>
+                <a:cs typeface="Georgia" pitchFamily="34" charset="-120"/>
+              </a:rPr>
+              <a:t>✓</a:t>
+            </a:r>
+            <a:endParaRPr lang="en-US" sz="1200" dirty="0"/>
+          </a:p>
+        </p:txBody>
+      </p:sp>
+      <p:sp>
+        <p:nvSpPr>
+          <p:cNvPr id="18" name="Text 15"/>
+          <p:cNvSpPr txBox="1"/>
+          <p:nvPr/>
+        </p:nvSpPr>
+        <p:spPr>
+          <a:xfrm>
+            <a:off x="1280160" y="3794760"/>
+            <a:ext cx="4404208" cy="411480"/>
+          </a:xfrm>
+          <a:prstGeom prst="rect">
+            <a:avLst/>
+          </a:prstGeom>
+          <a:noFill/>
+          <a:ln/>
+        </p:spPr>
+        <p:txBody>
+          <a:bodyPr wrap="square" lIns="0" tIns="0" rIns="0" bIns="0" rtlCol="0" anchor="t">
+            <a:normAutofit/>
+          </a:bodyPr>
+          <a:lstStyle/>
+          <a:p>
+            <a:pPr algn="l" indent="0" marL="0">
+              <a:buNone/>
+            </a:pPr>
+            <a:r>
+              <a:rPr lang="en-US" sz="1500" dirty="0">
                 <a:solidFill>
                   <a:srgbClr val="1F2933"/>
                 </a:solidFill>
@@ -2474,20 +2950,104 @@
                 <a:ea typeface="Arial" pitchFamily="34" charset="-122"/>
                 <a:cs typeface="Arial" pitchFamily="34" charset="-120"/>
               </a:rPr>
-              <a:t>A deck or brief projects the documents in a human voice, every number sourced</a:t>
+              <a:t>When the work is complete</a:t>
             </a:r>
-            <a:endParaRPr lang="en-US" sz="1800" dirty="0"/>
-          </a:p>
-          <a:p>
-            <a:pPr marL="228600" indent="-228600">
-              <a:spcAft>
-                <a:spcPts val="1080"/>
-              </a:spcAft>
-              <a:buSzPct val="100000"/>
-              <a:buChar char="•"/>
+            <a:endParaRPr lang="en-US" sz="1500" dirty="0"/>
+          </a:p>
+        </p:txBody>
+      </p:sp>
+      <p:sp>
+        <p:nvSpPr>
+          <p:cNvPr id="19" name="Shape 16"/>
+          <p:cNvSpPr/>
+          <p:nvPr/>
+        </p:nvSpPr>
+        <p:spPr>
+          <a:xfrm>
+            <a:off x="822960" y="4389120"/>
+            <a:ext cx="292608" cy="292608"/>
+          </a:xfrm>
+          <a:prstGeom prst="ellipse">
+            <a:avLst/>
+          </a:prstGeom>
+          <a:solidFill>
+            <a:srgbClr val="3B6BA8"/>
+          </a:solidFill>
+          <a:ln w="12700">
+            <a:solidFill>
+              <a:srgbClr val="3B6BA8"/>
+            </a:solidFill>
+            <a:prstDash val="solid"/>
+          </a:ln>
+        </p:spPr>
+      </p:sp>
+      <p:sp>
+        <p:nvSpPr>
+          <p:cNvPr id="20" name="Text 17"/>
+          <p:cNvSpPr txBox="1"/>
+          <p:nvPr/>
+        </p:nvSpPr>
+        <p:spPr>
+          <a:xfrm>
+            <a:off x="822960" y="4389120"/>
+            <a:ext cx="292608" cy="292608"/>
+          </a:xfrm>
+          <a:prstGeom prst="rect">
+            <a:avLst/>
+          </a:prstGeom>
+          <a:noFill/>
+          <a:ln/>
+        </p:spPr>
+        <p:txBody>
+          <a:bodyPr wrap="square" lIns="0" tIns="0" rIns="0" bIns="0" rtlCol="0" anchor="ctr"/>
+          <a:lstStyle/>
+          <a:p>
+            <a:pPr algn="ctr" indent="0" marL="0">
+              <a:buNone/>
             </a:pPr>
             <a:r>
-              <a:rPr lang="en-US" sz="1800" dirty="0">
+              <a:rPr lang="en-US" sz="1200" b="1" dirty="0">
+                <a:solidFill>
+                  <a:srgbClr val="FFFFFF"/>
+                </a:solidFill>
+                <a:latin typeface="Georgia" pitchFamily="34" charset="0"/>
+                <a:ea typeface="Georgia" pitchFamily="34" charset="-122"/>
+                <a:cs typeface="Georgia" pitchFamily="34" charset="-120"/>
+              </a:rPr>
+              <a:t>✓</a:t>
+            </a:r>
+            <a:endParaRPr lang="en-US" sz="1200" dirty="0"/>
+          </a:p>
+        </p:txBody>
+      </p:sp>
+      <p:sp>
+        <p:nvSpPr>
+          <p:cNvPr id="21" name="Text 18"/>
+          <p:cNvSpPr txBox="1"/>
+          <p:nvPr/>
+        </p:nvSpPr>
+        <p:spPr>
+          <a:xfrm>
+            <a:off x="1280160" y="4343400"/>
+            <a:ext cx="4404208" cy="411480"/>
+          </a:xfrm>
+          <a:prstGeom prst="rect">
+            <a:avLst/>
+          </a:prstGeom>
+          <a:noFill/>
+          <a:ln/>
+        </p:spPr>
+        <p:txBody>
+          <a:bodyPr wrap="square" lIns="0" tIns="0" rIns="0" bIns="0" rtlCol="0" anchor="t">
+            <a:normAutofit/>
+          </a:bodyPr>
+          <a:lstStyle/>
+          <a:p>
+            <a:pPr algn="l" indent="0" marL="0">
+              <a:buNone/>
+            </a:pPr>
+            <a:r>
+              <a:rPr lang="en-US" sz="1500" dirty="0">
                 <a:solidFill>
                   <a:srgbClr val="1F2933"/>
                 </a:solidFill>
@@ -2495,26 +3055,26 @@
                 <a:ea typeface="Arial" pitchFamily="34" charset="-122"/>
                 <a:cs typeface="Arial" pitchFamily="34" charset="-120"/>
               </a:rPr>
-              <a:t>This deck came out of that pipeline, with its own gates and inspection</a:t>
+              <a:t>How much runs unasked, a three-position dial</a:t>
             </a:r>
-            <a:endParaRPr lang="en-US" sz="1800" dirty="0"/>
+            <a:endParaRPr lang="en-US" sz="1500" dirty="0"/>
           </a:p>
         </p:txBody>
       </p:sp>
       <p:sp>
         <p:nvSpPr>
-          <p:cNvPr id="9" name="Shape 6"/>
+          <p:cNvPr id="22" name="Shape 19"/>
           <p:cNvSpPr/>
           <p:nvPr/>
         </p:nvSpPr>
         <p:spPr>
           <a:xfrm>
-            <a:off x="5285613" y="1965960"/>
-            <a:ext cx="1936267" cy="3840480"/>
+            <a:off x="6233008" y="1965960"/>
+            <a:ext cx="5410048" cy="3108960"/>
           </a:xfrm>
           <a:prstGeom prst="roundRect">
             <a:avLst>
-              <a:gd name="adj" fmla="val 4722"/>
+              <a:gd name="adj" fmla="val 2941"/>
             </a:avLst>
           </a:prstGeom>
           <a:solidFill>
@@ -2530,39 +3090,14 @@
       </p:sp>
       <p:sp>
         <p:nvSpPr>
-          <p:cNvPr id="10" name="Shape 7"/>
-          <p:cNvSpPr/>
-          <p:nvPr/>
-        </p:nvSpPr>
-        <p:spPr>
-          <a:xfrm>
-            <a:off x="5818087" y="2423160"/>
-            <a:ext cx="871320" cy="871320"/>
-          </a:xfrm>
-          <a:prstGeom prst="ellipse">
-            <a:avLst/>
-          </a:prstGeom>
-          <a:solidFill>
-            <a:srgbClr val="3B6BA8"/>
-          </a:solidFill>
-          <a:ln w="12700">
-            <a:solidFill>
-              <a:srgbClr val="3B6BA8"/>
-            </a:solidFill>
-            <a:prstDash val="solid"/>
-          </a:ln>
-        </p:spPr>
-      </p:sp>
-      <p:sp>
-        <p:nvSpPr>
-          <p:cNvPr id="11" name="Text 8"/>
+          <p:cNvPr id="23" name="Text 20"/>
           <p:cNvSpPr txBox="1"/>
           <p:nvPr/>
         </p:nvSpPr>
         <p:spPr>
           <a:xfrm>
-            <a:off x="5818087" y="2423160"/>
-            <a:ext cx="871320" cy="871320"/>
+            <a:off x="6507328" y="2148840"/>
+            <a:ext cx="4861408" cy="457200"/>
           </a:xfrm>
           <a:prstGeom prst="rect">
             <a:avLst/>
@@ -2571,37 +3106,39 @@
           <a:ln/>
         </p:spPr>
         <p:txBody>
-          <a:bodyPr wrap="square" lIns="0" tIns="0" rIns="0" bIns="0" rtlCol="0" anchor="ctr"/>
+          <a:bodyPr wrap="square" lIns="0" tIns="0" rIns="0" bIns="0" rtlCol="0" anchor="t">
+            <a:normAutofit/>
+          </a:bodyPr>
           <a:lstStyle/>
           <a:p>
-            <a:pPr algn="ctr" indent="0" marL="0">
+            <a:pPr algn="l" indent="0" marL="0">
               <a:buNone/>
             </a:pPr>
             <a:r>
-              <a:rPr lang="en-US" sz="2400" b="1" dirty="0">
+              <a:rPr lang="en-US" sz="2000" b="1" dirty="0">
                 <a:solidFill>
-                  <a:srgbClr val="FFFFFF"/>
+                  <a:srgbClr val="55606D"/>
                 </a:solidFill>
                 <a:latin typeface="Georgia" pitchFamily="34" charset="0"/>
                 <a:ea typeface="Georgia" pitchFamily="34" charset="-122"/>
                 <a:cs typeface="Georgia" pitchFamily="34" charset="-120"/>
               </a:rPr>
-              <a:t>1</a:t>
+              <a:t>Agents hold</a:t>
             </a:r>
-            <a:endParaRPr lang="en-US" sz="2400" dirty="0"/>
+            <a:endParaRPr lang="en-US" sz="2000" dirty="0"/>
           </a:p>
         </p:txBody>
       </p:sp>
       <p:sp>
         <p:nvSpPr>
-          <p:cNvPr id="12" name="Text 9"/>
+          <p:cNvPr id="24" name="Text 21"/>
           <p:cNvSpPr txBox="1"/>
           <p:nvPr/>
         </p:nvSpPr>
         <p:spPr>
           <a:xfrm>
-            <a:off x="5358765" y="3523080"/>
-            <a:ext cx="1789963" cy="457200"/>
+            <a:off x="6507328" y="2697480"/>
+            <a:ext cx="4861408" cy="411480"/>
           </a:xfrm>
           <a:prstGeom prst="rect">
             <a:avLst/>
@@ -2615,11 +3152,11 @@
           </a:bodyPr>
           <a:lstStyle/>
           <a:p>
-            <a:pPr algn="ctr" indent="0" marL="0">
+            <a:pPr algn="l" indent="0" marL="0">
               <a:buNone/>
             </a:pPr>
             <a:r>
-              <a:rPr lang="en-US" sz="1600" b="1" dirty="0">
+              <a:rPr lang="en-US" sz="1500" dirty="0">
                 <a:solidFill>
                   <a:srgbClr val="1F2933"/>
                 </a:solidFill>
@@ -2627,22 +3164,22 @@
                 <a:ea typeface="Arial" pitchFamily="34" charset="-122"/>
                 <a:cs typeface="Arial" pitchFamily="34" charset="-120"/>
               </a:rPr>
-              <a:t>Status reports</a:t>
+              <a:t>Drafting every document in its template</a:t>
             </a:r>
-            <a:endParaRPr lang="en-US" sz="1600" dirty="0"/>
+            <a:endParaRPr lang="en-US" sz="1500" dirty="0"/>
           </a:p>
         </p:txBody>
       </p:sp>
       <p:sp>
         <p:nvSpPr>
-          <p:cNvPr id="13" name="Text 10"/>
+          <p:cNvPr id="25" name="Text 22"/>
           <p:cNvSpPr txBox="1"/>
           <p:nvPr/>
         </p:nvSpPr>
         <p:spPr>
           <a:xfrm>
-            <a:off x="5422773" y="4026000"/>
-            <a:ext cx="1661947" cy="1597560"/>
+            <a:off x="6507328" y="3246120"/>
+            <a:ext cx="4861408" cy="411480"/>
           </a:xfrm>
           <a:prstGeom prst="rect">
             <a:avLst/>
@@ -2656,143 +3193,11 @@
           </a:bodyPr>
           <a:lstStyle/>
           <a:p>
-            <a:pPr algn="ctr" indent="0" marL="0">
+            <a:pPr algn="l" indent="0" marL="0">
               <a:buNone/>
             </a:pPr>
             <a:r>
-              <a:rPr lang="en-US" sz="1300" dirty="0">
-                <a:solidFill>
-                  <a:srgbClr val="55606D"/>
-                </a:solidFill>
-                <a:latin typeface="Arial" pitchFamily="34" charset="0"/>
-                <a:ea typeface="Arial" pitchFamily="34" charset="-122"/>
-                <a:cs typeface="Arial" pitchFamily="34" charset="-120"/>
-              </a:rPr>
-              <a:t>evidence per claim against the plan</a:t>
-            </a:r>
-            <a:endParaRPr lang="en-US" sz="1300" dirty="0"/>
-          </a:p>
-        </p:txBody>
-      </p:sp>
-      <p:sp>
-        <p:nvSpPr>
-          <p:cNvPr id="14" name="Shape 11"/>
-          <p:cNvSpPr/>
-          <p:nvPr/>
-        </p:nvSpPr>
-        <p:spPr>
-          <a:xfrm>
-            <a:off x="7496200" y="1965960"/>
-            <a:ext cx="1936267" cy="3840480"/>
-          </a:xfrm>
-          <a:prstGeom prst="roundRect">
-            <a:avLst>
-              <a:gd name="adj" fmla="val 4722"/>
-            </a:avLst>
-          </a:prstGeom>
-          <a:solidFill>
-            <a:srgbClr val="F3F5F8"/>
-          </a:solidFill>
-          <a:ln w="9525">
-            <a:solidFill>
-              <a:srgbClr val="D6DCE4"/>
-            </a:solidFill>
-            <a:prstDash val="solid"/>
-          </a:ln>
-        </p:spPr>
-      </p:sp>
-      <p:sp>
-        <p:nvSpPr>
-          <p:cNvPr id="15" name="Shape 12"/>
-          <p:cNvSpPr/>
-          <p:nvPr/>
-        </p:nvSpPr>
-        <p:spPr>
-          <a:xfrm>
-            <a:off x="8028674" y="2423160"/>
-            <a:ext cx="871320" cy="871320"/>
-          </a:xfrm>
-          <a:prstGeom prst="ellipse">
-            <a:avLst/>
-          </a:prstGeom>
-          <a:solidFill>
-            <a:srgbClr val="6842A8"/>
-          </a:solidFill>
-          <a:ln w="12700">
-            <a:solidFill>
-              <a:srgbClr val="6842A8"/>
-            </a:solidFill>
-            <a:prstDash val="solid"/>
-          </a:ln>
-        </p:spPr>
-      </p:sp>
-      <p:sp>
-        <p:nvSpPr>
-          <p:cNvPr id="16" name="Text 13"/>
-          <p:cNvSpPr txBox="1"/>
-          <p:nvPr/>
-        </p:nvSpPr>
-        <p:spPr>
-          <a:xfrm>
-            <a:off x="8028674" y="2423160"/>
-            <a:ext cx="871320" cy="871320"/>
-          </a:xfrm>
-          <a:prstGeom prst="rect">
-            <a:avLst/>
-          </a:prstGeom>
-          <a:noFill/>
-          <a:ln/>
-        </p:spPr>
-        <p:txBody>
-          <a:bodyPr wrap="square" lIns="0" tIns="0" rIns="0" bIns="0" rtlCol="0" anchor="ctr"/>
-          <a:lstStyle/>
-          <a:p>
-            <a:pPr algn="ctr" indent="0" marL="0">
-              <a:buNone/>
-            </a:pPr>
-            <a:r>
-              <a:rPr lang="en-US" sz="2400" b="1" dirty="0">
-                <a:solidFill>
-                  <a:srgbClr val="FFFFFF"/>
-                </a:solidFill>
-                <a:latin typeface="Georgia" pitchFamily="34" charset="0"/>
-                <a:ea typeface="Georgia" pitchFamily="34" charset="-122"/>
-                <a:cs typeface="Georgia" pitchFamily="34" charset="-120"/>
-              </a:rPr>
-              <a:t>2</a:t>
-            </a:r>
-            <a:endParaRPr lang="en-US" sz="2400" dirty="0"/>
-          </a:p>
-        </p:txBody>
-      </p:sp>
-      <p:sp>
-        <p:nvSpPr>
-          <p:cNvPr id="17" name="Text 14"/>
-          <p:cNvSpPr txBox="1"/>
-          <p:nvPr/>
-        </p:nvSpPr>
-        <p:spPr>
-          <a:xfrm>
-            <a:off x="7569352" y="3523080"/>
-            <a:ext cx="1789963" cy="457200"/>
-          </a:xfrm>
-          <a:prstGeom prst="rect">
-            <a:avLst/>
-          </a:prstGeom>
-          <a:noFill/>
-          <a:ln/>
-        </p:spPr>
-        <p:txBody>
-          <a:bodyPr wrap="square" lIns="0" tIns="0" rIns="0" bIns="0" rtlCol="0" anchor="t">
-            <a:normAutofit/>
-          </a:bodyPr>
-          <a:lstStyle/>
-          <a:p>
-            <a:pPr algn="ctr" indent="0" marL="0">
-              <a:buNone/>
-            </a:pPr>
-            <a:r>
-              <a:rPr lang="en-US" sz="1600" b="1" dirty="0">
+              <a:rPr lang="en-US" sz="1500" dirty="0">
                 <a:solidFill>
                   <a:srgbClr val="1F2933"/>
                 </a:solidFill>
@@ -2800,22 +3205,22 @@
                 <a:ea typeface="Arial" pitchFamily="34" charset="-122"/>
                 <a:cs typeface="Arial" pitchFamily="34" charset="-120"/>
               </a:rPr>
-              <a:t>Decks and briefs</a:t>
+              <a:t>Checking each draft against the layer above</a:t>
             </a:r>
-            <a:endParaRPr lang="en-US" sz="1600" dirty="0"/>
+            <a:endParaRPr lang="en-US" sz="1500" dirty="0"/>
           </a:p>
         </p:txBody>
       </p:sp>
       <p:sp>
         <p:nvSpPr>
-          <p:cNvPr id="18" name="Text 15"/>
+          <p:cNvPr id="26" name="Text 23"/>
           <p:cNvSpPr txBox="1"/>
           <p:nvPr/>
         </p:nvSpPr>
         <p:spPr>
           <a:xfrm>
-            <a:off x="7633360" y="4026000"/>
-            <a:ext cx="1661947" cy="1597560"/>
+            <a:off x="6507328" y="3794760"/>
+            <a:ext cx="4861408" cy="411480"/>
           </a:xfrm>
           <a:prstGeom prst="rect">
             <a:avLst/>
@@ -2829,143 +3234,11 @@
           </a:bodyPr>
           <a:lstStyle/>
           <a:p>
-            <a:pPr algn="ctr" indent="0" marL="0">
+            <a:pPr algn="l" indent="0" marL="0">
               <a:buNone/>
             </a:pPr>
             <a:r>
-              <a:rPr lang="en-US" sz="1300" dirty="0">
-                <a:solidFill>
-                  <a:srgbClr val="55606D"/>
-                </a:solidFill>
-                <a:latin typeface="Arial" pitchFamily="34" charset="0"/>
-                <a:ea typeface="Arial" pitchFamily="34" charset="-122"/>
-                <a:cs typeface="Arial" pitchFamily="34" charset="-120"/>
-              </a:rPr>
-              <a:t>the human-facing projection</a:t>
-            </a:r>
-            <a:endParaRPr lang="en-US" sz="1300" dirty="0"/>
-          </a:p>
-        </p:txBody>
-      </p:sp>
-      <p:sp>
-        <p:nvSpPr>
-          <p:cNvPr id="19" name="Shape 16"/>
-          <p:cNvSpPr/>
-          <p:nvPr/>
-        </p:nvSpPr>
-        <p:spPr>
-          <a:xfrm>
-            <a:off x="9706788" y="1965960"/>
-            <a:ext cx="1936267" cy="3840480"/>
-          </a:xfrm>
-          <a:prstGeom prst="roundRect">
-            <a:avLst>
-              <a:gd name="adj" fmla="val 4722"/>
-            </a:avLst>
-          </a:prstGeom>
-          <a:solidFill>
-            <a:srgbClr val="F3F5F8"/>
-          </a:solidFill>
-          <a:ln w="9525">
-            <a:solidFill>
-              <a:srgbClr val="D6DCE4"/>
-            </a:solidFill>
-            <a:prstDash val="solid"/>
-          </a:ln>
-        </p:spPr>
-      </p:sp>
-      <p:sp>
-        <p:nvSpPr>
-          <p:cNvPr id="20" name="Shape 17"/>
-          <p:cNvSpPr/>
-          <p:nvPr/>
-        </p:nvSpPr>
-        <p:spPr>
-          <a:xfrm>
-            <a:off x="10239261" y="2423160"/>
-            <a:ext cx="871320" cy="871320"/>
-          </a:xfrm>
-          <a:prstGeom prst="ellipse">
-            <a:avLst/>
-          </a:prstGeom>
-          <a:solidFill>
-            <a:srgbClr val="C44B2F"/>
-          </a:solidFill>
-          <a:ln w="12700">
-            <a:solidFill>
-              <a:srgbClr val="C44B2F"/>
-            </a:solidFill>
-            <a:prstDash val="solid"/>
-          </a:ln>
-        </p:spPr>
-      </p:sp>
-      <p:sp>
-        <p:nvSpPr>
-          <p:cNvPr id="21" name="Text 18"/>
-          <p:cNvSpPr txBox="1"/>
-          <p:nvPr/>
-        </p:nvSpPr>
-        <p:spPr>
-          <a:xfrm>
-            <a:off x="10239261" y="2423160"/>
-            <a:ext cx="871320" cy="871320"/>
-          </a:xfrm>
-          <a:prstGeom prst="rect">
-            <a:avLst/>
-          </a:prstGeom>
-          <a:noFill/>
-          <a:ln/>
-        </p:spPr>
-        <p:txBody>
-          <a:bodyPr wrap="square" lIns="0" tIns="0" rIns="0" bIns="0" rtlCol="0" anchor="ctr"/>
-          <a:lstStyle/>
-          <a:p>
-            <a:pPr algn="ctr" indent="0" marL="0">
-              <a:buNone/>
-            </a:pPr>
-            <a:r>
-              <a:rPr lang="en-US" sz="2400" b="1" dirty="0">
-                <a:solidFill>
-                  <a:srgbClr val="FFFFFF"/>
-                </a:solidFill>
-                <a:latin typeface="Georgia" pitchFamily="34" charset="0"/>
-                <a:ea typeface="Georgia" pitchFamily="34" charset="-122"/>
-                <a:cs typeface="Georgia" pitchFamily="34" charset="-120"/>
-              </a:rPr>
-              <a:t>3</a:t>
-            </a:r>
-            <a:endParaRPr lang="en-US" sz="2400" dirty="0"/>
-          </a:p>
-        </p:txBody>
-      </p:sp>
-      <p:sp>
-        <p:nvSpPr>
-          <p:cNvPr id="22" name="Text 19"/>
-          <p:cNvSpPr txBox="1"/>
-          <p:nvPr/>
-        </p:nvSpPr>
-        <p:spPr>
-          <a:xfrm>
-            <a:off x="9779940" y="3523080"/>
-            <a:ext cx="1789963" cy="457200"/>
-          </a:xfrm>
-          <a:prstGeom prst="rect">
-            <a:avLst/>
-          </a:prstGeom>
-          <a:noFill/>
-          <a:ln/>
-        </p:spPr>
-        <p:txBody>
-          <a:bodyPr wrap="square" lIns="0" tIns="0" rIns="0" bIns="0" rtlCol="0" anchor="t">
-            <a:normAutofit/>
-          </a:bodyPr>
-          <a:lstStyle/>
-          <a:p>
-            <a:pPr algn="ctr" indent="0" marL="0">
-              <a:buNone/>
-            </a:pPr>
-            <a:r>
-              <a:rPr lang="en-US" sz="1600" b="1" dirty="0">
+              <a:rPr lang="en-US" sz="1500" dirty="0">
                 <a:solidFill>
                   <a:srgbClr val="1F2933"/>
                 </a:solidFill>
@@ -2973,22 +3246,22 @@
                 <a:ea typeface="Arial" pitchFamily="34" charset="-122"/>
                 <a:cs typeface="Arial" pitchFamily="34" charset="-120"/>
               </a:rPr>
-              <a:t>Release notes</a:t>
+              <a:t>Surfacing drift, contradictions, and gaps</a:t>
             </a:r>
-            <a:endParaRPr lang="en-US" sz="1600" dirty="0"/>
+            <a:endParaRPr lang="en-US" sz="1500" dirty="0"/>
           </a:p>
         </p:txBody>
       </p:sp>
       <p:sp>
         <p:nvSpPr>
-          <p:cNvPr id="23" name="Text 20"/>
+          <p:cNvPr id="27" name="Text 24"/>
           <p:cNvSpPr txBox="1"/>
           <p:nvPr/>
         </p:nvSpPr>
         <p:spPr>
           <a:xfrm>
-            <a:off x="9843948" y="4026000"/>
-            <a:ext cx="1661947" cy="1597560"/>
+            <a:off x="6507328" y="4343400"/>
+            <a:ext cx="4861408" cy="411480"/>
           </a:xfrm>
           <a:prstGeom prst="rect">
             <a:avLst/>
@@ -3002,21 +3275,62 @@
           </a:bodyPr>
           <a:lstStyle/>
           <a:p>
-            <a:pPr algn="ctr" indent="0" marL="0">
+            <a:pPr algn="l" indent="0" marL="0">
               <a:buNone/>
             </a:pPr>
             <a:r>
-              <a:rPr lang="en-US" sz="1300" dirty="0">
+              <a:rPr lang="en-US" sz="1500" dirty="0">
                 <a:solidFill>
-                  <a:srgbClr val="55606D"/>
+                  <a:srgbClr val="1F2933"/>
                 </a:solidFill>
                 <a:latin typeface="Arial" pitchFamily="34" charset="0"/>
                 <a:ea typeface="Arial" pitchFamily="34" charset="-122"/>
                 <a:cs typeface="Arial" pitchFamily="34" charset="-120"/>
               </a:rPr>
-              <a:t>from the deploy documents</a:t>
+              <a:t>Stopping at the triggers and handing judgment back</a:t>
             </a:r>
-            <a:endParaRPr lang="en-US" sz="1300" dirty="0"/>
+            <a:endParaRPr lang="en-US" sz="1500" dirty="0"/>
+          </a:p>
+        </p:txBody>
+      </p:sp>
+      <p:sp>
+        <p:nvSpPr>
+          <p:cNvPr id="28" name="Text 25"/>
+          <p:cNvSpPr txBox="1"/>
+          <p:nvPr/>
+        </p:nvSpPr>
+        <p:spPr>
+          <a:xfrm>
+            <a:off x="548640" y="5257800"/>
+            <a:ext cx="11094415" cy="548640"/>
+          </a:xfrm>
+          <a:prstGeom prst="rect">
+            <a:avLst/>
+          </a:prstGeom>
+          <a:noFill/>
+          <a:ln/>
+        </p:spPr>
+        <p:txBody>
+          <a:bodyPr wrap="square" lIns="0" tIns="0" rIns="0" bIns="0" rtlCol="0" anchor="ctr">
+            <a:normAutofit/>
+          </a:bodyPr>
+          <a:lstStyle/>
+          <a:p>
+            <a:pPr algn="l" indent="0" marL="0">
+              <a:buNone/>
+            </a:pPr>
+            <a:r>
+              <a:rPr lang="en-US" sz="1500" b="1" dirty="0">
+                <a:solidFill>
+                  <a:srgbClr val="C44B2F"/>
+                </a:solidFill>
+                <a:latin typeface="Arial" pitchFamily="34" charset="0"/>
+                <a:ea typeface="Arial" pitchFamily="34" charset="-122"/>
+                <a:cs typeface="Arial" pitchFamily="34" charset="-120"/>
+              </a:rPr>
+              <a:t>Verdict: the hand-offs have owners and rules, never an implied one</a:t>
+            </a:r>
+            <a:endParaRPr lang="en-US" sz="1500" dirty="0"/>
           </a:p>
         </p:txBody>
       </p:sp>
@@ -3151,7 +3465,7 @@
                 <a:ea typeface="Georgia" pitchFamily="34" charset="-122"/>
                 <a:cs typeface="Georgia" pitchFamily="34" charset="-120"/>
               </a:rPr>
-              <a:t>Pilot HELIX for one quarter and count what the documents catch</a:t>
+              <a:t>Pilot HELIX for one quarter and count what each gate catches</a:t>
             </a:r>
             <a:endParaRPr lang="en-US" sz="3600" dirty="0"/>
           </a:p>
@@ -3297,7 +3611,7 @@
                 <a:ea typeface="Arial" pitchFamily="34" charset="-122"/>
                 <a:cs typeface="Arial" pitchFamily="34" charset="-120"/>
               </a:rPr>
-              <a:t>Pilot HELIX for one quarter and count what the documents catch</a:t>
+              <a:t>Pilot HELIX for one quarter and count what each gate catches</a:t>
             </a:r>
             <a:endParaRPr lang="en-US" sz="1800" dirty="0"/>
           </a:p>
@@ -3835,7 +4149,7 @@
                 <a:ea typeface="Arial" pitchFamily="34" charset="-122"/>
                 <a:cs typeface="Arial" pitchFamily="34" charset="-120"/>
               </a:rPr>
-              <a:t>Review the findings together after four weeks against the bar of under 3 drift findings per check</a:t>
+              <a:t>Review the findings together after four weeks against the bar of under 3 findings per check</a:t>
             </a:r>
             <a:endParaRPr lang="en-US" sz="1500" dirty="0"/>
           </a:p>
@@ -4277,7 +4591,7 @@
                   </a:tcPr>
                 </a:tc>
               </a:tr>
-              <a:tr h="384048">
+              <a:tr h="566928">
                 <a:tc>
                   <a:txBody>
                     <a:bodyPr/>
@@ -5256,212 +5570,6 @@
                           <a:cs typeface="Arial" pitchFamily="34" charset="-120"/>
                         </a:rPr>
                         <a:t>workflows/README.md#activities, workflows/README.md#authority-hierarchy, workflows/artifact-hierarchy.md</a:t>
-                      </a:r>
-                      <a:endParaRPr lang="en-US" sz="1200" dirty="0">
-                        <a:latin typeface="Arial" charset="0"/>
-                        <a:ea typeface="Arial" charset="0"/>
-                        <a:cs typeface="Arial" charset="0"/>
-                      </a:endParaRPr>
-                    </a:p>
-                  </a:txBody>
-                  <a:tcPr marL="73152" marR="73152" marT="73152" marB="73152" anchor="ctr">
-                    <a:lnL w="9525" cap="flat" cmpd="sng" algn="ctr">
-                      <a:solidFill>
-                        <a:srgbClr val="D6DCE4"/>
-                      </a:solidFill>
-                      <a:prstDash val="solid"/>
-                      <a:round/>
-                      <a:headEnd type="none" w="med" len="med"/>
-                      <a:tailEnd type="none" w="med" len="med"/>
-                    </a:lnL>
-                    <a:lnR w="9525" cap="flat" cmpd="sng" algn="ctr">
-                      <a:solidFill>
-                        <a:srgbClr val="D6DCE4"/>
-                      </a:solidFill>
-                      <a:prstDash val="solid"/>
-                      <a:round/>
-                      <a:headEnd type="none" w="med" len="med"/>
-                      <a:tailEnd type="none" w="med" len="med"/>
-                    </a:lnR>
-                    <a:lnT w="9525" cap="flat" cmpd="sng" algn="ctr">
-                      <a:solidFill>
-                        <a:srgbClr val="D6DCE4"/>
-                      </a:solidFill>
-                      <a:prstDash val="solid"/>
-                      <a:round/>
-                      <a:headEnd type="none" w="med" len="med"/>
-                      <a:tailEnd type="none" w="med" len="med"/>
-                    </a:lnT>
-                    <a:lnB w="9525" cap="flat" cmpd="sng" algn="ctr">
-                      <a:solidFill>
-                        <a:srgbClr val="D6DCE4"/>
-                      </a:solidFill>
-                      <a:prstDash val="solid"/>
-                      <a:round/>
-                      <a:headEnd type="none" w="med" len="med"/>
-                      <a:tailEnd type="none" w="med" len="med"/>
-                    </a:lnB>
-                    <a:solidFill>
-                      <a:srgbClr val="FFFFFF"/>
-                    </a:solidFill>
-                  </a:tcPr>
-                </a:tc>
-              </a:tr>
-              <a:tr h="566928">
-                <a:tc>
-                  <a:txBody>
-                    <a:bodyPr/>
-                    <a:lstStyle/>
-                    <a:p>
-                      <a:pPr indent="0" marL="0">
-                        <a:buNone/>
-                      </a:pPr>
-                      <a:r>
-                        <a:rPr lang="en-US" sz="1200" b="1" dirty="0">
-                          <a:solidFill>
-                            <a:srgbClr val="55606D"/>
-                          </a:solidFill>
-                          <a:latin typeface="Arial" pitchFamily="34" charset="0"/>
-                          <a:ea typeface="Arial" pitchFamily="34" charset="-122"/>
-                          <a:cs typeface="Arial" pitchFamily="34" charset="-120"/>
-                        </a:rPr>
-                        <a:t>S6</a:t>
-                      </a:r>
-                      <a:endParaRPr lang="en-US" sz="1200" dirty="0">
-                        <a:latin typeface="Arial" charset="0"/>
-                        <a:ea typeface="Arial" charset="0"/>
-                        <a:cs typeface="Arial" charset="0"/>
-                      </a:endParaRPr>
-                    </a:p>
-                  </a:txBody>
-                  <a:tcPr marL="73152" marR="73152" marT="73152" marB="73152" anchor="ctr">
-                    <a:lnL w="9525" cap="flat" cmpd="sng" algn="ctr">
-                      <a:solidFill>
-                        <a:srgbClr val="D6DCE4"/>
-                      </a:solidFill>
-                      <a:prstDash val="solid"/>
-                      <a:round/>
-                      <a:headEnd type="none" w="med" len="med"/>
-                      <a:tailEnd type="none" w="med" len="med"/>
-                    </a:lnL>
-                    <a:lnR w="9525" cap="flat" cmpd="sng" algn="ctr">
-                      <a:solidFill>
-                        <a:srgbClr val="D6DCE4"/>
-                      </a:solidFill>
-                      <a:prstDash val="solid"/>
-                      <a:round/>
-                      <a:headEnd type="none" w="med" len="med"/>
-                      <a:tailEnd type="none" w="med" len="med"/>
-                    </a:lnR>
-                    <a:lnT w="9525" cap="flat" cmpd="sng" algn="ctr">
-                      <a:solidFill>
-                        <a:srgbClr val="D6DCE4"/>
-                      </a:solidFill>
-                      <a:prstDash val="solid"/>
-                      <a:round/>
-                      <a:headEnd type="none" w="med" len="med"/>
-                      <a:tailEnd type="none" w="med" len="med"/>
-                    </a:lnT>
-                    <a:lnB w="9525" cap="flat" cmpd="sng" algn="ctr">
-                      <a:solidFill>
-                        <a:srgbClr val="D6DCE4"/>
-                      </a:solidFill>
-                      <a:prstDash val="solid"/>
-                      <a:round/>
-                      <a:headEnd type="none" w="med" len="med"/>
-                      <a:tailEnd type="none" w="med" len="med"/>
-                    </a:lnB>
-                    <a:solidFill>
-                      <a:srgbClr val="FFFFFF"/>
-                    </a:solidFill>
-                  </a:tcPr>
-                </a:tc>
-                <a:tc>
-                  <a:txBody>
-                    <a:bodyPr/>
-                    <a:lstStyle/>
-                    <a:p>
-                      <a:pPr indent="0" marL="0">
-                        <a:buNone/>
-                      </a:pPr>
-                      <a:r>
-                        <a:rPr lang="en-US" sz="1200" dirty="0">
-                          <a:solidFill>
-                            <a:srgbClr val="1F2933"/>
-                          </a:solidFill>
-                          <a:latin typeface="Arial" pitchFamily="34" charset="0"/>
-                          <a:ea typeface="Arial" pitchFamily="34" charset="-122"/>
-                          <a:cs typeface="Arial" pitchFamily="34" charset="-120"/>
-                        </a:rPr>
-                        <a:t>Twenty-one routed modes in the routing table; alignment is the required mode</a:t>
-                      </a:r>
-                      <a:endParaRPr lang="en-US" sz="1200" dirty="0">
-                        <a:latin typeface="Arial" charset="0"/>
-                        <a:ea typeface="Arial" charset="0"/>
-                        <a:cs typeface="Arial" charset="0"/>
-                      </a:endParaRPr>
-                    </a:p>
-                  </a:txBody>
-                  <a:tcPr marL="73152" marR="73152" marT="73152" marB="73152" anchor="ctr">
-                    <a:lnL w="9525" cap="flat" cmpd="sng" algn="ctr">
-                      <a:solidFill>
-                        <a:srgbClr val="D6DCE4"/>
-                      </a:solidFill>
-                      <a:prstDash val="solid"/>
-                      <a:round/>
-                      <a:headEnd type="none" w="med" len="med"/>
-                      <a:tailEnd type="none" w="med" len="med"/>
-                    </a:lnL>
-                    <a:lnR w="9525" cap="flat" cmpd="sng" algn="ctr">
-                      <a:solidFill>
-                        <a:srgbClr val="D6DCE4"/>
-                      </a:solidFill>
-                      <a:prstDash val="solid"/>
-                      <a:round/>
-                      <a:headEnd type="none" w="med" len="med"/>
-                      <a:tailEnd type="none" w="med" len="med"/>
-                    </a:lnR>
-                    <a:lnT w="9525" cap="flat" cmpd="sng" algn="ctr">
-                      <a:solidFill>
-                        <a:srgbClr val="D6DCE4"/>
-                      </a:solidFill>
-                      <a:prstDash val="solid"/>
-                      <a:round/>
-                      <a:headEnd type="none" w="med" len="med"/>
-                      <a:tailEnd type="none" w="med" len="med"/>
-                    </a:lnT>
-                    <a:lnB w="9525" cap="flat" cmpd="sng" algn="ctr">
-                      <a:solidFill>
-                        <a:srgbClr val="D6DCE4"/>
-                      </a:solidFill>
-                      <a:prstDash val="solid"/>
-                      <a:round/>
-                      <a:headEnd type="none" w="med" len="med"/>
-                      <a:tailEnd type="none" w="med" len="med"/>
-                    </a:lnB>
-                    <a:solidFill>
-                      <a:srgbClr val="FFFFFF"/>
-                    </a:solidFill>
-                  </a:tcPr>
-                </a:tc>
-                <a:tc>
-                  <a:txBody>
-                    <a:bodyPr/>
-                    <a:lstStyle/>
-                    <a:p>
-                      <a:pPr indent="0" marL="0">
-                        <a:buNone/>
-                      </a:pPr>
-                      <a:r>
-                        <a:rPr lang="en-US" sz="1200" dirty="0">
-                          <a:solidFill>
-                            <a:srgbClr val="1F2933"/>
-                          </a:solidFill>
-                          <a:latin typeface="Arial" pitchFamily="34" charset="0"/>
-                          <a:ea typeface="Arial" pitchFamily="34" charset="-122"/>
-                          <a:cs typeface="Arial" pitchFamily="34" charset="-120"/>
-                        </a:rPr>
-                        <a:t>skills/helix/SKILL.md#routing-rules, docs/helix/01-frame/prd.md#goals</a:t>
                       </a:r>
                       <a:endParaRPr lang="en-US" sz="1200" dirty="0">
                         <a:latin typeface="Arial" charset="0"/>
@@ -5862,6 +5970,212 @@
                   </a:tcPr>
                 </a:tc>
               </a:tr>
+              <a:tr h="566928">
+                <a:tc>
+                  <a:txBody>
+                    <a:bodyPr/>
+                    <a:lstStyle/>
+                    <a:p>
+                      <a:pPr indent="0" marL="0">
+                        <a:buNone/>
+                      </a:pPr>
+                      <a:r>
+                        <a:rPr lang="en-US" sz="1200" b="1" dirty="0">
+                          <a:solidFill>
+                            <a:srgbClr val="55606D"/>
+                          </a:solidFill>
+                          <a:latin typeface="Arial" pitchFamily="34" charset="0"/>
+                          <a:ea typeface="Arial" pitchFamily="34" charset="-122"/>
+                          <a:cs typeface="Arial" pitchFamily="34" charset="-120"/>
+                        </a:rPr>
+                        <a:t>S6</a:t>
+                      </a:r>
+                      <a:endParaRPr lang="en-US" sz="1200" dirty="0">
+                        <a:latin typeface="Arial" charset="0"/>
+                        <a:ea typeface="Arial" charset="0"/>
+                        <a:cs typeface="Arial" charset="0"/>
+                      </a:endParaRPr>
+                    </a:p>
+                  </a:txBody>
+                  <a:tcPr marL="73152" marR="73152" marT="73152" marB="73152" anchor="ctr">
+                    <a:lnL w="9525" cap="flat" cmpd="sng" algn="ctr">
+                      <a:solidFill>
+                        <a:srgbClr val="D6DCE4"/>
+                      </a:solidFill>
+                      <a:prstDash val="solid"/>
+                      <a:round/>
+                      <a:headEnd type="none" w="med" len="med"/>
+                      <a:tailEnd type="none" w="med" len="med"/>
+                    </a:lnL>
+                    <a:lnR w="9525" cap="flat" cmpd="sng" algn="ctr">
+                      <a:solidFill>
+                        <a:srgbClr val="D6DCE4"/>
+                      </a:solidFill>
+                      <a:prstDash val="solid"/>
+                      <a:round/>
+                      <a:headEnd type="none" w="med" len="med"/>
+                      <a:tailEnd type="none" w="med" len="med"/>
+                    </a:lnR>
+                    <a:lnT w="9525" cap="flat" cmpd="sng" algn="ctr">
+                      <a:solidFill>
+                        <a:srgbClr val="D6DCE4"/>
+                      </a:solidFill>
+                      <a:prstDash val="solid"/>
+                      <a:round/>
+                      <a:headEnd type="none" w="med" len="med"/>
+                      <a:tailEnd type="none" w="med" len="med"/>
+                    </a:lnT>
+                    <a:lnB w="9525" cap="flat" cmpd="sng" algn="ctr">
+                      <a:solidFill>
+                        <a:srgbClr val="D6DCE4"/>
+                      </a:solidFill>
+                      <a:prstDash val="solid"/>
+                      <a:round/>
+                      <a:headEnd type="none" w="med" len="med"/>
+                      <a:tailEnd type="none" w="med" len="med"/>
+                    </a:lnB>
+                    <a:solidFill>
+                      <a:srgbClr val="FFFFFF"/>
+                    </a:solidFill>
+                  </a:tcPr>
+                </a:tc>
+                <a:tc>
+                  <a:txBody>
+                    <a:bodyPr/>
+                    <a:lstStyle/>
+                    <a:p>
+                      <a:pPr indent="0" marL="0">
+                        <a:buNone/>
+                      </a:pPr>
+                      <a:r>
+                        <a:rPr lang="en-US" sz="1200" dirty="0">
+                          <a:solidFill>
+                            <a:srgbClr val="1F2933"/>
+                          </a:solidFill>
+                          <a:latin typeface="Arial" pitchFamily="34" charset="0"/>
+                          <a:ea typeface="Arial" pitchFamily="34" charset="-122"/>
+                          <a:cs typeface="Arial" pitchFamily="34" charset="-120"/>
+                        </a:rPr>
+                        <a:t>Twenty-one routed modes in the routing table; alignment is the required mode</a:t>
+                      </a:r>
+                      <a:endParaRPr lang="en-US" sz="1200" dirty="0">
+                        <a:latin typeface="Arial" charset="0"/>
+                        <a:ea typeface="Arial" charset="0"/>
+                        <a:cs typeface="Arial" charset="0"/>
+                      </a:endParaRPr>
+                    </a:p>
+                  </a:txBody>
+                  <a:tcPr marL="73152" marR="73152" marT="73152" marB="73152" anchor="ctr">
+                    <a:lnL w="9525" cap="flat" cmpd="sng" algn="ctr">
+                      <a:solidFill>
+                        <a:srgbClr val="D6DCE4"/>
+                      </a:solidFill>
+                      <a:prstDash val="solid"/>
+                      <a:round/>
+                      <a:headEnd type="none" w="med" len="med"/>
+                      <a:tailEnd type="none" w="med" len="med"/>
+                    </a:lnL>
+                    <a:lnR w="9525" cap="flat" cmpd="sng" algn="ctr">
+                      <a:solidFill>
+                        <a:srgbClr val="D6DCE4"/>
+                      </a:solidFill>
+                      <a:prstDash val="solid"/>
+                      <a:round/>
+                      <a:headEnd type="none" w="med" len="med"/>
+                      <a:tailEnd type="none" w="med" len="med"/>
+                    </a:lnR>
+                    <a:lnT w="9525" cap="flat" cmpd="sng" algn="ctr">
+                      <a:solidFill>
+                        <a:srgbClr val="D6DCE4"/>
+                      </a:solidFill>
+                      <a:prstDash val="solid"/>
+                      <a:round/>
+                      <a:headEnd type="none" w="med" len="med"/>
+                      <a:tailEnd type="none" w="med" len="med"/>
+                    </a:lnT>
+                    <a:lnB w="9525" cap="flat" cmpd="sng" algn="ctr">
+                      <a:solidFill>
+                        <a:srgbClr val="D6DCE4"/>
+                      </a:solidFill>
+                      <a:prstDash val="solid"/>
+                      <a:round/>
+                      <a:headEnd type="none" w="med" len="med"/>
+                      <a:tailEnd type="none" w="med" len="med"/>
+                    </a:lnB>
+                    <a:solidFill>
+                      <a:srgbClr val="FFFFFF"/>
+                    </a:solidFill>
+                  </a:tcPr>
+                </a:tc>
+                <a:tc>
+                  <a:txBody>
+                    <a:bodyPr/>
+                    <a:lstStyle/>
+                    <a:p>
+                      <a:pPr indent="0" marL="0">
+                        <a:buNone/>
+                      </a:pPr>
+                      <a:r>
+                        <a:rPr lang="en-US" sz="1200" dirty="0">
+                          <a:solidFill>
+                            <a:srgbClr val="1F2933"/>
+                          </a:solidFill>
+                          <a:latin typeface="Arial" pitchFamily="34" charset="0"/>
+                          <a:ea typeface="Arial" pitchFamily="34" charset="-122"/>
+                          <a:cs typeface="Arial" pitchFamily="34" charset="-120"/>
+                        </a:rPr>
+                        <a:t>skills/helix/SKILL.md#routing-rules, docs/helix/01-frame/prd.md#goals</a:t>
+                      </a:r>
+                      <a:endParaRPr lang="en-US" sz="1200" dirty="0">
+                        <a:latin typeface="Arial" charset="0"/>
+                        <a:ea typeface="Arial" charset="0"/>
+                        <a:cs typeface="Arial" charset="0"/>
+                      </a:endParaRPr>
+                    </a:p>
+                  </a:txBody>
+                  <a:tcPr marL="73152" marR="73152" marT="73152" marB="73152" anchor="ctr">
+                    <a:lnL w="9525" cap="flat" cmpd="sng" algn="ctr">
+                      <a:solidFill>
+                        <a:srgbClr val="D6DCE4"/>
+                      </a:solidFill>
+                      <a:prstDash val="solid"/>
+                      <a:round/>
+                      <a:headEnd type="none" w="med" len="med"/>
+                      <a:tailEnd type="none" w="med" len="med"/>
+                    </a:lnL>
+                    <a:lnR w="9525" cap="flat" cmpd="sng" algn="ctr">
+                      <a:solidFill>
+                        <a:srgbClr val="D6DCE4"/>
+                      </a:solidFill>
+                      <a:prstDash val="solid"/>
+                      <a:round/>
+                      <a:headEnd type="none" w="med" len="med"/>
+                      <a:tailEnd type="none" w="med" len="med"/>
+                    </a:lnR>
+                    <a:lnT w="9525" cap="flat" cmpd="sng" algn="ctr">
+                      <a:solidFill>
+                        <a:srgbClr val="D6DCE4"/>
+                      </a:solidFill>
+                      <a:prstDash val="solid"/>
+                      <a:round/>
+                      <a:headEnd type="none" w="med" len="med"/>
+                      <a:tailEnd type="none" w="med" len="med"/>
+                    </a:lnT>
+                    <a:lnB w="9525" cap="flat" cmpd="sng" algn="ctr">
+                      <a:solidFill>
+                        <a:srgbClr val="D6DCE4"/>
+                      </a:solidFill>
+                      <a:prstDash val="solid"/>
+                      <a:round/>
+                      <a:headEnd type="none" w="med" len="med"/>
+                      <a:tailEnd type="none" w="med" len="med"/>
+                    </a:lnB>
+                    <a:solidFill>
+                      <a:srgbClr val="FFFFFF"/>
+                    </a:solidFill>
+                  </a:tcPr>
+                </a:tc>
+              </a:tr>
               <a:tr h="384048">
                 <a:tc>
                   <a:txBody>
@@ -6274,7 +6588,7 @@
                   </a:tcPr>
                 </a:tc>
               </a:tr>
-              <a:tr h="566928">
+              <a:tr h="749808">
                 <a:tc>
                   <a:txBody>
                     <a:bodyPr/>
@@ -6635,418 +6949,6 @@
                           <a:cs typeface="Arial" pitchFamily="34" charset="-120"/>
                         </a:rPr>
                         <a:t>workflows/principles.md#principles, docs/helix/01-frame/principles.md</a:t>
-                      </a:r>
-                      <a:endParaRPr lang="en-US" sz="1200" dirty="0">
-                        <a:latin typeface="Arial" charset="0"/>
-                        <a:ea typeface="Arial" charset="0"/>
-                        <a:cs typeface="Arial" charset="0"/>
-                      </a:endParaRPr>
-                    </a:p>
-                  </a:txBody>
-                  <a:tcPr marL="73152" marR="73152" marT="73152" marB="73152" anchor="ctr">
-                    <a:lnL w="9525" cap="flat" cmpd="sng" algn="ctr">
-                      <a:solidFill>
-                        <a:srgbClr val="D6DCE4"/>
-                      </a:solidFill>
-                      <a:prstDash val="solid"/>
-                      <a:round/>
-                      <a:headEnd type="none" w="med" len="med"/>
-                      <a:tailEnd type="none" w="med" len="med"/>
-                    </a:lnL>
-                    <a:lnR w="9525" cap="flat" cmpd="sng" algn="ctr">
-                      <a:solidFill>
-                        <a:srgbClr val="D6DCE4"/>
-                      </a:solidFill>
-                      <a:prstDash val="solid"/>
-                      <a:round/>
-                      <a:headEnd type="none" w="med" len="med"/>
-                      <a:tailEnd type="none" w="med" len="med"/>
-                    </a:lnR>
-                    <a:lnT w="9525" cap="flat" cmpd="sng" algn="ctr">
-                      <a:solidFill>
-                        <a:srgbClr val="D6DCE4"/>
-                      </a:solidFill>
-                      <a:prstDash val="solid"/>
-                      <a:round/>
-                      <a:headEnd type="none" w="med" len="med"/>
-                      <a:tailEnd type="none" w="med" len="med"/>
-                    </a:lnT>
-                    <a:lnB w="9525" cap="flat" cmpd="sng" algn="ctr">
-                      <a:solidFill>
-                        <a:srgbClr val="D6DCE4"/>
-                      </a:solidFill>
-                      <a:prstDash val="solid"/>
-                      <a:round/>
-                      <a:headEnd type="none" w="med" len="med"/>
-                      <a:tailEnd type="none" w="med" len="med"/>
-                    </a:lnB>
-                    <a:solidFill>
-                      <a:srgbClr val="FFFFFF"/>
-                    </a:solidFill>
-                  </a:tcPr>
-                </a:tc>
-              </a:tr>
-              <a:tr h="566928">
-                <a:tc>
-                  <a:txBody>
-                    <a:bodyPr/>
-                    <a:lstStyle/>
-                    <a:p>
-                      <a:pPr indent="0" marL="0">
-                        <a:buNone/>
-                      </a:pPr>
-                      <a:r>
-                        <a:rPr lang="en-US" sz="1200" b="1" dirty="0">
-                          <a:solidFill>
-                            <a:srgbClr val="55606D"/>
-                          </a:solidFill>
-                          <a:latin typeface="Arial" pitchFamily="34" charset="0"/>
-                          <a:ea typeface="Arial" pitchFamily="34" charset="-122"/>
-                          <a:cs typeface="Arial" pitchFamily="34" charset="-120"/>
-                        </a:rPr>
-                        <a:t>S11</a:t>
-                      </a:r>
-                      <a:endParaRPr lang="en-US" sz="1200" dirty="0">
-                        <a:latin typeface="Arial" charset="0"/>
-                        <a:ea typeface="Arial" charset="0"/>
-                        <a:cs typeface="Arial" charset="0"/>
-                      </a:endParaRPr>
-                    </a:p>
-                  </a:txBody>
-                  <a:tcPr marL="73152" marR="73152" marT="73152" marB="73152" anchor="ctr">
-                    <a:lnL w="9525" cap="flat" cmpd="sng" algn="ctr">
-                      <a:solidFill>
-                        <a:srgbClr val="D6DCE4"/>
-                      </a:solidFill>
-                      <a:prstDash val="solid"/>
-                      <a:round/>
-                      <a:headEnd type="none" w="med" len="med"/>
-                      <a:tailEnd type="none" w="med" len="med"/>
-                    </a:lnL>
-                    <a:lnR w="9525" cap="flat" cmpd="sng" algn="ctr">
-                      <a:solidFill>
-                        <a:srgbClr val="D6DCE4"/>
-                      </a:solidFill>
-                      <a:prstDash val="solid"/>
-                      <a:round/>
-                      <a:headEnd type="none" w="med" len="med"/>
-                      <a:tailEnd type="none" w="med" len="med"/>
-                    </a:lnR>
-                    <a:lnT w="9525" cap="flat" cmpd="sng" algn="ctr">
-                      <a:solidFill>
-                        <a:srgbClr val="D6DCE4"/>
-                      </a:solidFill>
-                      <a:prstDash val="solid"/>
-                      <a:round/>
-                      <a:headEnd type="none" w="med" len="med"/>
-                      <a:tailEnd type="none" w="med" len="med"/>
-                    </a:lnT>
-                    <a:lnB w="9525" cap="flat" cmpd="sng" algn="ctr">
-                      <a:solidFill>
-                        <a:srgbClr val="D6DCE4"/>
-                      </a:solidFill>
-                      <a:prstDash val="solid"/>
-                      <a:round/>
-                      <a:headEnd type="none" w="med" len="med"/>
-                      <a:tailEnd type="none" w="med" len="med"/>
-                    </a:lnB>
-                    <a:solidFill>
-                      <a:srgbClr val="FFFFFF"/>
-                    </a:solidFill>
-                  </a:tcPr>
-                </a:tc>
-                <a:tc>
-                  <a:txBody>
-                    <a:bodyPr/>
-                    <a:lstStyle/>
-                    <a:p>
-                      <a:pPr indent="0" marL="0">
-                        <a:buNone/>
-                      </a:pPr>
-                      <a:r>
-                        <a:rPr lang="en-US" sz="1200" dirty="0">
-                          <a:solidFill>
-                            <a:srgbClr val="1F2933"/>
-                          </a:solidFill>
-                          <a:latin typeface="Arial" pitchFamily="34" charset="0"/>
-                          <a:ea typeface="Arial" pitchFamily="34" charset="-122"/>
-                          <a:cs typeface="Arial" pitchFamily="34" charset="-120"/>
-                        </a:rPr>
-                        <a:t>Artifact honesty: phantom claims block; verification evidence comes from the running system</a:t>
-                      </a:r>
-                      <a:endParaRPr lang="en-US" sz="1200" dirty="0">
-                        <a:latin typeface="Arial" charset="0"/>
-                        <a:ea typeface="Arial" charset="0"/>
-                        <a:cs typeface="Arial" charset="0"/>
-                      </a:endParaRPr>
-                    </a:p>
-                  </a:txBody>
-                  <a:tcPr marL="73152" marR="73152" marT="73152" marB="73152" anchor="ctr">
-                    <a:lnL w="9525" cap="flat" cmpd="sng" algn="ctr">
-                      <a:solidFill>
-                        <a:srgbClr val="D6DCE4"/>
-                      </a:solidFill>
-                      <a:prstDash val="solid"/>
-                      <a:round/>
-                      <a:headEnd type="none" w="med" len="med"/>
-                      <a:tailEnd type="none" w="med" len="med"/>
-                    </a:lnL>
-                    <a:lnR w="9525" cap="flat" cmpd="sng" algn="ctr">
-                      <a:solidFill>
-                        <a:srgbClr val="D6DCE4"/>
-                      </a:solidFill>
-                      <a:prstDash val="solid"/>
-                      <a:round/>
-                      <a:headEnd type="none" w="med" len="med"/>
-                      <a:tailEnd type="none" w="med" len="med"/>
-                    </a:lnR>
-                    <a:lnT w="9525" cap="flat" cmpd="sng" algn="ctr">
-                      <a:solidFill>
-                        <a:srgbClr val="D6DCE4"/>
-                      </a:solidFill>
-                      <a:prstDash val="solid"/>
-                      <a:round/>
-                      <a:headEnd type="none" w="med" len="med"/>
-                      <a:tailEnd type="none" w="med" len="med"/>
-                    </a:lnT>
-                    <a:lnB w="9525" cap="flat" cmpd="sng" algn="ctr">
-                      <a:solidFill>
-                        <a:srgbClr val="D6DCE4"/>
-                      </a:solidFill>
-                      <a:prstDash val="solid"/>
-                      <a:round/>
-                      <a:headEnd type="none" w="med" len="med"/>
-                      <a:tailEnd type="none" w="med" len="med"/>
-                    </a:lnB>
-                    <a:solidFill>
-                      <a:srgbClr val="FFFFFF"/>
-                    </a:solidFill>
-                  </a:tcPr>
-                </a:tc>
-                <a:tc>
-                  <a:txBody>
-                    <a:bodyPr/>
-                    <a:lstStyle/>
-                    <a:p>
-                      <a:pPr indent="0" marL="0">
-                        <a:buNone/>
-                      </a:pPr>
-                      <a:r>
-                        <a:rPr lang="en-US" sz="1200" dirty="0">
-                          <a:solidFill>
-                            <a:srgbClr val="1F2933"/>
-                          </a:solidFill>
-                          <a:latin typeface="Arial" pitchFamily="34" charset="0"/>
-                          <a:ea typeface="Arial" pitchFamily="34" charset="-122"/>
-                          <a:cs typeface="Arial" pitchFamily="34" charset="-120"/>
-                        </a:rPr>
-                        <a:t>docs/helix/01-frame/features/FEAT-016-artifact-honesty.md, workflows/concerns/verification/practices.md</a:t>
-                      </a:r>
-                      <a:endParaRPr lang="en-US" sz="1200" dirty="0">
-                        <a:latin typeface="Arial" charset="0"/>
-                        <a:ea typeface="Arial" charset="0"/>
-                        <a:cs typeface="Arial" charset="0"/>
-                      </a:endParaRPr>
-                    </a:p>
-                  </a:txBody>
-                  <a:tcPr marL="73152" marR="73152" marT="73152" marB="73152" anchor="ctr">
-                    <a:lnL w="9525" cap="flat" cmpd="sng" algn="ctr">
-                      <a:solidFill>
-                        <a:srgbClr val="D6DCE4"/>
-                      </a:solidFill>
-                      <a:prstDash val="solid"/>
-                      <a:round/>
-                      <a:headEnd type="none" w="med" len="med"/>
-                      <a:tailEnd type="none" w="med" len="med"/>
-                    </a:lnL>
-                    <a:lnR w="9525" cap="flat" cmpd="sng" algn="ctr">
-                      <a:solidFill>
-                        <a:srgbClr val="D6DCE4"/>
-                      </a:solidFill>
-                      <a:prstDash val="solid"/>
-                      <a:round/>
-                      <a:headEnd type="none" w="med" len="med"/>
-                      <a:tailEnd type="none" w="med" len="med"/>
-                    </a:lnR>
-                    <a:lnT w="9525" cap="flat" cmpd="sng" algn="ctr">
-                      <a:solidFill>
-                        <a:srgbClr val="D6DCE4"/>
-                      </a:solidFill>
-                      <a:prstDash val="solid"/>
-                      <a:round/>
-                      <a:headEnd type="none" w="med" len="med"/>
-                      <a:tailEnd type="none" w="med" len="med"/>
-                    </a:lnT>
-                    <a:lnB w="9525" cap="flat" cmpd="sng" algn="ctr">
-                      <a:solidFill>
-                        <a:srgbClr val="D6DCE4"/>
-                      </a:solidFill>
-                      <a:prstDash val="solid"/>
-                      <a:round/>
-                      <a:headEnd type="none" w="med" len="med"/>
-                      <a:tailEnd type="none" w="med" len="med"/>
-                    </a:lnB>
-                    <a:solidFill>
-                      <a:srgbClr val="FFFFFF"/>
-                    </a:solidFill>
-                  </a:tcPr>
-                </a:tc>
-              </a:tr>
-              <a:tr h="566928">
-                <a:tc>
-                  <a:txBody>
-                    <a:bodyPr/>
-                    <a:lstStyle/>
-                    <a:p>
-                      <a:pPr indent="0" marL="0">
-                        <a:buNone/>
-                      </a:pPr>
-                      <a:r>
-                        <a:rPr lang="en-US" sz="1200" b="1" dirty="0">
-                          <a:solidFill>
-                            <a:srgbClr val="55606D"/>
-                          </a:solidFill>
-                          <a:latin typeface="Arial" pitchFamily="34" charset="0"/>
-                          <a:ea typeface="Arial" pitchFamily="34" charset="-122"/>
-                          <a:cs typeface="Arial" pitchFamily="34" charset="-120"/>
-                        </a:rPr>
-                        <a:t>S12</a:t>
-                      </a:r>
-                      <a:endParaRPr lang="en-US" sz="1200" dirty="0">
-                        <a:latin typeface="Arial" charset="0"/>
-                        <a:ea typeface="Arial" charset="0"/>
-                        <a:cs typeface="Arial" charset="0"/>
-                      </a:endParaRPr>
-                    </a:p>
-                  </a:txBody>
-                  <a:tcPr marL="73152" marR="73152" marT="73152" marB="73152" anchor="ctr">
-                    <a:lnL w="9525" cap="flat" cmpd="sng" algn="ctr">
-                      <a:solidFill>
-                        <a:srgbClr val="D6DCE4"/>
-                      </a:solidFill>
-                      <a:prstDash val="solid"/>
-                      <a:round/>
-                      <a:headEnd type="none" w="med" len="med"/>
-                      <a:tailEnd type="none" w="med" len="med"/>
-                    </a:lnL>
-                    <a:lnR w="9525" cap="flat" cmpd="sng" algn="ctr">
-                      <a:solidFill>
-                        <a:srgbClr val="D6DCE4"/>
-                      </a:solidFill>
-                      <a:prstDash val="solid"/>
-                      <a:round/>
-                      <a:headEnd type="none" w="med" len="med"/>
-                      <a:tailEnd type="none" w="med" len="med"/>
-                    </a:lnR>
-                    <a:lnT w="9525" cap="flat" cmpd="sng" algn="ctr">
-                      <a:solidFill>
-                        <a:srgbClr val="D6DCE4"/>
-                      </a:solidFill>
-                      <a:prstDash val="solid"/>
-                      <a:round/>
-                      <a:headEnd type="none" w="med" len="med"/>
-                      <a:tailEnd type="none" w="med" len="med"/>
-                    </a:lnT>
-                    <a:lnB w="9525" cap="flat" cmpd="sng" algn="ctr">
-                      <a:solidFill>
-                        <a:srgbClr val="D6DCE4"/>
-                      </a:solidFill>
-                      <a:prstDash val="solid"/>
-                      <a:round/>
-                      <a:headEnd type="none" w="med" len="med"/>
-                      <a:tailEnd type="none" w="med" len="med"/>
-                    </a:lnB>
-                    <a:solidFill>
-                      <a:srgbClr val="FFFFFF"/>
-                    </a:solidFill>
-                  </a:tcPr>
-                </a:tc>
-                <a:tc>
-                  <a:txBody>
-                    <a:bodyPr/>
-                    <a:lstStyle/>
-                    <a:p>
-                      <a:pPr indent="0" marL="0">
-                        <a:buNone/>
-                      </a:pPr>
-                      <a:r>
-                        <a:rPr lang="en-US" sz="1200" dirty="0">
-                          <a:solidFill>
-                            <a:srgbClr val="1F2933"/>
-                          </a:solidFill>
-                          <a:latin typeface="Arial" pitchFamily="34" charset="0"/>
-                          <a:ea typeface="Arial" pitchFamily="34" charset="-122"/>
-                          <a:cs typeface="Arial" pitchFamily="34" charset="-120"/>
-                        </a:rPr>
-                        <a:t>Tests cite the criterion they cover; quality floors never slide back</a:t>
-                      </a:r>
-                      <a:endParaRPr lang="en-US" sz="1200" dirty="0">
-                        <a:latin typeface="Arial" charset="0"/>
-                        <a:ea typeface="Arial" charset="0"/>
-                        <a:cs typeface="Arial" charset="0"/>
-                      </a:endParaRPr>
-                    </a:p>
-                  </a:txBody>
-                  <a:tcPr marL="73152" marR="73152" marT="73152" marB="73152" anchor="ctr">
-                    <a:lnL w="9525" cap="flat" cmpd="sng" algn="ctr">
-                      <a:solidFill>
-                        <a:srgbClr val="D6DCE4"/>
-                      </a:solidFill>
-                      <a:prstDash val="solid"/>
-                      <a:round/>
-                      <a:headEnd type="none" w="med" len="med"/>
-                      <a:tailEnd type="none" w="med" len="med"/>
-                    </a:lnL>
-                    <a:lnR w="9525" cap="flat" cmpd="sng" algn="ctr">
-                      <a:solidFill>
-                        <a:srgbClr val="D6DCE4"/>
-                      </a:solidFill>
-                      <a:prstDash val="solid"/>
-                      <a:round/>
-                      <a:headEnd type="none" w="med" len="med"/>
-                      <a:tailEnd type="none" w="med" len="med"/>
-                    </a:lnR>
-                    <a:lnT w="9525" cap="flat" cmpd="sng" algn="ctr">
-                      <a:solidFill>
-                        <a:srgbClr val="D6DCE4"/>
-                      </a:solidFill>
-                      <a:prstDash val="solid"/>
-                      <a:round/>
-                      <a:headEnd type="none" w="med" len="med"/>
-                      <a:tailEnd type="none" w="med" len="med"/>
-                    </a:lnT>
-                    <a:lnB w="9525" cap="flat" cmpd="sng" algn="ctr">
-                      <a:solidFill>
-                        <a:srgbClr val="D6DCE4"/>
-                      </a:solidFill>
-                      <a:prstDash val="solid"/>
-                      <a:round/>
-                      <a:headEnd type="none" w="med" len="med"/>
-                      <a:tailEnd type="none" w="med" len="med"/>
-                    </a:lnB>
-                    <a:solidFill>
-                      <a:srgbClr val="FFFFFF"/>
-                    </a:solidFill>
-                  </a:tcPr>
-                </a:tc>
-                <a:tc>
-                  <a:txBody>
-                    <a:bodyPr/>
-                    <a:lstStyle/>
-                    <a:p>
-                      <a:pPr indent="0" marL="0">
-                        <a:buNone/>
-                      </a:pPr>
-                      <a:r>
-                        <a:rPr lang="en-US" sz="1200" dirty="0">
-                          <a:solidFill>
-                            <a:srgbClr val="1F2933"/>
-                          </a:solidFill>
-                          <a:latin typeface="Arial" pitchFamily="34" charset="0"/>
-                          <a:ea typeface="Arial" pitchFamily="34" charset="-122"/>
-                          <a:cs typeface="Arial" pitchFamily="34" charset="-120"/>
-                        </a:rPr>
-                        <a:t>docs/helix/02-design/adr/ADR-009-acceptance-criteria-ownership.md, workflows/ratchets.md</a:t>
                       </a:r>
                       <a:endParaRPr lang="en-US" sz="1200" dirty="0">
                         <a:latin typeface="Arial" charset="0"/>
@@ -7447,6 +7349,418 @@
                   </a:tcPr>
                 </a:tc>
               </a:tr>
+              <a:tr h="749808">
+                <a:tc>
+                  <a:txBody>
+                    <a:bodyPr/>
+                    <a:lstStyle/>
+                    <a:p>
+                      <a:pPr indent="0" marL="0">
+                        <a:buNone/>
+                      </a:pPr>
+                      <a:r>
+                        <a:rPr lang="en-US" sz="1200" b="1" dirty="0">
+                          <a:solidFill>
+                            <a:srgbClr val="55606D"/>
+                          </a:solidFill>
+                          <a:latin typeface="Arial" pitchFamily="34" charset="0"/>
+                          <a:ea typeface="Arial" pitchFamily="34" charset="-122"/>
+                          <a:cs typeface="Arial" pitchFamily="34" charset="-120"/>
+                        </a:rPr>
+                        <a:t>S11</a:t>
+                      </a:r>
+                      <a:endParaRPr lang="en-US" sz="1200" dirty="0">
+                        <a:latin typeface="Arial" charset="0"/>
+                        <a:ea typeface="Arial" charset="0"/>
+                        <a:cs typeface="Arial" charset="0"/>
+                      </a:endParaRPr>
+                    </a:p>
+                  </a:txBody>
+                  <a:tcPr marL="73152" marR="73152" marT="73152" marB="73152" anchor="ctr">
+                    <a:lnL w="9525" cap="flat" cmpd="sng" algn="ctr">
+                      <a:solidFill>
+                        <a:srgbClr val="D6DCE4"/>
+                      </a:solidFill>
+                      <a:prstDash val="solid"/>
+                      <a:round/>
+                      <a:headEnd type="none" w="med" len="med"/>
+                      <a:tailEnd type="none" w="med" len="med"/>
+                    </a:lnL>
+                    <a:lnR w="9525" cap="flat" cmpd="sng" algn="ctr">
+                      <a:solidFill>
+                        <a:srgbClr val="D6DCE4"/>
+                      </a:solidFill>
+                      <a:prstDash val="solid"/>
+                      <a:round/>
+                      <a:headEnd type="none" w="med" len="med"/>
+                      <a:tailEnd type="none" w="med" len="med"/>
+                    </a:lnR>
+                    <a:lnT w="9525" cap="flat" cmpd="sng" algn="ctr">
+                      <a:solidFill>
+                        <a:srgbClr val="D6DCE4"/>
+                      </a:solidFill>
+                      <a:prstDash val="solid"/>
+                      <a:round/>
+                      <a:headEnd type="none" w="med" len="med"/>
+                      <a:tailEnd type="none" w="med" len="med"/>
+                    </a:lnT>
+                    <a:lnB w="9525" cap="flat" cmpd="sng" algn="ctr">
+                      <a:solidFill>
+                        <a:srgbClr val="D6DCE4"/>
+                      </a:solidFill>
+                      <a:prstDash val="solid"/>
+                      <a:round/>
+                      <a:headEnd type="none" w="med" len="med"/>
+                      <a:tailEnd type="none" w="med" len="med"/>
+                    </a:lnB>
+                    <a:solidFill>
+                      <a:srgbClr val="FFFFFF"/>
+                    </a:solidFill>
+                  </a:tcPr>
+                </a:tc>
+                <a:tc>
+                  <a:txBody>
+                    <a:bodyPr/>
+                    <a:lstStyle/>
+                    <a:p>
+                      <a:pPr indent="0" marL="0">
+                        <a:buNone/>
+                      </a:pPr>
+                      <a:r>
+                        <a:rPr lang="en-US" sz="1200" dirty="0">
+                          <a:solidFill>
+                            <a:srgbClr val="1F2933"/>
+                          </a:solidFill>
+                          <a:latin typeface="Arial" pitchFamily="34" charset="0"/>
+                          <a:ea typeface="Arial" pitchFamily="34" charset="-122"/>
+                          <a:cs typeface="Arial" pitchFamily="34" charset="-120"/>
+                        </a:rPr>
+                        <a:t>Artifact honesty: phantom claims block; verification evidence comes from the running system</a:t>
+                      </a:r>
+                      <a:endParaRPr lang="en-US" sz="1200" dirty="0">
+                        <a:latin typeface="Arial" charset="0"/>
+                        <a:ea typeface="Arial" charset="0"/>
+                        <a:cs typeface="Arial" charset="0"/>
+                      </a:endParaRPr>
+                    </a:p>
+                  </a:txBody>
+                  <a:tcPr marL="73152" marR="73152" marT="73152" marB="73152" anchor="ctr">
+                    <a:lnL w="9525" cap="flat" cmpd="sng" algn="ctr">
+                      <a:solidFill>
+                        <a:srgbClr val="D6DCE4"/>
+                      </a:solidFill>
+                      <a:prstDash val="solid"/>
+                      <a:round/>
+                      <a:headEnd type="none" w="med" len="med"/>
+                      <a:tailEnd type="none" w="med" len="med"/>
+                    </a:lnL>
+                    <a:lnR w="9525" cap="flat" cmpd="sng" algn="ctr">
+                      <a:solidFill>
+                        <a:srgbClr val="D6DCE4"/>
+                      </a:solidFill>
+                      <a:prstDash val="solid"/>
+                      <a:round/>
+                      <a:headEnd type="none" w="med" len="med"/>
+                      <a:tailEnd type="none" w="med" len="med"/>
+                    </a:lnR>
+                    <a:lnT w="9525" cap="flat" cmpd="sng" algn="ctr">
+                      <a:solidFill>
+                        <a:srgbClr val="D6DCE4"/>
+                      </a:solidFill>
+                      <a:prstDash val="solid"/>
+                      <a:round/>
+                      <a:headEnd type="none" w="med" len="med"/>
+                      <a:tailEnd type="none" w="med" len="med"/>
+                    </a:lnT>
+                    <a:lnB w="9525" cap="flat" cmpd="sng" algn="ctr">
+                      <a:solidFill>
+                        <a:srgbClr val="D6DCE4"/>
+                      </a:solidFill>
+                      <a:prstDash val="solid"/>
+                      <a:round/>
+                      <a:headEnd type="none" w="med" len="med"/>
+                      <a:tailEnd type="none" w="med" len="med"/>
+                    </a:lnB>
+                    <a:solidFill>
+                      <a:srgbClr val="FFFFFF"/>
+                    </a:solidFill>
+                  </a:tcPr>
+                </a:tc>
+                <a:tc>
+                  <a:txBody>
+                    <a:bodyPr/>
+                    <a:lstStyle/>
+                    <a:p>
+                      <a:pPr indent="0" marL="0">
+                        <a:buNone/>
+                      </a:pPr>
+                      <a:r>
+                        <a:rPr lang="en-US" sz="1200" dirty="0">
+                          <a:solidFill>
+                            <a:srgbClr val="1F2933"/>
+                          </a:solidFill>
+                          <a:latin typeface="Arial" pitchFamily="34" charset="0"/>
+                          <a:ea typeface="Arial" pitchFamily="34" charset="-122"/>
+                          <a:cs typeface="Arial" pitchFamily="34" charset="-120"/>
+                        </a:rPr>
+                        <a:t>docs/helix/01-frame/features/FEAT-016-artifact-honesty.md, workflows/concerns/verification/practices.md</a:t>
+                      </a:r>
+                      <a:endParaRPr lang="en-US" sz="1200" dirty="0">
+                        <a:latin typeface="Arial" charset="0"/>
+                        <a:ea typeface="Arial" charset="0"/>
+                        <a:cs typeface="Arial" charset="0"/>
+                      </a:endParaRPr>
+                    </a:p>
+                  </a:txBody>
+                  <a:tcPr marL="73152" marR="73152" marT="73152" marB="73152" anchor="ctr">
+                    <a:lnL w="9525" cap="flat" cmpd="sng" algn="ctr">
+                      <a:solidFill>
+                        <a:srgbClr val="D6DCE4"/>
+                      </a:solidFill>
+                      <a:prstDash val="solid"/>
+                      <a:round/>
+                      <a:headEnd type="none" w="med" len="med"/>
+                      <a:tailEnd type="none" w="med" len="med"/>
+                    </a:lnL>
+                    <a:lnR w="9525" cap="flat" cmpd="sng" algn="ctr">
+                      <a:solidFill>
+                        <a:srgbClr val="D6DCE4"/>
+                      </a:solidFill>
+                      <a:prstDash val="solid"/>
+                      <a:round/>
+                      <a:headEnd type="none" w="med" len="med"/>
+                      <a:tailEnd type="none" w="med" len="med"/>
+                    </a:lnR>
+                    <a:lnT w="9525" cap="flat" cmpd="sng" algn="ctr">
+                      <a:solidFill>
+                        <a:srgbClr val="D6DCE4"/>
+                      </a:solidFill>
+                      <a:prstDash val="solid"/>
+                      <a:round/>
+                      <a:headEnd type="none" w="med" len="med"/>
+                      <a:tailEnd type="none" w="med" len="med"/>
+                    </a:lnT>
+                    <a:lnB w="9525" cap="flat" cmpd="sng" algn="ctr">
+                      <a:solidFill>
+                        <a:srgbClr val="D6DCE4"/>
+                      </a:solidFill>
+                      <a:prstDash val="solid"/>
+                      <a:round/>
+                      <a:headEnd type="none" w="med" len="med"/>
+                      <a:tailEnd type="none" w="med" len="med"/>
+                    </a:lnB>
+                    <a:solidFill>
+                      <a:srgbClr val="FFFFFF"/>
+                    </a:solidFill>
+                  </a:tcPr>
+                </a:tc>
+              </a:tr>
+              <a:tr h="749808">
+                <a:tc>
+                  <a:txBody>
+                    <a:bodyPr/>
+                    <a:lstStyle/>
+                    <a:p>
+                      <a:pPr indent="0" marL="0">
+                        <a:buNone/>
+                      </a:pPr>
+                      <a:r>
+                        <a:rPr lang="en-US" sz="1200" b="1" dirty="0">
+                          <a:solidFill>
+                            <a:srgbClr val="55606D"/>
+                          </a:solidFill>
+                          <a:latin typeface="Arial" pitchFamily="34" charset="0"/>
+                          <a:ea typeface="Arial" pitchFamily="34" charset="-122"/>
+                          <a:cs typeface="Arial" pitchFamily="34" charset="-120"/>
+                        </a:rPr>
+                        <a:t>S12</a:t>
+                      </a:r>
+                      <a:endParaRPr lang="en-US" sz="1200" dirty="0">
+                        <a:latin typeface="Arial" charset="0"/>
+                        <a:ea typeface="Arial" charset="0"/>
+                        <a:cs typeface="Arial" charset="0"/>
+                      </a:endParaRPr>
+                    </a:p>
+                  </a:txBody>
+                  <a:tcPr marL="73152" marR="73152" marT="73152" marB="73152" anchor="ctr">
+                    <a:lnL w="9525" cap="flat" cmpd="sng" algn="ctr">
+                      <a:solidFill>
+                        <a:srgbClr val="D6DCE4"/>
+                      </a:solidFill>
+                      <a:prstDash val="solid"/>
+                      <a:round/>
+                      <a:headEnd type="none" w="med" len="med"/>
+                      <a:tailEnd type="none" w="med" len="med"/>
+                    </a:lnL>
+                    <a:lnR w="9525" cap="flat" cmpd="sng" algn="ctr">
+                      <a:solidFill>
+                        <a:srgbClr val="D6DCE4"/>
+                      </a:solidFill>
+                      <a:prstDash val="solid"/>
+                      <a:round/>
+                      <a:headEnd type="none" w="med" len="med"/>
+                      <a:tailEnd type="none" w="med" len="med"/>
+                    </a:lnR>
+                    <a:lnT w="9525" cap="flat" cmpd="sng" algn="ctr">
+                      <a:solidFill>
+                        <a:srgbClr val="D6DCE4"/>
+                      </a:solidFill>
+                      <a:prstDash val="solid"/>
+                      <a:round/>
+                      <a:headEnd type="none" w="med" len="med"/>
+                      <a:tailEnd type="none" w="med" len="med"/>
+                    </a:lnT>
+                    <a:lnB w="9525" cap="flat" cmpd="sng" algn="ctr">
+                      <a:solidFill>
+                        <a:srgbClr val="D6DCE4"/>
+                      </a:solidFill>
+                      <a:prstDash val="solid"/>
+                      <a:round/>
+                      <a:headEnd type="none" w="med" len="med"/>
+                      <a:tailEnd type="none" w="med" len="med"/>
+                    </a:lnB>
+                    <a:solidFill>
+                      <a:srgbClr val="FFFFFF"/>
+                    </a:solidFill>
+                  </a:tcPr>
+                </a:tc>
+                <a:tc>
+                  <a:txBody>
+                    <a:bodyPr/>
+                    <a:lstStyle/>
+                    <a:p>
+                      <a:pPr indent="0" marL="0">
+                        <a:buNone/>
+                      </a:pPr>
+                      <a:r>
+                        <a:rPr lang="en-US" sz="1200" dirty="0">
+                          <a:solidFill>
+                            <a:srgbClr val="1F2933"/>
+                          </a:solidFill>
+                          <a:latin typeface="Arial" pitchFamily="34" charset="0"/>
+                          <a:ea typeface="Arial" pitchFamily="34" charset="-122"/>
+                          <a:cs typeface="Arial" pitchFamily="34" charset="-120"/>
+                        </a:rPr>
+                        <a:t>Tests cite the criterion they cover; quality floors never slide back</a:t>
+                      </a:r>
+                      <a:endParaRPr lang="en-US" sz="1200" dirty="0">
+                        <a:latin typeface="Arial" charset="0"/>
+                        <a:ea typeface="Arial" charset="0"/>
+                        <a:cs typeface="Arial" charset="0"/>
+                      </a:endParaRPr>
+                    </a:p>
+                  </a:txBody>
+                  <a:tcPr marL="73152" marR="73152" marT="73152" marB="73152" anchor="ctr">
+                    <a:lnL w="9525" cap="flat" cmpd="sng" algn="ctr">
+                      <a:solidFill>
+                        <a:srgbClr val="D6DCE4"/>
+                      </a:solidFill>
+                      <a:prstDash val="solid"/>
+                      <a:round/>
+                      <a:headEnd type="none" w="med" len="med"/>
+                      <a:tailEnd type="none" w="med" len="med"/>
+                    </a:lnL>
+                    <a:lnR w="9525" cap="flat" cmpd="sng" algn="ctr">
+                      <a:solidFill>
+                        <a:srgbClr val="D6DCE4"/>
+                      </a:solidFill>
+                      <a:prstDash val="solid"/>
+                      <a:round/>
+                      <a:headEnd type="none" w="med" len="med"/>
+                      <a:tailEnd type="none" w="med" len="med"/>
+                    </a:lnR>
+                    <a:lnT w="9525" cap="flat" cmpd="sng" algn="ctr">
+                      <a:solidFill>
+                        <a:srgbClr val="D6DCE4"/>
+                      </a:solidFill>
+                      <a:prstDash val="solid"/>
+                      <a:round/>
+                      <a:headEnd type="none" w="med" len="med"/>
+                      <a:tailEnd type="none" w="med" len="med"/>
+                    </a:lnT>
+                    <a:lnB w="9525" cap="flat" cmpd="sng" algn="ctr">
+                      <a:solidFill>
+                        <a:srgbClr val="D6DCE4"/>
+                      </a:solidFill>
+                      <a:prstDash val="solid"/>
+                      <a:round/>
+                      <a:headEnd type="none" w="med" len="med"/>
+                      <a:tailEnd type="none" w="med" len="med"/>
+                    </a:lnB>
+                    <a:solidFill>
+                      <a:srgbClr val="FFFFFF"/>
+                    </a:solidFill>
+                  </a:tcPr>
+                </a:tc>
+                <a:tc>
+                  <a:txBody>
+                    <a:bodyPr/>
+                    <a:lstStyle/>
+                    <a:p>
+                      <a:pPr indent="0" marL="0">
+                        <a:buNone/>
+                      </a:pPr>
+                      <a:r>
+                        <a:rPr lang="en-US" sz="1200" dirty="0">
+                          <a:solidFill>
+                            <a:srgbClr val="1F2933"/>
+                          </a:solidFill>
+                          <a:latin typeface="Arial" pitchFamily="34" charset="0"/>
+                          <a:ea typeface="Arial" pitchFamily="34" charset="-122"/>
+                          <a:cs typeface="Arial" pitchFamily="34" charset="-120"/>
+                        </a:rPr>
+                        <a:t>docs/helix/02-design/adr/ADR-009-acceptance-criteria-ownership.md, workflows/ratchets.md</a:t>
+                      </a:r>
+                      <a:endParaRPr lang="en-US" sz="1200" dirty="0">
+                        <a:latin typeface="Arial" charset="0"/>
+                        <a:ea typeface="Arial" charset="0"/>
+                        <a:cs typeface="Arial" charset="0"/>
+                      </a:endParaRPr>
+                    </a:p>
+                  </a:txBody>
+                  <a:tcPr marL="73152" marR="73152" marT="73152" marB="73152" anchor="ctr">
+                    <a:lnL w="9525" cap="flat" cmpd="sng" algn="ctr">
+                      <a:solidFill>
+                        <a:srgbClr val="D6DCE4"/>
+                      </a:solidFill>
+                      <a:prstDash val="solid"/>
+                      <a:round/>
+                      <a:headEnd type="none" w="med" len="med"/>
+                      <a:tailEnd type="none" w="med" len="med"/>
+                    </a:lnL>
+                    <a:lnR w="9525" cap="flat" cmpd="sng" algn="ctr">
+                      <a:solidFill>
+                        <a:srgbClr val="D6DCE4"/>
+                      </a:solidFill>
+                      <a:prstDash val="solid"/>
+                      <a:round/>
+                      <a:headEnd type="none" w="med" len="med"/>
+                      <a:tailEnd type="none" w="med" len="med"/>
+                    </a:lnR>
+                    <a:lnT w="9525" cap="flat" cmpd="sng" algn="ctr">
+                      <a:solidFill>
+                        <a:srgbClr val="D6DCE4"/>
+                      </a:solidFill>
+                      <a:prstDash val="solid"/>
+                      <a:round/>
+                      <a:headEnd type="none" w="med" len="med"/>
+                      <a:tailEnd type="none" w="med" len="med"/>
+                    </a:lnT>
+                    <a:lnB w="9525" cap="flat" cmpd="sng" algn="ctr">
+                      <a:solidFill>
+                        <a:srgbClr val="D6DCE4"/>
+                      </a:solidFill>
+                      <a:prstDash val="solid"/>
+                      <a:round/>
+                      <a:headEnd type="none" w="med" len="med"/>
+                      <a:tailEnd type="none" w="med" len="med"/>
+                    </a:lnB>
+                    <a:solidFill>
+                      <a:srgbClr val="FFFFFF"/>
+                    </a:solidFill>
+                  </a:tcPr>
+                </a:tc>
+              </a:tr>
               <a:tr h="566928">
                 <a:tc>
                   <a:txBody>
@@ -7653,7 +7967,7 @@
                   </a:tcPr>
                 </a:tc>
               </a:tr>
-              <a:tr h="566928">
+              <a:tr h="749808">
                 <a:tc>
                   <a:txBody>
                     <a:bodyPr/>
@@ -7859,7 +8173,7 @@
                   </a:tcPr>
                 </a:tc>
               </a:tr>
-              <a:tr h="384048">
+              <a:tr h="566928">
                 <a:tc>
                   <a:txBody>
                     <a:bodyPr/>
@@ -8065,7 +8379,356 @@
                   </a:tcPr>
                 </a:tc>
               </a:tr>
+            </a:tbl>
+          </a:graphicData>
+        </a:graphic>
+      </p:graphicFrame>
+    </p:spTree>
+  </p:cSld>
+  <p:clrMapOvr>
+    <a:masterClrMapping/>
+  </p:clrMapOvr>
+</p:sld>
+</file>
+
+<file path=ppt/slides/slide15.xml><?xml version="1.0" encoding="utf-8"?>
+<p:sld xmlns:a="http://schemas.openxmlformats.org/drawingml/2006/main" xmlns:r="http://schemas.openxmlformats.org/officeDocument/2006/relationships" xmlns:p="http://schemas.openxmlformats.org/presentationml/2006/main">
+  <p:cSld name="Slide 15">
+    <p:bg>
+      <p:bgPr>
+        <a:solidFill>
+          <a:srgbClr val="FFFFFF"/>
+        </a:solidFill>
+      </p:bgPr>
+    </p:bg>
+    <p:spTree>
+      <p:nvGrpSpPr>
+        <p:cNvPr id="1" name=""/>
+        <p:cNvGrpSpPr/>
+        <p:nvPr/>
+      </p:nvGrpSpPr>
+      <p:grpSpPr>
+        <a:xfrm>
+          <a:off x="0" y="0"/>
+          <a:ext cx="0" cy="0"/>
+          <a:chOff x="0" y="0"/>
+          <a:chExt cx="0" cy="0"/>
+        </a:xfrm>
+      </p:grpSpPr>
+      <p:sp>
+        <p:nvSpPr>
+          <p:cNvPr id="2" name="Text 0"/>
+          <p:cNvSpPr txBox="1"/>
+          <p:nvPr/>
+        </p:nvSpPr>
+        <p:spPr>
+          <a:xfrm>
+            <a:off x="548640" y="548640"/>
+            <a:ext cx="11094415" cy="1188720"/>
+          </a:xfrm>
+          <a:prstGeom prst="rect">
+            <a:avLst/>
+          </a:prstGeom>
+          <a:noFill/>
+          <a:ln/>
+        </p:spPr>
+        <p:txBody>
+          <a:bodyPr wrap="square" lIns="0" tIns="0" rIns="0" bIns="0" rtlCol="0" anchor="t">
+            <a:normAutofit/>
+          </a:bodyPr>
+          <a:lstStyle/>
+          <a:p>
+            <a:pPr algn="l" indent="0" marL="0">
+              <a:buNone/>
+            </a:pPr>
+            <a:r>
+              <a:rPr lang="en-US" sz="3600" b="1" dirty="0">
+                <a:solidFill>
+                  <a:srgbClr val="1F2933"/>
+                </a:solidFill>
+                <a:latin typeface="Georgia" pitchFamily="34" charset="0"/>
+                <a:ea typeface="Georgia" pitchFamily="34" charset="-122"/>
+                <a:cs typeface="Georgia" pitchFamily="34" charset="-120"/>
+              </a:rPr>
+              <a:t>Sources (continued)</a:t>
+            </a:r>
+            <a:endParaRPr lang="en-US" sz="3600" dirty="0"/>
+          </a:p>
+        </p:txBody>
+      </p:sp>
+      <p:sp>
+        <p:nvSpPr>
+          <p:cNvPr id="3" name="Text 1"/>
+          <p:cNvSpPr txBox="1"/>
+          <p:nvPr/>
+        </p:nvSpPr>
+        <p:spPr>
+          <a:xfrm>
+            <a:off x="11094415" y="6035040"/>
+            <a:ext cx="548640" cy="274320"/>
+          </a:xfrm>
+          <a:prstGeom prst="rect">
+            <a:avLst/>
+          </a:prstGeom>
+          <a:noFill/>
+          <a:ln/>
+        </p:spPr>
+        <p:txBody>
+          <a:bodyPr wrap="square" lIns="0" tIns="0" rIns="0" bIns="0" rtlCol="0" anchor="b"/>
+          <a:lstStyle/>
+          <a:p>
+            <a:pPr algn="r" indent="0" marL="0">
+              <a:buNone/>
+            </a:pPr>
+            <a:r>
+              <a:rPr lang="en-US" sz="1000" dirty="0">
+                <a:solidFill>
+                  <a:srgbClr val="55606D"/>
+                </a:solidFill>
+                <a:latin typeface="Arial" pitchFamily="34" charset="0"/>
+                <a:ea typeface="Arial" pitchFamily="34" charset="-122"/>
+                <a:cs typeface="Arial" pitchFamily="34" charset="-120"/>
+              </a:rPr>
+              <a:t>15</a:t>
+            </a:r>
+            <a:endParaRPr lang="en-US" sz="1000" dirty="0"/>
+          </a:p>
+        </p:txBody>
+      </p:sp>
+      <p:graphicFrame>
+        <p:nvGraphicFramePr>
+          <p:cNvPr id="16" name="Table 0"/>
+          <p:cNvGraphicFramePr>
+            <a:graphicFrameLocks noGrp="1"/>
+          </p:cNvGraphicFramePr>
+          <p:nvPr>
+            <p:extLst>
+              <p:ext uri="{D42A27DB-BD31-4B8C-83A1-F6EECF244321}">
+                <p14:modId xmlns:p14="http://schemas.microsoft.com/office/powerpoint/2010/main" val="1579011935"/>
+              </p:ext>
+            </p:extLst>
+          </p:nvPr>
+        </p:nvGraphicFramePr>
+        <p:xfrm>
+          <a:off x="548640" y="1965960"/>
+          <a:ext cx="11094415" cy="914400"/>
+        </p:xfrm>
+        <a:graphic>
+          <a:graphicData uri="http://schemas.openxmlformats.org/drawingml/2006/table">
+            <a:tbl>
+              <a:tblPr/>
+              <a:tblGrid>
+                <a:gridCol w="548640"/>
+                <a:gridCol w="6538381"/>
+                <a:gridCol w="4007395"/>
+              </a:tblGrid>
               <a:tr h="384048">
+                <a:tc>
+                  <a:txBody>
+                    <a:bodyPr/>
+                    <a:lstStyle/>
+                    <a:p>
+                      <a:pPr indent="0" marL="0">
+                        <a:buNone/>
+                      </a:pPr>
+                      <a:r>
+                        <a:rPr lang="en-US" sz="1200" b="1" dirty="0">
+                          <a:solidFill>
+                            <a:srgbClr val="FFFFFF"/>
+                          </a:solidFill>
+                          <a:latin typeface="Arial" pitchFamily="34" charset="0"/>
+                          <a:ea typeface="Arial" pitchFamily="34" charset="-122"/>
+                          <a:cs typeface="Arial" pitchFamily="34" charset="-120"/>
+                        </a:rPr>
+                        <a:t>Id</a:t>
+                      </a:r>
+                      <a:endParaRPr lang="en-US" sz="1200" dirty="0">
+                        <a:latin typeface="Arial" charset="0"/>
+                        <a:ea typeface="Arial" charset="0"/>
+                        <a:cs typeface="Arial" charset="0"/>
+                      </a:endParaRPr>
+                    </a:p>
+                  </a:txBody>
+                  <a:tcPr marL="73152" marR="73152" marT="73152" marB="73152" anchor="ctr">
+                    <a:lnL w="9525" cap="flat" cmpd="sng" algn="ctr">
+                      <a:solidFill>
+                        <a:srgbClr val="D6DCE4"/>
+                      </a:solidFill>
+                      <a:prstDash val="solid"/>
+                      <a:round/>
+                      <a:headEnd type="none" w="med" len="med"/>
+                      <a:tailEnd type="none" w="med" len="med"/>
+                    </a:lnL>
+                    <a:lnR w="9525" cap="flat" cmpd="sng" algn="ctr">
+                      <a:solidFill>
+                        <a:srgbClr val="D6DCE4"/>
+                      </a:solidFill>
+                      <a:prstDash val="solid"/>
+                      <a:round/>
+                      <a:headEnd type="none" w="med" len="med"/>
+                      <a:tailEnd type="none" w="med" len="med"/>
+                    </a:lnR>
+                    <a:lnT w="9525" cap="flat" cmpd="sng" algn="ctr">
+                      <a:solidFill>
+                        <a:srgbClr val="D6DCE4"/>
+                      </a:solidFill>
+                      <a:prstDash val="solid"/>
+                      <a:round/>
+                      <a:headEnd type="none" w="med" len="med"/>
+                      <a:tailEnd type="none" w="med" len="med"/>
+                    </a:lnT>
+                    <a:lnB w="9525" cap="flat" cmpd="sng" algn="ctr">
+                      <a:solidFill>
+                        <a:srgbClr val="D6DCE4"/>
+                      </a:solidFill>
+                      <a:prstDash val="solid"/>
+                      <a:round/>
+                      <a:headEnd type="none" w="med" len="med"/>
+                      <a:tailEnd type="none" w="med" len="med"/>
+                    </a:lnB>
+                    <a:solidFill>
+                      <a:srgbClr val="3B6BA8"/>
+                    </a:solidFill>
+                  </a:tcPr>
+                </a:tc>
+                <a:tc>
+                  <a:txBody>
+                    <a:bodyPr/>
+                    <a:lstStyle/>
+                    <a:p>
+                      <a:pPr indent="0" marL="0">
+                        <a:buNone/>
+                      </a:pPr>
+                      <a:r>
+                        <a:rPr lang="en-US" sz="1200" b="1" dirty="0">
+                          <a:solidFill>
+                            <a:srgbClr val="FFFFFF"/>
+                          </a:solidFill>
+                          <a:latin typeface="Arial" pitchFamily="34" charset="0"/>
+                          <a:ea typeface="Arial" pitchFamily="34" charset="-122"/>
+                          <a:cs typeface="Arial" pitchFamily="34" charset="-120"/>
+                        </a:rPr>
+                        <a:t>Claim or figure</a:t>
+                      </a:r>
+                      <a:endParaRPr lang="en-US" sz="1200" dirty="0">
+                        <a:latin typeface="Arial" charset="0"/>
+                        <a:ea typeface="Arial" charset="0"/>
+                        <a:cs typeface="Arial" charset="0"/>
+                      </a:endParaRPr>
+                    </a:p>
+                  </a:txBody>
+                  <a:tcPr marL="73152" marR="73152" marT="73152" marB="73152" anchor="ctr">
+                    <a:lnL w="9525" cap="flat" cmpd="sng" algn="ctr">
+                      <a:solidFill>
+                        <a:srgbClr val="D6DCE4"/>
+                      </a:solidFill>
+                      <a:prstDash val="solid"/>
+                      <a:round/>
+                      <a:headEnd type="none" w="med" len="med"/>
+                      <a:tailEnd type="none" w="med" len="med"/>
+                    </a:lnL>
+                    <a:lnR w="9525" cap="flat" cmpd="sng" algn="ctr">
+                      <a:solidFill>
+                        <a:srgbClr val="D6DCE4"/>
+                      </a:solidFill>
+                      <a:prstDash val="solid"/>
+                      <a:round/>
+                      <a:headEnd type="none" w="med" len="med"/>
+                      <a:tailEnd type="none" w="med" len="med"/>
+                    </a:lnR>
+                    <a:lnT w="9525" cap="flat" cmpd="sng" algn="ctr">
+                      <a:solidFill>
+                        <a:srgbClr val="D6DCE4"/>
+                      </a:solidFill>
+                      <a:prstDash val="solid"/>
+                      <a:round/>
+                      <a:headEnd type="none" w="med" len="med"/>
+                      <a:tailEnd type="none" w="med" len="med"/>
+                    </a:lnT>
+                    <a:lnB w="9525" cap="flat" cmpd="sng" algn="ctr">
+                      <a:solidFill>
+                        <a:srgbClr val="D6DCE4"/>
+                      </a:solidFill>
+                      <a:prstDash val="solid"/>
+                      <a:round/>
+                      <a:headEnd type="none" w="med" len="med"/>
+                      <a:tailEnd type="none" w="med" len="med"/>
+                    </a:lnB>
+                    <a:solidFill>
+                      <a:srgbClr val="3B6BA8"/>
+                    </a:solidFill>
+                  </a:tcPr>
+                </a:tc>
+                <a:tc>
+                  <a:txBody>
+                    <a:bodyPr/>
+                    <a:lstStyle/>
+                    <a:p>
+                      <a:pPr indent="0" marL="0">
+                        <a:buNone/>
+                      </a:pPr>
+                      <a:r>
+                        <a:rPr lang="en-US" sz="1200" b="1" dirty="0">
+                          <a:solidFill>
+                            <a:srgbClr val="FFFFFF"/>
+                          </a:solidFill>
+                          <a:latin typeface="Arial" pitchFamily="34" charset="0"/>
+                          <a:ea typeface="Arial" pitchFamily="34" charset="-122"/>
+                          <a:cs typeface="Arial" pitchFamily="34" charset="-120"/>
+                        </a:rPr>
+                        <a:t>Governing artifact and section</a:t>
+                      </a:r>
+                      <a:endParaRPr lang="en-US" sz="1200" dirty="0">
+                        <a:latin typeface="Arial" charset="0"/>
+                        <a:ea typeface="Arial" charset="0"/>
+                        <a:cs typeface="Arial" charset="0"/>
+                      </a:endParaRPr>
+                    </a:p>
+                  </a:txBody>
+                  <a:tcPr marL="73152" marR="73152" marT="73152" marB="73152" anchor="ctr">
+                    <a:lnL w="9525" cap="flat" cmpd="sng" algn="ctr">
+                      <a:solidFill>
+                        <a:srgbClr val="D6DCE4"/>
+                      </a:solidFill>
+                      <a:prstDash val="solid"/>
+                      <a:round/>
+                      <a:headEnd type="none" w="med" len="med"/>
+                      <a:tailEnd type="none" w="med" len="med"/>
+                    </a:lnL>
+                    <a:lnR w="9525" cap="flat" cmpd="sng" algn="ctr">
+                      <a:solidFill>
+                        <a:srgbClr val="D6DCE4"/>
+                      </a:solidFill>
+                      <a:prstDash val="solid"/>
+                      <a:round/>
+                      <a:headEnd type="none" w="med" len="med"/>
+                      <a:tailEnd type="none" w="med" len="med"/>
+                    </a:lnR>
+                    <a:lnT w="9525" cap="flat" cmpd="sng" algn="ctr">
+                      <a:solidFill>
+                        <a:srgbClr val="D6DCE4"/>
+                      </a:solidFill>
+                      <a:prstDash val="solid"/>
+                      <a:round/>
+                      <a:headEnd type="none" w="med" len="med"/>
+                      <a:tailEnd type="none" w="med" len="med"/>
+                    </a:lnT>
+                    <a:lnB w="9525" cap="flat" cmpd="sng" algn="ctr">
+                      <a:solidFill>
+                        <a:srgbClr val="D6DCE4"/>
+                      </a:solidFill>
+                      <a:prstDash val="solid"/>
+                      <a:round/>
+                      <a:headEnd type="none" w="med" len="med"/>
+                      <a:tailEnd type="none" w="med" len="med"/>
+                    </a:lnB>
+                    <a:solidFill>
+                      <a:srgbClr val="3B6BA8"/>
+                    </a:solidFill>
+                  </a:tcPr>
+                </a:tc>
+              </a:tr>
+              <a:tr h="566928">
                 <a:tc>
                   <a:txBody>
                     <a:bodyPr/>
@@ -8271,7 +8934,7 @@
                   </a:tcPr>
                 </a:tc>
               </a:tr>
-              <a:tr h="566928">
+              <a:tr h="749808">
                 <a:tc>
                   <a:txBody>
                     <a:bodyPr/>
@@ -8477,7 +9140,7 @@
                   </a:tcPr>
                 </a:tc>
               </a:tr>
-              <a:tr h="566928">
+              <a:tr h="749808">
                 <a:tc>
                   <a:txBody>
                     <a:bodyPr/>
@@ -8632,6 +9295,1179 @@
                           <a:cs typeface="Arial" pitchFamily="34" charset="-120"/>
                         </a:rPr>
                         <a:t>docs/helix/00-discover/product-vision.md#success-definition, docs/helix/01-frame/prd.md#success-metrics</a:t>
+                      </a:r>
+                      <a:endParaRPr lang="en-US" sz="1200" dirty="0">
+                        <a:latin typeface="Arial" charset="0"/>
+                        <a:ea typeface="Arial" charset="0"/>
+                        <a:cs typeface="Arial" charset="0"/>
+                      </a:endParaRPr>
+                    </a:p>
+                  </a:txBody>
+                  <a:tcPr marL="73152" marR="73152" marT="73152" marB="73152" anchor="ctr">
+                    <a:lnL w="9525" cap="flat" cmpd="sng" algn="ctr">
+                      <a:solidFill>
+                        <a:srgbClr val="D6DCE4"/>
+                      </a:solidFill>
+                      <a:prstDash val="solid"/>
+                      <a:round/>
+                      <a:headEnd type="none" w="med" len="med"/>
+                      <a:tailEnd type="none" w="med" len="med"/>
+                    </a:lnL>
+                    <a:lnR w="9525" cap="flat" cmpd="sng" algn="ctr">
+                      <a:solidFill>
+                        <a:srgbClr val="D6DCE4"/>
+                      </a:solidFill>
+                      <a:prstDash val="solid"/>
+                      <a:round/>
+                      <a:headEnd type="none" w="med" len="med"/>
+                      <a:tailEnd type="none" w="med" len="med"/>
+                    </a:lnR>
+                    <a:lnT w="9525" cap="flat" cmpd="sng" algn="ctr">
+                      <a:solidFill>
+                        <a:srgbClr val="D6DCE4"/>
+                      </a:solidFill>
+                      <a:prstDash val="solid"/>
+                      <a:round/>
+                      <a:headEnd type="none" w="med" len="med"/>
+                      <a:tailEnd type="none" w="med" len="med"/>
+                    </a:lnT>
+                    <a:lnB w="9525" cap="flat" cmpd="sng" algn="ctr">
+                      <a:solidFill>
+                        <a:srgbClr val="D6DCE4"/>
+                      </a:solidFill>
+                      <a:prstDash val="solid"/>
+                      <a:round/>
+                      <a:headEnd type="none" w="med" len="med"/>
+                      <a:tailEnd type="none" w="med" len="med"/>
+                    </a:lnB>
+                    <a:solidFill>
+                      <a:srgbClr val="FFFFFF"/>
+                    </a:solidFill>
+                  </a:tcPr>
+                </a:tc>
+              </a:tr>
+              <a:tr h="566928">
+                <a:tc>
+                  <a:txBody>
+                    <a:bodyPr/>
+                    <a:lstStyle/>
+                    <a:p>
+                      <a:pPr indent="0" marL="0">
+                        <a:buNone/>
+                      </a:pPr>
+                      <a:r>
+                        <a:rPr lang="en-US" sz="1200" b="1" dirty="0">
+                          <a:solidFill>
+                            <a:srgbClr val="55606D"/>
+                          </a:solidFill>
+                          <a:latin typeface="Arial" pitchFamily="34" charset="0"/>
+                          <a:ea typeface="Arial" pitchFamily="34" charset="-122"/>
+                          <a:cs typeface="Arial" pitchFamily="34" charset="-120"/>
+                        </a:rPr>
+                        <a:t>S19</a:t>
+                      </a:r>
+                      <a:endParaRPr lang="en-US" sz="1200" dirty="0">
+                        <a:latin typeface="Arial" charset="0"/>
+                        <a:ea typeface="Arial" charset="0"/>
+                        <a:cs typeface="Arial" charset="0"/>
+                      </a:endParaRPr>
+                    </a:p>
+                  </a:txBody>
+                  <a:tcPr marL="73152" marR="73152" marT="73152" marB="73152" anchor="ctr">
+                    <a:lnL w="9525" cap="flat" cmpd="sng" algn="ctr">
+                      <a:solidFill>
+                        <a:srgbClr val="D6DCE4"/>
+                      </a:solidFill>
+                      <a:prstDash val="solid"/>
+                      <a:round/>
+                      <a:headEnd type="none" w="med" len="med"/>
+                      <a:tailEnd type="none" w="med" len="med"/>
+                    </a:lnL>
+                    <a:lnR w="9525" cap="flat" cmpd="sng" algn="ctr">
+                      <a:solidFill>
+                        <a:srgbClr val="D6DCE4"/>
+                      </a:solidFill>
+                      <a:prstDash val="solid"/>
+                      <a:round/>
+                      <a:headEnd type="none" w="med" len="med"/>
+                      <a:tailEnd type="none" w="med" len="med"/>
+                    </a:lnR>
+                    <a:lnT w="9525" cap="flat" cmpd="sng" algn="ctr">
+                      <a:solidFill>
+                        <a:srgbClr val="D6DCE4"/>
+                      </a:solidFill>
+                      <a:prstDash val="solid"/>
+                      <a:round/>
+                      <a:headEnd type="none" w="med" len="med"/>
+                      <a:tailEnd type="none" w="med" len="med"/>
+                    </a:lnT>
+                    <a:lnB w="9525" cap="flat" cmpd="sng" algn="ctr">
+                      <a:solidFill>
+                        <a:srgbClr val="D6DCE4"/>
+                      </a:solidFill>
+                      <a:prstDash val="solid"/>
+                      <a:round/>
+                      <a:headEnd type="none" w="med" len="med"/>
+                      <a:tailEnd type="none" w="med" len="med"/>
+                    </a:lnB>
+                    <a:solidFill>
+                      <a:srgbClr val="FFFFFF"/>
+                    </a:solidFill>
+                  </a:tcPr>
+                </a:tc>
+                <a:tc>
+                  <a:txBody>
+                    <a:bodyPr/>
+                    <a:lstStyle/>
+                    <a:p>
+                      <a:pPr indent="0" marL="0">
+                        <a:buNone/>
+                      </a:pPr>
+                      <a:r>
+                        <a:rPr lang="en-US" sz="1200" dirty="0">
+                          <a:solidFill>
+                            <a:srgbClr val="1F2933"/>
+                          </a:solidFill>
+                          <a:latin typeface="Arial" pitchFamily="34" charset="0"/>
+                          <a:ea typeface="Arial" pitchFamily="34" charset="-122"/>
+                          <a:cs typeface="Arial" pitchFamily="34" charset="-120"/>
+                        </a:rPr>
+                        <a:t>Layers are the control: each layer governs the next; a change enters at the top layer it affects; rules live in a layer, not a prompt</a:t>
+                      </a:r>
+                      <a:endParaRPr lang="en-US" sz="1200" dirty="0">
+                        <a:latin typeface="Arial" charset="0"/>
+                        <a:ea typeface="Arial" charset="0"/>
+                        <a:cs typeface="Arial" charset="0"/>
+                      </a:endParaRPr>
+                    </a:p>
+                  </a:txBody>
+                  <a:tcPr marL="73152" marR="73152" marT="73152" marB="73152" anchor="ctr">
+                    <a:lnL w="9525" cap="flat" cmpd="sng" algn="ctr">
+                      <a:solidFill>
+                        <a:srgbClr val="D6DCE4"/>
+                      </a:solidFill>
+                      <a:prstDash val="solid"/>
+                      <a:round/>
+                      <a:headEnd type="none" w="med" len="med"/>
+                      <a:tailEnd type="none" w="med" len="med"/>
+                    </a:lnL>
+                    <a:lnR w="9525" cap="flat" cmpd="sng" algn="ctr">
+                      <a:solidFill>
+                        <a:srgbClr val="D6DCE4"/>
+                      </a:solidFill>
+                      <a:prstDash val="solid"/>
+                      <a:round/>
+                      <a:headEnd type="none" w="med" len="med"/>
+                      <a:tailEnd type="none" w="med" len="med"/>
+                    </a:lnR>
+                    <a:lnT w="9525" cap="flat" cmpd="sng" algn="ctr">
+                      <a:solidFill>
+                        <a:srgbClr val="D6DCE4"/>
+                      </a:solidFill>
+                      <a:prstDash val="solid"/>
+                      <a:round/>
+                      <a:headEnd type="none" w="med" len="med"/>
+                      <a:tailEnd type="none" w="med" len="med"/>
+                    </a:lnT>
+                    <a:lnB w="9525" cap="flat" cmpd="sng" algn="ctr">
+                      <a:solidFill>
+                        <a:srgbClr val="D6DCE4"/>
+                      </a:solidFill>
+                      <a:prstDash val="solid"/>
+                      <a:round/>
+                      <a:headEnd type="none" w="med" len="med"/>
+                      <a:tailEnd type="none" w="med" len="med"/>
+                    </a:lnB>
+                    <a:solidFill>
+                      <a:srgbClr val="FFFFFF"/>
+                    </a:solidFill>
+                  </a:tcPr>
+                </a:tc>
+                <a:tc>
+                  <a:txBody>
+                    <a:bodyPr/>
+                    <a:lstStyle/>
+                    <a:p>
+                      <a:pPr indent="0" marL="0">
+                        <a:buNone/>
+                      </a:pPr>
+                      <a:r>
+                        <a:rPr lang="en-US" sz="1200" dirty="0">
+                          <a:solidFill>
+                            <a:srgbClr val="1F2933"/>
+                          </a:solidFill>
+                          <a:latin typeface="Arial" pitchFamily="34" charset="0"/>
+                          <a:ea typeface="Arial" pitchFamily="34" charset="-122"/>
+                          <a:cs typeface="Arial" pitchFamily="34" charset="-120"/>
+                        </a:rPr>
+                        <a:t>workflows/principles.md#layers-are-the-control</a:t>
+                      </a:r>
+                      <a:endParaRPr lang="en-US" sz="1200" dirty="0">
+                        <a:latin typeface="Arial" charset="0"/>
+                        <a:ea typeface="Arial" charset="0"/>
+                        <a:cs typeface="Arial" charset="0"/>
+                      </a:endParaRPr>
+                    </a:p>
+                  </a:txBody>
+                  <a:tcPr marL="73152" marR="73152" marT="73152" marB="73152" anchor="ctr">
+                    <a:lnL w="9525" cap="flat" cmpd="sng" algn="ctr">
+                      <a:solidFill>
+                        <a:srgbClr val="D6DCE4"/>
+                      </a:solidFill>
+                      <a:prstDash val="solid"/>
+                      <a:round/>
+                      <a:headEnd type="none" w="med" len="med"/>
+                      <a:tailEnd type="none" w="med" len="med"/>
+                    </a:lnL>
+                    <a:lnR w="9525" cap="flat" cmpd="sng" algn="ctr">
+                      <a:solidFill>
+                        <a:srgbClr val="D6DCE4"/>
+                      </a:solidFill>
+                      <a:prstDash val="solid"/>
+                      <a:round/>
+                      <a:headEnd type="none" w="med" len="med"/>
+                      <a:tailEnd type="none" w="med" len="med"/>
+                    </a:lnR>
+                    <a:lnT w="9525" cap="flat" cmpd="sng" algn="ctr">
+                      <a:solidFill>
+                        <a:srgbClr val="D6DCE4"/>
+                      </a:solidFill>
+                      <a:prstDash val="solid"/>
+                      <a:round/>
+                      <a:headEnd type="none" w="med" len="med"/>
+                      <a:tailEnd type="none" w="med" len="med"/>
+                    </a:lnT>
+                    <a:lnB w="9525" cap="flat" cmpd="sng" algn="ctr">
+                      <a:solidFill>
+                        <a:srgbClr val="D6DCE4"/>
+                      </a:solidFill>
+                      <a:prstDash val="solid"/>
+                      <a:round/>
+                      <a:headEnd type="none" w="med" len="med"/>
+                      <a:tailEnd type="none" w="med" len="med"/>
+                    </a:lnB>
+                    <a:solidFill>
+                      <a:srgbClr val="FFFFFF"/>
+                    </a:solidFill>
+                  </a:tcPr>
+                </a:tc>
+              </a:tr>
+              <a:tr h="566928">
+                <a:tc>
+                  <a:txBody>
+                    <a:bodyPr/>
+                    <a:lstStyle/>
+                    <a:p>
+                      <a:pPr indent="0" marL="0">
+                        <a:buNone/>
+                      </a:pPr>
+                      <a:r>
+                        <a:rPr lang="en-US" sz="1200" b="1" dirty="0">
+                          <a:solidFill>
+                            <a:srgbClr val="55606D"/>
+                          </a:solidFill>
+                          <a:latin typeface="Arial" pitchFamily="34" charset="0"/>
+                          <a:ea typeface="Arial" pitchFamily="34" charset="-122"/>
+                          <a:cs typeface="Arial" pitchFamily="34" charset="-120"/>
+                        </a:rPr>
+                        <a:t>S20</a:t>
+                      </a:r>
+                      <a:endParaRPr lang="en-US" sz="1200" dirty="0">
+                        <a:latin typeface="Arial" charset="0"/>
+                        <a:ea typeface="Arial" charset="0"/>
+                        <a:cs typeface="Arial" charset="0"/>
+                      </a:endParaRPr>
+                    </a:p>
+                  </a:txBody>
+                  <a:tcPr marL="73152" marR="73152" marT="73152" marB="73152" anchor="ctr">
+                    <a:lnL w="9525" cap="flat" cmpd="sng" algn="ctr">
+                      <a:solidFill>
+                        <a:srgbClr val="D6DCE4"/>
+                      </a:solidFill>
+                      <a:prstDash val="solid"/>
+                      <a:round/>
+                      <a:headEnd type="none" w="med" len="med"/>
+                      <a:tailEnd type="none" w="med" len="med"/>
+                    </a:lnL>
+                    <a:lnR w="9525" cap="flat" cmpd="sng" algn="ctr">
+                      <a:solidFill>
+                        <a:srgbClr val="D6DCE4"/>
+                      </a:solidFill>
+                      <a:prstDash val="solid"/>
+                      <a:round/>
+                      <a:headEnd type="none" w="med" len="med"/>
+                      <a:tailEnd type="none" w="med" len="med"/>
+                    </a:lnR>
+                    <a:lnT w="9525" cap="flat" cmpd="sng" algn="ctr">
+                      <a:solidFill>
+                        <a:srgbClr val="D6DCE4"/>
+                      </a:solidFill>
+                      <a:prstDash val="solid"/>
+                      <a:round/>
+                      <a:headEnd type="none" w="med" len="med"/>
+                      <a:tailEnd type="none" w="med" len="med"/>
+                    </a:lnT>
+                    <a:lnB w="9525" cap="flat" cmpd="sng" algn="ctr">
+                      <a:solidFill>
+                        <a:srgbClr val="D6DCE4"/>
+                      </a:solidFill>
+                      <a:prstDash val="solid"/>
+                      <a:round/>
+                      <a:headEnd type="none" w="med" len="med"/>
+                      <a:tailEnd type="none" w="med" len="med"/>
+                    </a:lnB>
+                    <a:solidFill>
+                      <a:srgbClr val="FFFFFF"/>
+                    </a:solidFill>
+                  </a:tcPr>
+                </a:tc>
+                <a:tc>
+                  <a:txBody>
+                    <a:bodyPr/>
+                    <a:lstStyle/>
+                    <a:p>
+                      <a:pPr indent="0" marL="0">
+                        <a:buNone/>
+                      </a:pPr>
+                      <a:r>
+                        <a:rPr lang="en-US" sz="1200" dirty="0">
+                          <a:solidFill>
+                            <a:srgbClr val="1F2933"/>
+                          </a:solidFill>
+                          <a:latin typeface="Arial" pitchFamily="34" charset="0"/>
+                          <a:ea typeface="Arial" pitchFamily="34" charset="-122"/>
+                          <a:cs typeface="Arial" pitchFamily="34" charset="-120"/>
+                        </a:rPr>
+                        <a:t>The hierarchy as control loop: authority flows down, concerns cross layers, gates sit between layers, humans hold the hand-offs</a:t>
+                      </a:r>
+                      <a:endParaRPr lang="en-US" sz="1200" dirty="0">
+                        <a:latin typeface="Arial" charset="0"/>
+                        <a:ea typeface="Arial" charset="0"/>
+                        <a:cs typeface="Arial" charset="0"/>
+                      </a:endParaRPr>
+                    </a:p>
+                  </a:txBody>
+                  <a:tcPr marL="73152" marR="73152" marT="73152" marB="73152" anchor="ctr">
+                    <a:lnL w="9525" cap="flat" cmpd="sng" algn="ctr">
+                      <a:solidFill>
+                        <a:srgbClr val="D6DCE4"/>
+                      </a:solidFill>
+                      <a:prstDash val="solid"/>
+                      <a:round/>
+                      <a:headEnd type="none" w="med" len="med"/>
+                      <a:tailEnd type="none" w="med" len="med"/>
+                    </a:lnL>
+                    <a:lnR w="9525" cap="flat" cmpd="sng" algn="ctr">
+                      <a:solidFill>
+                        <a:srgbClr val="D6DCE4"/>
+                      </a:solidFill>
+                      <a:prstDash val="solid"/>
+                      <a:round/>
+                      <a:headEnd type="none" w="med" len="med"/>
+                      <a:tailEnd type="none" w="med" len="med"/>
+                    </a:lnR>
+                    <a:lnT w="9525" cap="flat" cmpd="sng" algn="ctr">
+                      <a:solidFill>
+                        <a:srgbClr val="D6DCE4"/>
+                      </a:solidFill>
+                      <a:prstDash val="solid"/>
+                      <a:round/>
+                      <a:headEnd type="none" w="med" len="med"/>
+                      <a:tailEnd type="none" w="med" len="med"/>
+                    </a:lnT>
+                    <a:lnB w="9525" cap="flat" cmpd="sng" algn="ctr">
+                      <a:solidFill>
+                        <a:srgbClr val="D6DCE4"/>
+                      </a:solidFill>
+                      <a:prstDash val="solid"/>
+                      <a:round/>
+                      <a:headEnd type="none" w="med" len="med"/>
+                      <a:tailEnd type="none" w="med" len="med"/>
+                    </a:lnB>
+                    <a:solidFill>
+                      <a:srgbClr val="FFFFFF"/>
+                    </a:solidFill>
+                  </a:tcPr>
+                </a:tc>
+                <a:tc>
+                  <a:txBody>
+                    <a:bodyPr/>
+                    <a:lstStyle/>
+                    <a:p>
+                      <a:pPr indent="0" marL="0">
+                        <a:buNone/>
+                      </a:pPr>
+                      <a:r>
+                        <a:rPr lang="en-US" sz="1200" dirty="0">
+                          <a:solidFill>
+                            <a:srgbClr val="1F2933"/>
+                          </a:solidFill>
+                          <a:latin typeface="Arial" pitchFamily="34" charset="0"/>
+                          <a:ea typeface="Arial" pitchFamily="34" charset="-122"/>
+                          <a:cs typeface="Arial" pitchFamily="34" charset="-120"/>
+                        </a:rPr>
+                        <a:t>workflows/artifact-hierarchy.md#the-hierarchy-is-the-control-loop</a:t>
+                      </a:r>
+                      <a:endParaRPr lang="en-US" sz="1200" dirty="0">
+                        <a:latin typeface="Arial" charset="0"/>
+                        <a:ea typeface="Arial" charset="0"/>
+                        <a:cs typeface="Arial" charset="0"/>
+                      </a:endParaRPr>
+                    </a:p>
+                  </a:txBody>
+                  <a:tcPr marL="73152" marR="73152" marT="73152" marB="73152" anchor="ctr">
+                    <a:lnL w="9525" cap="flat" cmpd="sng" algn="ctr">
+                      <a:solidFill>
+                        <a:srgbClr val="D6DCE4"/>
+                      </a:solidFill>
+                      <a:prstDash val="solid"/>
+                      <a:round/>
+                      <a:headEnd type="none" w="med" len="med"/>
+                      <a:tailEnd type="none" w="med" len="med"/>
+                    </a:lnL>
+                    <a:lnR w="9525" cap="flat" cmpd="sng" algn="ctr">
+                      <a:solidFill>
+                        <a:srgbClr val="D6DCE4"/>
+                      </a:solidFill>
+                      <a:prstDash val="solid"/>
+                      <a:round/>
+                      <a:headEnd type="none" w="med" len="med"/>
+                      <a:tailEnd type="none" w="med" len="med"/>
+                    </a:lnR>
+                    <a:lnT w="9525" cap="flat" cmpd="sng" algn="ctr">
+                      <a:solidFill>
+                        <a:srgbClr val="D6DCE4"/>
+                      </a:solidFill>
+                      <a:prstDash val="solid"/>
+                      <a:round/>
+                      <a:headEnd type="none" w="med" len="med"/>
+                      <a:tailEnd type="none" w="med" len="med"/>
+                    </a:lnT>
+                    <a:lnB w="9525" cap="flat" cmpd="sng" algn="ctr">
+                      <a:solidFill>
+                        <a:srgbClr val="D6DCE4"/>
+                      </a:solidFill>
+                      <a:prstDash val="solid"/>
+                      <a:round/>
+                      <a:headEnd type="none" w="med" len="med"/>
+                      <a:tailEnd type="none" w="med" len="med"/>
+                    </a:lnB>
+                    <a:solidFill>
+                      <a:srgbClr val="FFFFFF"/>
+                    </a:solidFill>
+                  </a:tcPr>
+                </a:tc>
+              </a:tr>
+            </a:tbl>
+          </a:graphicData>
+        </a:graphic>
+      </p:graphicFrame>
+    </p:spTree>
+  </p:cSld>
+  <p:clrMapOvr>
+    <a:masterClrMapping/>
+  </p:clrMapOvr>
+</p:sld>
+</file>
+
+<file path=ppt/slides/slide16.xml><?xml version="1.0" encoding="utf-8"?>
+<p:sld xmlns:a="http://schemas.openxmlformats.org/drawingml/2006/main" xmlns:r="http://schemas.openxmlformats.org/officeDocument/2006/relationships" xmlns:p="http://schemas.openxmlformats.org/presentationml/2006/main">
+  <p:cSld name="Slide 16">
+    <p:bg>
+      <p:bgPr>
+        <a:solidFill>
+          <a:srgbClr val="FFFFFF"/>
+        </a:solidFill>
+      </p:bgPr>
+    </p:bg>
+    <p:spTree>
+      <p:nvGrpSpPr>
+        <p:cNvPr id="1" name=""/>
+        <p:cNvGrpSpPr/>
+        <p:nvPr/>
+      </p:nvGrpSpPr>
+      <p:grpSpPr>
+        <a:xfrm>
+          <a:off x="0" y="0"/>
+          <a:ext cx="0" cy="0"/>
+          <a:chOff x="0" y="0"/>
+          <a:chExt cx="0" cy="0"/>
+        </a:xfrm>
+      </p:grpSpPr>
+      <p:sp>
+        <p:nvSpPr>
+          <p:cNvPr id="2" name="Text 0"/>
+          <p:cNvSpPr txBox="1"/>
+          <p:nvPr/>
+        </p:nvSpPr>
+        <p:spPr>
+          <a:xfrm>
+            <a:off x="548640" y="548640"/>
+            <a:ext cx="11094415" cy="1188720"/>
+          </a:xfrm>
+          <a:prstGeom prst="rect">
+            <a:avLst/>
+          </a:prstGeom>
+          <a:noFill/>
+          <a:ln/>
+        </p:spPr>
+        <p:txBody>
+          <a:bodyPr wrap="square" lIns="0" tIns="0" rIns="0" bIns="0" rtlCol="0" anchor="t">
+            <a:normAutofit/>
+          </a:bodyPr>
+          <a:lstStyle/>
+          <a:p>
+            <a:pPr algn="l" indent="0" marL="0">
+              <a:buNone/>
+            </a:pPr>
+            <a:r>
+              <a:rPr lang="en-US" sz="3600" b="1" dirty="0">
+                <a:solidFill>
+                  <a:srgbClr val="1F2933"/>
+                </a:solidFill>
+                <a:latin typeface="Georgia" pitchFamily="34" charset="0"/>
+                <a:ea typeface="Georgia" pitchFamily="34" charset="-122"/>
+                <a:cs typeface="Georgia" pitchFamily="34" charset="-120"/>
+              </a:rPr>
+              <a:t>Sources (continued)</a:t>
+            </a:r>
+            <a:endParaRPr lang="en-US" sz="3600" dirty="0"/>
+          </a:p>
+        </p:txBody>
+      </p:sp>
+      <p:sp>
+        <p:nvSpPr>
+          <p:cNvPr id="3" name="Text 1"/>
+          <p:cNvSpPr txBox="1"/>
+          <p:nvPr/>
+        </p:nvSpPr>
+        <p:spPr>
+          <a:xfrm>
+            <a:off x="11094415" y="6035040"/>
+            <a:ext cx="548640" cy="274320"/>
+          </a:xfrm>
+          <a:prstGeom prst="rect">
+            <a:avLst/>
+          </a:prstGeom>
+          <a:noFill/>
+          <a:ln/>
+        </p:spPr>
+        <p:txBody>
+          <a:bodyPr wrap="square" lIns="0" tIns="0" rIns="0" bIns="0" rtlCol="0" anchor="b"/>
+          <a:lstStyle/>
+          <a:p>
+            <a:pPr algn="r" indent="0" marL="0">
+              <a:buNone/>
+            </a:pPr>
+            <a:r>
+              <a:rPr lang="en-US" sz="1000" dirty="0">
+                <a:solidFill>
+                  <a:srgbClr val="55606D"/>
+                </a:solidFill>
+                <a:latin typeface="Arial" pitchFamily="34" charset="0"/>
+                <a:ea typeface="Arial" pitchFamily="34" charset="-122"/>
+                <a:cs typeface="Arial" pitchFamily="34" charset="-120"/>
+              </a:rPr>
+              <a:t>16</a:t>
+            </a:r>
+            <a:endParaRPr lang="en-US" sz="1000" dirty="0"/>
+          </a:p>
+        </p:txBody>
+      </p:sp>
+      <p:graphicFrame>
+        <p:nvGraphicFramePr>
+          <p:cNvPr id="17" name="Table 0"/>
+          <p:cNvGraphicFramePr>
+            <a:graphicFrameLocks noGrp="1"/>
+          </p:cNvGraphicFramePr>
+          <p:nvPr>
+            <p:extLst>
+              <p:ext uri="{D42A27DB-BD31-4B8C-83A1-F6EECF244321}">
+                <p14:modId xmlns:p14="http://schemas.microsoft.com/office/powerpoint/2010/main" val="1579011935"/>
+              </p:ext>
+            </p:extLst>
+          </p:nvPr>
+        </p:nvGraphicFramePr>
+        <p:xfrm>
+          <a:off x="548640" y="1965960"/>
+          <a:ext cx="11094415" cy="914400"/>
+        </p:xfrm>
+        <a:graphic>
+          <a:graphicData uri="http://schemas.openxmlformats.org/drawingml/2006/table">
+            <a:tbl>
+              <a:tblPr/>
+              <a:tblGrid>
+                <a:gridCol w="548640"/>
+                <a:gridCol w="6538381"/>
+                <a:gridCol w="4007395"/>
+              </a:tblGrid>
+              <a:tr h="384048">
+                <a:tc>
+                  <a:txBody>
+                    <a:bodyPr/>
+                    <a:lstStyle/>
+                    <a:p>
+                      <a:pPr indent="0" marL="0">
+                        <a:buNone/>
+                      </a:pPr>
+                      <a:r>
+                        <a:rPr lang="en-US" sz="1200" b="1" dirty="0">
+                          <a:solidFill>
+                            <a:srgbClr val="FFFFFF"/>
+                          </a:solidFill>
+                          <a:latin typeface="Arial" pitchFamily="34" charset="0"/>
+                          <a:ea typeface="Arial" pitchFamily="34" charset="-122"/>
+                          <a:cs typeface="Arial" pitchFamily="34" charset="-120"/>
+                        </a:rPr>
+                        <a:t>Id</a:t>
+                      </a:r>
+                      <a:endParaRPr lang="en-US" sz="1200" dirty="0">
+                        <a:latin typeface="Arial" charset="0"/>
+                        <a:ea typeface="Arial" charset="0"/>
+                        <a:cs typeface="Arial" charset="0"/>
+                      </a:endParaRPr>
+                    </a:p>
+                  </a:txBody>
+                  <a:tcPr marL="73152" marR="73152" marT="73152" marB="73152" anchor="ctr">
+                    <a:lnL w="9525" cap="flat" cmpd="sng" algn="ctr">
+                      <a:solidFill>
+                        <a:srgbClr val="D6DCE4"/>
+                      </a:solidFill>
+                      <a:prstDash val="solid"/>
+                      <a:round/>
+                      <a:headEnd type="none" w="med" len="med"/>
+                      <a:tailEnd type="none" w="med" len="med"/>
+                    </a:lnL>
+                    <a:lnR w="9525" cap="flat" cmpd="sng" algn="ctr">
+                      <a:solidFill>
+                        <a:srgbClr val="D6DCE4"/>
+                      </a:solidFill>
+                      <a:prstDash val="solid"/>
+                      <a:round/>
+                      <a:headEnd type="none" w="med" len="med"/>
+                      <a:tailEnd type="none" w="med" len="med"/>
+                    </a:lnR>
+                    <a:lnT w="9525" cap="flat" cmpd="sng" algn="ctr">
+                      <a:solidFill>
+                        <a:srgbClr val="D6DCE4"/>
+                      </a:solidFill>
+                      <a:prstDash val="solid"/>
+                      <a:round/>
+                      <a:headEnd type="none" w="med" len="med"/>
+                      <a:tailEnd type="none" w="med" len="med"/>
+                    </a:lnT>
+                    <a:lnB w="9525" cap="flat" cmpd="sng" algn="ctr">
+                      <a:solidFill>
+                        <a:srgbClr val="D6DCE4"/>
+                      </a:solidFill>
+                      <a:prstDash val="solid"/>
+                      <a:round/>
+                      <a:headEnd type="none" w="med" len="med"/>
+                      <a:tailEnd type="none" w="med" len="med"/>
+                    </a:lnB>
+                    <a:solidFill>
+                      <a:srgbClr val="3B6BA8"/>
+                    </a:solidFill>
+                  </a:tcPr>
+                </a:tc>
+                <a:tc>
+                  <a:txBody>
+                    <a:bodyPr/>
+                    <a:lstStyle/>
+                    <a:p>
+                      <a:pPr indent="0" marL="0">
+                        <a:buNone/>
+                      </a:pPr>
+                      <a:r>
+                        <a:rPr lang="en-US" sz="1200" b="1" dirty="0">
+                          <a:solidFill>
+                            <a:srgbClr val="FFFFFF"/>
+                          </a:solidFill>
+                          <a:latin typeface="Arial" pitchFamily="34" charset="0"/>
+                          <a:ea typeface="Arial" pitchFamily="34" charset="-122"/>
+                          <a:cs typeface="Arial" pitchFamily="34" charset="-120"/>
+                        </a:rPr>
+                        <a:t>Claim or figure</a:t>
+                      </a:r>
+                      <a:endParaRPr lang="en-US" sz="1200" dirty="0">
+                        <a:latin typeface="Arial" charset="0"/>
+                        <a:ea typeface="Arial" charset="0"/>
+                        <a:cs typeface="Arial" charset="0"/>
+                      </a:endParaRPr>
+                    </a:p>
+                  </a:txBody>
+                  <a:tcPr marL="73152" marR="73152" marT="73152" marB="73152" anchor="ctr">
+                    <a:lnL w="9525" cap="flat" cmpd="sng" algn="ctr">
+                      <a:solidFill>
+                        <a:srgbClr val="D6DCE4"/>
+                      </a:solidFill>
+                      <a:prstDash val="solid"/>
+                      <a:round/>
+                      <a:headEnd type="none" w="med" len="med"/>
+                      <a:tailEnd type="none" w="med" len="med"/>
+                    </a:lnL>
+                    <a:lnR w="9525" cap="flat" cmpd="sng" algn="ctr">
+                      <a:solidFill>
+                        <a:srgbClr val="D6DCE4"/>
+                      </a:solidFill>
+                      <a:prstDash val="solid"/>
+                      <a:round/>
+                      <a:headEnd type="none" w="med" len="med"/>
+                      <a:tailEnd type="none" w="med" len="med"/>
+                    </a:lnR>
+                    <a:lnT w="9525" cap="flat" cmpd="sng" algn="ctr">
+                      <a:solidFill>
+                        <a:srgbClr val="D6DCE4"/>
+                      </a:solidFill>
+                      <a:prstDash val="solid"/>
+                      <a:round/>
+                      <a:headEnd type="none" w="med" len="med"/>
+                      <a:tailEnd type="none" w="med" len="med"/>
+                    </a:lnT>
+                    <a:lnB w="9525" cap="flat" cmpd="sng" algn="ctr">
+                      <a:solidFill>
+                        <a:srgbClr val="D6DCE4"/>
+                      </a:solidFill>
+                      <a:prstDash val="solid"/>
+                      <a:round/>
+                      <a:headEnd type="none" w="med" len="med"/>
+                      <a:tailEnd type="none" w="med" len="med"/>
+                    </a:lnB>
+                    <a:solidFill>
+                      <a:srgbClr val="3B6BA8"/>
+                    </a:solidFill>
+                  </a:tcPr>
+                </a:tc>
+                <a:tc>
+                  <a:txBody>
+                    <a:bodyPr/>
+                    <a:lstStyle/>
+                    <a:p>
+                      <a:pPr indent="0" marL="0">
+                        <a:buNone/>
+                      </a:pPr>
+                      <a:r>
+                        <a:rPr lang="en-US" sz="1200" b="1" dirty="0">
+                          <a:solidFill>
+                            <a:srgbClr val="FFFFFF"/>
+                          </a:solidFill>
+                          <a:latin typeface="Arial" pitchFamily="34" charset="0"/>
+                          <a:ea typeface="Arial" pitchFamily="34" charset="-122"/>
+                          <a:cs typeface="Arial" pitchFamily="34" charset="-120"/>
+                        </a:rPr>
+                        <a:t>Governing artifact and section</a:t>
+                      </a:r>
+                      <a:endParaRPr lang="en-US" sz="1200" dirty="0">
+                        <a:latin typeface="Arial" charset="0"/>
+                        <a:ea typeface="Arial" charset="0"/>
+                        <a:cs typeface="Arial" charset="0"/>
+                      </a:endParaRPr>
+                    </a:p>
+                  </a:txBody>
+                  <a:tcPr marL="73152" marR="73152" marT="73152" marB="73152" anchor="ctr">
+                    <a:lnL w="9525" cap="flat" cmpd="sng" algn="ctr">
+                      <a:solidFill>
+                        <a:srgbClr val="D6DCE4"/>
+                      </a:solidFill>
+                      <a:prstDash val="solid"/>
+                      <a:round/>
+                      <a:headEnd type="none" w="med" len="med"/>
+                      <a:tailEnd type="none" w="med" len="med"/>
+                    </a:lnL>
+                    <a:lnR w="9525" cap="flat" cmpd="sng" algn="ctr">
+                      <a:solidFill>
+                        <a:srgbClr val="D6DCE4"/>
+                      </a:solidFill>
+                      <a:prstDash val="solid"/>
+                      <a:round/>
+                      <a:headEnd type="none" w="med" len="med"/>
+                      <a:tailEnd type="none" w="med" len="med"/>
+                    </a:lnR>
+                    <a:lnT w="9525" cap="flat" cmpd="sng" algn="ctr">
+                      <a:solidFill>
+                        <a:srgbClr val="D6DCE4"/>
+                      </a:solidFill>
+                      <a:prstDash val="solid"/>
+                      <a:round/>
+                      <a:headEnd type="none" w="med" len="med"/>
+                      <a:tailEnd type="none" w="med" len="med"/>
+                    </a:lnT>
+                    <a:lnB w="9525" cap="flat" cmpd="sng" algn="ctr">
+                      <a:solidFill>
+                        <a:srgbClr val="D6DCE4"/>
+                      </a:solidFill>
+                      <a:prstDash val="solid"/>
+                      <a:round/>
+                      <a:headEnd type="none" w="med" len="med"/>
+                      <a:tailEnd type="none" w="med" len="med"/>
+                    </a:lnB>
+                    <a:solidFill>
+                      <a:srgbClr val="3B6BA8"/>
+                    </a:solidFill>
+                  </a:tcPr>
+                </a:tc>
+              </a:tr>
+              <a:tr h="566928">
+                <a:tc>
+                  <a:txBody>
+                    <a:bodyPr/>
+                    <a:lstStyle/>
+                    <a:p>
+                      <a:pPr indent="0" marL="0">
+                        <a:buNone/>
+                      </a:pPr>
+                      <a:r>
+                        <a:rPr lang="en-US" sz="1200" b="1" dirty="0">
+                          <a:solidFill>
+                            <a:srgbClr val="55606D"/>
+                          </a:solidFill>
+                          <a:latin typeface="Arial" pitchFamily="34" charset="0"/>
+                          <a:ea typeface="Arial" pitchFamily="34" charset="-122"/>
+                          <a:cs typeface="Arial" pitchFamily="34" charset="-120"/>
+                        </a:rPr>
+                        <a:t>S21</a:t>
+                      </a:r>
+                      <a:endParaRPr lang="en-US" sz="1200" dirty="0">
+                        <a:latin typeface="Arial" charset="0"/>
+                        <a:ea typeface="Arial" charset="0"/>
+                        <a:cs typeface="Arial" charset="0"/>
+                      </a:endParaRPr>
+                    </a:p>
+                  </a:txBody>
+                  <a:tcPr marL="73152" marR="73152" marT="73152" marB="73152" anchor="ctr">
+                    <a:lnL w="9525" cap="flat" cmpd="sng" algn="ctr">
+                      <a:solidFill>
+                        <a:srgbClr val="D6DCE4"/>
+                      </a:solidFill>
+                      <a:prstDash val="solid"/>
+                      <a:round/>
+                      <a:headEnd type="none" w="med" len="med"/>
+                      <a:tailEnd type="none" w="med" len="med"/>
+                    </a:lnL>
+                    <a:lnR w="9525" cap="flat" cmpd="sng" algn="ctr">
+                      <a:solidFill>
+                        <a:srgbClr val="D6DCE4"/>
+                      </a:solidFill>
+                      <a:prstDash val="solid"/>
+                      <a:round/>
+                      <a:headEnd type="none" w="med" len="med"/>
+                      <a:tailEnd type="none" w="med" len="med"/>
+                    </a:lnR>
+                    <a:lnT w="9525" cap="flat" cmpd="sng" algn="ctr">
+                      <a:solidFill>
+                        <a:srgbClr val="D6DCE4"/>
+                      </a:solidFill>
+                      <a:prstDash val="solid"/>
+                      <a:round/>
+                      <a:headEnd type="none" w="med" len="med"/>
+                      <a:tailEnd type="none" w="med" len="med"/>
+                    </a:lnT>
+                    <a:lnB w="9525" cap="flat" cmpd="sng" algn="ctr">
+                      <a:solidFill>
+                        <a:srgbClr val="D6DCE4"/>
+                      </a:solidFill>
+                      <a:prstDash val="solid"/>
+                      <a:round/>
+                      <a:headEnd type="none" w="med" len="med"/>
+                      <a:tailEnd type="none" w="med" len="med"/>
+                    </a:lnB>
+                    <a:solidFill>
+                      <a:srgbClr val="FFFFFF"/>
+                    </a:solidFill>
+                  </a:tcPr>
+                </a:tc>
+                <a:tc>
+                  <a:txBody>
+                    <a:bodyPr/>
+                    <a:lstStyle/>
+                    <a:p>
+                      <a:pPr indent="0" marL="0">
+                        <a:buNone/>
+                      </a:pPr>
+                      <a:r>
+                        <a:rPr lang="en-US" sz="1200" dirty="0">
+                          <a:solidFill>
+                            <a:srgbClr val="1F2933"/>
+                          </a:solidFill>
+                          <a:latin typeface="Arial" pitchFamily="34" charset="0"/>
+                          <a:ea typeface="Arial" pitchFamily="34" charset="-122"/>
+                          <a:cs typeface="Arial" pitchFamily="34" charset="-120"/>
+                        </a:rPr>
+                        <a:t>Humans decide, agents draft: people own intent, judgment, approval; agents own drafting, checking, surfacing, recording; every hand-off has an owner and a rule</a:t>
+                      </a:r>
+                      <a:endParaRPr lang="en-US" sz="1200" dirty="0">
+                        <a:latin typeface="Arial" charset="0"/>
+                        <a:ea typeface="Arial" charset="0"/>
+                        <a:cs typeface="Arial" charset="0"/>
+                      </a:endParaRPr>
+                    </a:p>
+                  </a:txBody>
+                  <a:tcPr marL="73152" marR="73152" marT="73152" marB="73152" anchor="ctr">
+                    <a:lnL w="9525" cap="flat" cmpd="sng" algn="ctr">
+                      <a:solidFill>
+                        <a:srgbClr val="D6DCE4"/>
+                      </a:solidFill>
+                      <a:prstDash val="solid"/>
+                      <a:round/>
+                      <a:headEnd type="none" w="med" len="med"/>
+                      <a:tailEnd type="none" w="med" len="med"/>
+                    </a:lnL>
+                    <a:lnR w="9525" cap="flat" cmpd="sng" algn="ctr">
+                      <a:solidFill>
+                        <a:srgbClr val="D6DCE4"/>
+                      </a:solidFill>
+                      <a:prstDash val="solid"/>
+                      <a:round/>
+                      <a:headEnd type="none" w="med" len="med"/>
+                      <a:tailEnd type="none" w="med" len="med"/>
+                    </a:lnR>
+                    <a:lnT w="9525" cap="flat" cmpd="sng" algn="ctr">
+                      <a:solidFill>
+                        <a:srgbClr val="D6DCE4"/>
+                      </a:solidFill>
+                      <a:prstDash val="solid"/>
+                      <a:round/>
+                      <a:headEnd type="none" w="med" len="med"/>
+                      <a:tailEnd type="none" w="med" len="med"/>
+                    </a:lnT>
+                    <a:lnB w="9525" cap="flat" cmpd="sng" algn="ctr">
+                      <a:solidFill>
+                        <a:srgbClr val="D6DCE4"/>
+                      </a:solidFill>
+                      <a:prstDash val="solid"/>
+                      <a:round/>
+                      <a:headEnd type="none" w="med" len="med"/>
+                      <a:tailEnd type="none" w="med" len="med"/>
+                    </a:lnB>
+                    <a:solidFill>
+                      <a:srgbClr val="FFFFFF"/>
+                    </a:solidFill>
+                  </a:tcPr>
+                </a:tc>
+                <a:tc>
+                  <a:txBody>
+                    <a:bodyPr/>
+                    <a:lstStyle/>
+                    <a:p>
+                      <a:pPr indent="0" marL="0">
+                        <a:buNone/>
+                      </a:pPr>
+                      <a:r>
+                        <a:rPr lang="en-US" sz="1200" dirty="0">
+                          <a:solidFill>
+                            <a:srgbClr val="1F2933"/>
+                          </a:solidFill>
+                          <a:latin typeface="Arial" pitchFamily="34" charset="0"/>
+                          <a:ea typeface="Arial" pitchFamily="34" charset="-122"/>
+                          <a:cs typeface="Arial" pitchFamily="34" charset="-120"/>
+                        </a:rPr>
+                        <a:t>workflows/principles.md#humans-decide-agents-draft</a:t>
+                      </a:r>
+                      <a:endParaRPr lang="en-US" sz="1200" dirty="0">
+                        <a:latin typeface="Arial" charset="0"/>
+                        <a:ea typeface="Arial" charset="0"/>
+                        <a:cs typeface="Arial" charset="0"/>
+                      </a:endParaRPr>
+                    </a:p>
+                  </a:txBody>
+                  <a:tcPr marL="73152" marR="73152" marT="73152" marB="73152" anchor="ctr">
+                    <a:lnL w="9525" cap="flat" cmpd="sng" algn="ctr">
+                      <a:solidFill>
+                        <a:srgbClr val="D6DCE4"/>
+                      </a:solidFill>
+                      <a:prstDash val="solid"/>
+                      <a:round/>
+                      <a:headEnd type="none" w="med" len="med"/>
+                      <a:tailEnd type="none" w="med" len="med"/>
+                    </a:lnL>
+                    <a:lnR w="9525" cap="flat" cmpd="sng" algn="ctr">
+                      <a:solidFill>
+                        <a:srgbClr val="D6DCE4"/>
+                      </a:solidFill>
+                      <a:prstDash val="solid"/>
+                      <a:round/>
+                      <a:headEnd type="none" w="med" len="med"/>
+                      <a:tailEnd type="none" w="med" len="med"/>
+                    </a:lnR>
+                    <a:lnT w="9525" cap="flat" cmpd="sng" algn="ctr">
+                      <a:solidFill>
+                        <a:srgbClr val="D6DCE4"/>
+                      </a:solidFill>
+                      <a:prstDash val="solid"/>
+                      <a:round/>
+                      <a:headEnd type="none" w="med" len="med"/>
+                      <a:tailEnd type="none" w="med" len="med"/>
+                    </a:lnT>
+                    <a:lnB w="9525" cap="flat" cmpd="sng" algn="ctr">
+                      <a:solidFill>
+                        <a:srgbClr val="D6DCE4"/>
+                      </a:solidFill>
+                      <a:prstDash val="solid"/>
+                      <a:round/>
+                      <a:headEnd type="none" w="med" len="med"/>
+                      <a:tailEnd type="none" w="med" len="med"/>
+                    </a:lnB>
+                    <a:solidFill>
+                      <a:srgbClr val="FFFFFF"/>
+                    </a:solidFill>
+                  </a:tcPr>
+                </a:tc>
+              </a:tr>
+              <a:tr h="749808">
+                <a:tc>
+                  <a:txBody>
+                    <a:bodyPr/>
+                    <a:lstStyle/>
+                    <a:p>
+                      <a:pPr indent="0" marL="0">
+                        <a:buNone/>
+                      </a:pPr>
+                      <a:r>
+                        <a:rPr lang="en-US" sz="1200" b="1" dirty="0">
+                          <a:solidFill>
+                            <a:srgbClr val="55606D"/>
+                          </a:solidFill>
+                          <a:latin typeface="Arial" pitchFamily="34" charset="0"/>
+                          <a:ea typeface="Arial" pitchFamily="34" charset="-122"/>
+                          <a:cs typeface="Arial" pitchFamily="34" charset="-120"/>
+                        </a:rPr>
+                        <a:t>S22</a:t>
+                      </a:r>
+                      <a:endParaRPr lang="en-US" sz="1200" dirty="0">
+                        <a:latin typeface="Arial" charset="0"/>
+                        <a:ea typeface="Arial" charset="0"/>
+                        <a:cs typeface="Arial" charset="0"/>
+                      </a:endParaRPr>
+                    </a:p>
+                  </a:txBody>
+                  <a:tcPr marL="73152" marR="73152" marT="73152" marB="73152" anchor="ctr">
+                    <a:lnL w="9525" cap="flat" cmpd="sng" algn="ctr">
+                      <a:solidFill>
+                        <a:srgbClr val="D6DCE4"/>
+                      </a:solidFill>
+                      <a:prstDash val="solid"/>
+                      <a:round/>
+                      <a:headEnd type="none" w="med" len="med"/>
+                      <a:tailEnd type="none" w="med" len="med"/>
+                    </a:lnL>
+                    <a:lnR w="9525" cap="flat" cmpd="sng" algn="ctr">
+                      <a:solidFill>
+                        <a:srgbClr val="D6DCE4"/>
+                      </a:solidFill>
+                      <a:prstDash val="solid"/>
+                      <a:round/>
+                      <a:headEnd type="none" w="med" len="med"/>
+                      <a:tailEnd type="none" w="med" len="med"/>
+                    </a:lnR>
+                    <a:lnT w="9525" cap="flat" cmpd="sng" algn="ctr">
+                      <a:solidFill>
+                        <a:srgbClr val="D6DCE4"/>
+                      </a:solidFill>
+                      <a:prstDash val="solid"/>
+                      <a:round/>
+                      <a:headEnd type="none" w="med" len="med"/>
+                      <a:tailEnd type="none" w="med" len="med"/>
+                    </a:lnT>
+                    <a:lnB w="9525" cap="flat" cmpd="sng" algn="ctr">
+                      <a:solidFill>
+                        <a:srgbClr val="D6DCE4"/>
+                      </a:solidFill>
+                      <a:prstDash val="solid"/>
+                      <a:round/>
+                      <a:headEnd type="none" w="med" len="med"/>
+                      <a:tailEnd type="none" w="med" len="med"/>
+                    </a:lnB>
+                    <a:solidFill>
+                      <a:srgbClr val="FFFFFF"/>
+                    </a:solidFill>
+                  </a:tcPr>
+                </a:tc>
+                <a:tc>
+                  <a:txBody>
+                    <a:bodyPr/>
+                    <a:lstStyle/>
+                    <a:p>
+                      <a:pPr indent="0" marL="0">
+                        <a:buNone/>
+                      </a:pPr>
+                      <a:r>
+                        <a:rPr lang="en-US" sz="1200" dirty="0">
+                          <a:solidFill>
+                            <a:srgbClr val="1F2933"/>
+                          </a:solidFill>
+                          <a:latin typeface="Arial" pitchFamily="34" charset="0"/>
+                          <a:ea typeface="Arial" pitchFamily="34" charset="-122"/>
+                          <a:cs typeface="Arial" pitchFamily="34" charset="-120"/>
+                        </a:rPr>
+                        <a:t>Hand-off table: approval, autonomy level, stop triggers, escalation, surfaced judgment, and the rule behind each</a:t>
+                      </a:r>
+                      <a:endParaRPr lang="en-US" sz="1200" dirty="0">
+                        <a:latin typeface="Arial" charset="0"/>
+                        <a:ea typeface="Arial" charset="0"/>
+                        <a:cs typeface="Arial" charset="0"/>
+                      </a:endParaRPr>
+                    </a:p>
+                  </a:txBody>
+                  <a:tcPr marL="73152" marR="73152" marT="73152" marB="73152" anchor="ctr">
+                    <a:lnL w="9525" cap="flat" cmpd="sng" algn="ctr">
+                      <a:solidFill>
+                        <a:srgbClr val="D6DCE4"/>
+                      </a:solidFill>
+                      <a:prstDash val="solid"/>
+                      <a:round/>
+                      <a:headEnd type="none" w="med" len="med"/>
+                      <a:tailEnd type="none" w="med" len="med"/>
+                    </a:lnL>
+                    <a:lnR w="9525" cap="flat" cmpd="sng" algn="ctr">
+                      <a:solidFill>
+                        <a:srgbClr val="D6DCE4"/>
+                      </a:solidFill>
+                      <a:prstDash val="solid"/>
+                      <a:round/>
+                      <a:headEnd type="none" w="med" len="med"/>
+                      <a:tailEnd type="none" w="med" len="med"/>
+                    </a:lnR>
+                    <a:lnT w="9525" cap="flat" cmpd="sng" algn="ctr">
+                      <a:solidFill>
+                        <a:srgbClr val="D6DCE4"/>
+                      </a:solidFill>
+                      <a:prstDash val="solid"/>
+                      <a:round/>
+                      <a:headEnd type="none" w="med" len="med"/>
+                      <a:tailEnd type="none" w="med" len="med"/>
+                    </a:lnT>
+                    <a:lnB w="9525" cap="flat" cmpd="sng" algn="ctr">
+                      <a:solidFill>
+                        <a:srgbClr val="D6DCE4"/>
+                      </a:solidFill>
+                      <a:prstDash val="solid"/>
+                      <a:round/>
+                      <a:headEnd type="none" w="med" len="med"/>
+                      <a:tailEnd type="none" w="med" len="med"/>
+                    </a:lnB>
+                    <a:solidFill>
+                      <a:srgbClr val="FFFFFF"/>
+                    </a:solidFill>
+                  </a:tcPr>
+                </a:tc>
+                <a:tc>
+                  <a:txBody>
+                    <a:bodyPr/>
+                    <a:lstStyle/>
+                    <a:p>
+                      <a:pPr indent="0" marL="0">
+                        <a:buNone/>
+                      </a:pPr>
+                      <a:r>
+                        <a:rPr lang="en-US" sz="1200" dirty="0">
+                          <a:solidFill>
+                            <a:srgbClr val="1F2933"/>
+                          </a:solidFill>
+                          <a:latin typeface="Arial" pitchFamily="34" charset="0"/>
+                          <a:ea typeface="Arial" pitchFamily="34" charset="-122"/>
+                          <a:cs typeface="Arial" pitchFamily="34" charset="-120"/>
+                        </a:rPr>
+                        <a:t>workflows/README.md#human-ai-collaboration, docs/helix/00-discover/product-vision.md#key-value-propositions</a:t>
                       </a:r>
                       <a:endParaRPr lang="en-US" sz="1200" dirty="0">
                         <a:latin typeface="Arial" charset="0"/>
@@ -9461,7 +11297,7 @@
               <a:buNone/>
             </a:pPr>
             <a:r>
-              <a:rPr lang="en-US" sz="3600" b="1" dirty="0">
+              <a:rPr lang="en-US" sz="3200" b="1" dirty="0">
                 <a:solidFill>
                   <a:srgbClr val="1F2933"/>
                 </a:solidFill>
@@ -9471,7 +11307,7 @@
               </a:rPr>
               <a:t>Without that practice, agent code drifts from its governing documents</a:t>
             </a:r>
-            <a:endParaRPr lang="en-US" sz="3600" dirty="0"/>
+            <a:endParaRPr lang="en-US" sz="3200" dirty="0"/>
           </a:p>
         </p:txBody>
       </p:sp>
@@ -10280,7 +12116,7 @@
               <a:buNone/>
             </a:pPr>
             <a:r>
-              <a:rPr lang="en-US" sz="3600" b="1" dirty="0">
+              <a:rPr lang="en-US" sz="2800" b="1" dirty="0">
                 <a:solidFill>
                   <a:srgbClr val="1F2933"/>
                 </a:solidFill>
@@ -10290,7 +12126,7 @@
               </a:rPr>
               <a:t>HELIX answers with 53 document templates across a seven-activity loop</a:t>
             </a:r>
-            <a:endParaRPr lang="en-US" sz="3600" dirty="0"/>
+            <a:endParaRPr lang="en-US" sz="2800" dirty="0"/>
           </a:p>
         </p:txBody>
       </p:sp>
@@ -12650,7 +14486,7 @@
                 <a:ea typeface="Georgia" pitchFamily="34" charset="-122"/>
                 <a:cs typeface="Georgia" pitchFamily="34" charset="-120"/>
               </a:rPr>
-              <a:t>The alignment check reads those documents before anyone codes</a:t>
+              <a:t>Each document layer governs the next, from vision down to code</a:t>
             </a:r>
             <a:endParaRPr lang="en-US" sz="3600" dirty="0"/>
           </a:p>
@@ -12689,7 +14525,7 @@
                 <a:ea typeface="Arial" pitchFamily="34" charset="-122"/>
                 <a:cs typeface="Arial" pitchFamily="34" charset="-120"/>
               </a:rPr>
-              <a:t>Sources: S7, S8 (appendix)</a:t>
+              <a:t>Sources: S19, S20 (appendix)</a:t>
             </a:r>
             <a:endParaRPr lang="en-US" sz="900" dirty="0"/>
           </a:p>
@@ -12743,7 +14579,7 @@
         <p:spPr>
           <a:xfrm>
             <a:off x="548640" y="2788920"/>
-            <a:ext cx="2718740" cy="1051560"/>
+            <a:ext cx="2160361" cy="731520"/>
           </a:xfrm>
           <a:prstGeom prst="chevron">
             <a:avLst/>
@@ -12767,8 +14603,8 @@
         </p:nvSpPr>
         <p:spPr>
           <a:xfrm>
-            <a:off x="1126998" y="2880360"/>
-            <a:ext cx="1562024" cy="868680"/>
+            <a:off x="950976" y="2880360"/>
+            <a:ext cx="1355689" cy="548640"/>
           </a:xfrm>
           <a:prstGeom prst="rect">
             <a:avLst/>
@@ -12794,7 +14630,7 @@
                 <a:ea typeface="Arial" pitchFamily="34" charset="-122"/>
                 <a:cs typeface="Arial" pitchFamily="34" charset="-120"/>
               </a:rPr>
-              <a:t>Write the brief</a:t>
+              <a:t>Vision</a:t>
             </a:r>
             <a:endParaRPr lang="en-US" sz="1600" dirty="0"/>
           </a:p>
@@ -12808,8 +14644,8 @@
         </p:nvSpPr>
         <p:spPr>
           <a:xfrm>
-            <a:off x="640080" y="4023360"/>
-            <a:ext cx="2535860" cy="914400"/>
+            <a:off x="640080" y="3703320"/>
+            <a:ext cx="1977481" cy="914400"/>
           </a:xfrm>
           <a:prstGeom prst="rect">
             <a:avLst/>
@@ -12835,7 +14671,7 @@
                 <a:ea typeface="Arial" pitchFamily="34" charset="-122"/>
                 <a:cs typeface="Arial" pitchFamily="34" charset="-120"/>
               </a:rPr>
-              <a:t>intent, requirements, constraints, decisions</a:t>
+              <a:t>direction and who it is for</a:t>
             </a:r>
             <a:endParaRPr lang="en-US" sz="1400" dirty="0"/>
           </a:p>
@@ -12849,14 +14685,14 @@
         </p:nvSpPr>
         <p:spPr>
           <a:xfrm>
-            <a:off x="3340532" y="2788920"/>
-            <a:ext cx="2718740" cy="1051560"/>
+            <a:off x="2782153" y="2788920"/>
+            <a:ext cx="2160361" cy="731520"/>
           </a:xfrm>
           <a:prstGeom prst="chevron">
             <a:avLst/>
           </a:prstGeom>
           <a:solidFill>
-            <a:srgbClr val="C44B2F"/>
+            <a:srgbClr val="3B6BA8"/>
           </a:solidFill>
           <a:ln w="19050">
             <a:solidFill>
@@ -12874,8 +14710,8 @@
         </p:nvSpPr>
         <p:spPr>
           <a:xfrm>
-            <a:off x="3918890" y="2880360"/>
-            <a:ext cx="1562024" cy="868680"/>
+            <a:off x="3184489" y="2880360"/>
+            <a:ext cx="1355689" cy="548640"/>
           </a:xfrm>
           <a:prstGeom prst="rect">
             <a:avLst/>
@@ -12901,7 +14737,7 @@
                 <a:ea typeface="Arial" pitchFamily="34" charset="-122"/>
                 <a:cs typeface="Arial" pitchFamily="34" charset="-120"/>
               </a:rPr>
-              <a:t>Check alignment</a:t>
+              <a:t>Requirements</a:t>
             </a:r>
             <a:endParaRPr lang="en-US" sz="1600" dirty="0"/>
           </a:p>
@@ -12915,8 +14751,8 @@
         </p:nvSpPr>
         <p:spPr>
           <a:xfrm>
-            <a:off x="3431972" y="4023360"/>
-            <a:ext cx="2535860" cy="914400"/>
+            <a:off x="2873593" y="3703320"/>
+            <a:ext cx="1977481" cy="914400"/>
           </a:xfrm>
           <a:prstGeom prst="rect">
             <a:avLst/>
@@ -12942,7 +14778,7 @@
                 <a:ea typeface="Arial" pitchFamily="34" charset="-122"/>
                 <a:cs typeface="Arial" pitchFamily="34" charset="-120"/>
               </a:rPr>
-              <a:t>drift, contradictions, stale assumptions</a:t>
+              <a:t>scope, outcomes, non-goals</a:t>
             </a:r>
             <a:endParaRPr lang="en-US" sz="1400" dirty="0"/>
           </a:p>
@@ -12950,55 +14786,14 @@
       </p:sp>
       <p:sp>
         <p:nvSpPr>
-          <p:cNvPr id="14" name="Text 11"/>
-          <p:cNvSpPr txBox="1"/>
-          <p:nvPr/>
-        </p:nvSpPr>
-        <p:spPr>
-          <a:xfrm>
-            <a:off x="2974772" y="5029200"/>
-            <a:ext cx="3450260" cy="548640"/>
-          </a:xfrm>
-          <a:prstGeom prst="rect">
-            <a:avLst/>
-          </a:prstGeom>
-          <a:noFill/>
-          <a:ln/>
-        </p:spPr>
-        <p:txBody>
-          <a:bodyPr wrap="square" lIns="0" tIns="0" rIns="0" bIns="0" rtlCol="0" anchor="t">
-            <a:normAutofit/>
-          </a:bodyPr>
-          <a:lstStyle/>
-          <a:p>
-            <a:pPr algn="ctr" indent="0" marL="0">
-              <a:buNone/>
-            </a:pPr>
-            <a:r>
-              <a:rPr lang="en-US" sz="1400" b="1" dirty="0">
-                <a:solidFill>
-                  <a:srgbClr val="C44B2F"/>
-                </a:solidFill>
-                <a:latin typeface="Arial" pitchFamily="34" charset="0"/>
-                <a:ea typeface="Arial" pitchFamily="34" charset="-122"/>
-                <a:cs typeface="Arial" pitchFamily="34" charset="-120"/>
-              </a:rPr>
-              <a:t>the step nobody does by hand today</a:t>
-            </a:r>
-            <a:endParaRPr lang="en-US" sz="1400" dirty="0"/>
-          </a:p>
-        </p:txBody>
-      </p:sp>
-      <p:sp>
-        <p:nvSpPr>
-          <p:cNvPr id="15" name="Shape 12"/>
+          <p:cNvPr id="14" name="Shape 11"/>
           <p:cNvSpPr/>
           <p:nvPr/>
         </p:nvSpPr>
         <p:spPr>
           <a:xfrm>
-            <a:off x="6132424" y="2788920"/>
-            <a:ext cx="2718740" cy="1051560"/>
+            <a:off x="5015667" y="2788920"/>
+            <a:ext cx="2160361" cy="731520"/>
           </a:xfrm>
           <a:prstGeom prst="chevron">
             <a:avLst/>
@@ -13016,14 +14811,14 @@
       </p:sp>
       <p:sp>
         <p:nvSpPr>
-          <p:cNvPr id="16" name="Text 13"/>
+          <p:cNvPr id="15" name="Text 12"/>
           <p:cNvSpPr txBox="1"/>
           <p:nvPr/>
         </p:nvSpPr>
         <p:spPr>
           <a:xfrm>
-            <a:off x="6710782" y="2880360"/>
-            <a:ext cx="1562024" cy="868680"/>
+            <a:off x="5418003" y="2880360"/>
+            <a:ext cx="1355689" cy="548640"/>
           </a:xfrm>
           <a:prstGeom prst="rect">
             <a:avLst/>
@@ -13049,7 +14844,7 @@
                 <a:ea typeface="Arial" pitchFamily="34" charset="-122"/>
                 <a:cs typeface="Arial" pitchFamily="34" charset="-120"/>
               </a:rPr>
-              <a:t>Plan the work</a:t>
+              <a:t>Designs</a:t>
             </a:r>
             <a:endParaRPr lang="en-US" sz="1600" dirty="0"/>
           </a:p>
@@ -13057,14 +14852,14 @@
       </p:sp>
       <p:sp>
         <p:nvSpPr>
-          <p:cNvPr id="17" name="Text 14"/>
+          <p:cNvPr id="16" name="Text 13"/>
           <p:cNvSpPr txBox="1"/>
           <p:nvPr/>
         </p:nvSpPr>
         <p:spPr>
           <a:xfrm>
-            <a:off x="6223864" y="4023360"/>
-            <a:ext cx="2535860" cy="914400"/>
+            <a:off x="5107107" y="3703320"/>
+            <a:ext cx="1977481" cy="914400"/>
           </a:xfrm>
           <a:prstGeom prst="rect">
             <a:avLst/>
@@ -13090,7 +14885,7 @@
                 <a:ea typeface="Arial" pitchFamily="34" charset="-122"/>
                 <a:cs typeface="Arial" pitchFamily="34" charset="-120"/>
               </a:rPr>
-              <a:t>bounded items with scope and evidence</a:t>
+              <a:t>decisions, contracts, components</a:t>
             </a:r>
             <a:endParaRPr lang="en-US" sz="1400" dirty="0"/>
           </a:p>
@@ -13098,14 +14893,14 @@
       </p:sp>
       <p:sp>
         <p:nvSpPr>
-          <p:cNvPr id="18" name="Shape 15"/>
+          <p:cNvPr id="17" name="Shape 14"/>
           <p:cNvSpPr/>
           <p:nvPr/>
         </p:nvSpPr>
         <p:spPr>
           <a:xfrm>
-            <a:off x="8924315" y="2788920"/>
-            <a:ext cx="2718740" cy="1051560"/>
+            <a:off x="7249180" y="2788920"/>
+            <a:ext cx="2160361" cy="731520"/>
           </a:xfrm>
           <a:prstGeom prst="chevron">
             <a:avLst/>
@@ -13123,14 +14918,14 @@
       </p:sp>
       <p:sp>
         <p:nvSpPr>
-          <p:cNvPr id="19" name="Text 16"/>
+          <p:cNvPr id="18" name="Text 15"/>
           <p:cNvSpPr txBox="1"/>
           <p:nvPr/>
         </p:nvSpPr>
         <p:spPr>
           <a:xfrm>
-            <a:off x="9502673" y="2880360"/>
-            <a:ext cx="1562024" cy="868680"/>
+            <a:off x="7651516" y="2880360"/>
+            <a:ext cx="1355689" cy="548640"/>
           </a:xfrm>
           <a:prstGeom prst="rect">
             <a:avLst/>
@@ -13156,7 +14951,7 @@
                 <a:ea typeface="Arial" pitchFamily="34" charset="-122"/>
                 <a:cs typeface="Arial" pitchFamily="34" charset="-120"/>
               </a:rPr>
-              <a:t>Run it</a:t>
+              <a:t>Tests</a:t>
             </a:r>
             <a:endParaRPr lang="en-US" sz="1600" dirty="0"/>
           </a:p>
@@ -13164,14 +14959,14 @@
       </p:sp>
       <p:sp>
         <p:nvSpPr>
-          <p:cNvPr id="20" name="Text 17"/>
+          <p:cNvPr id="19" name="Text 16"/>
           <p:cNvSpPr txBox="1"/>
           <p:nvPr/>
         </p:nvSpPr>
         <p:spPr>
           <a:xfrm>
-            <a:off x="9015755" y="4023360"/>
-            <a:ext cx="2535860" cy="914400"/>
+            <a:off x="7340620" y="3703320"/>
+            <a:ext cx="1977481" cy="914400"/>
           </a:xfrm>
           <a:prstGeom prst="rect">
             <a:avLst/>
@@ -13197,9 +14992,157 @@
                 <a:ea typeface="Arial" pitchFamily="34" charset="-122"/>
                 <a:cs typeface="Arial" pitchFamily="34" charset="-120"/>
               </a:rPr>
-              <a:t>your own runtime executes, measures, reports back</a:t>
+              <a:t>acceptance before any code</a:t>
             </a:r>
             <a:endParaRPr lang="en-US" sz="1400" dirty="0"/>
+          </a:p>
+        </p:txBody>
+      </p:sp>
+      <p:sp>
+        <p:nvSpPr>
+          <p:cNvPr id="20" name="Shape 17"/>
+          <p:cNvSpPr/>
+          <p:nvPr/>
+        </p:nvSpPr>
+        <p:spPr>
+          <a:xfrm>
+            <a:off x="9482694" y="2788920"/>
+            <a:ext cx="2160361" cy="731520"/>
+          </a:xfrm>
+          <a:prstGeom prst="chevron">
+            <a:avLst/>
+          </a:prstGeom>
+          <a:solidFill>
+            <a:srgbClr val="C44B2F"/>
+          </a:solidFill>
+          <a:ln w="19050">
+            <a:solidFill>
+              <a:srgbClr val="FFFFFF"/>
+            </a:solidFill>
+            <a:prstDash val="solid"/>
+          </a:ln>
+        </p:spPr>
+      </p:sp>
+      <p:sp>
+        <p:nvSpPr>
+          <p:cNvPr id="21" name="Text 18"/>
+          <p:cNvSpPr txBox="1"/>
+          <p:nvPr/>
+        </p:nvSpPr>
+        <p:spPr>
+          <a:xfrm>
+            <a:off x="9885030" y="2880360"/>
+            <a:ext cx="1355689" cy="548640"/>
+          </a:xfrm>
+          <a:prstGeom prst="rect">
+            <a:avLst/>
+          </a:prstGeom>
+          <a:noFill/>
+          <a:ln/>
+        </p:spPr>
+        <p:txBody>
+          <a:bodyPr wrap="square" lIns="0" tIns="0" rIns="0" bIns="0" rtlCol="0" anchor="ctr">
+            <a:normAutofit/>
+          </a:bodyPr>
+          <a:lstStyle/>
+          <a:p>
+            <a:pPr algn="ctr" indent="0" marL="0">
+              <a:buNone/>
+            </a:pPr>
+            <a:r>
+              <a:rPr lang="en-US" sz="1600" b="1" dirty="0">
+                <a:solidFill>
+                  <a:srgbClr val="FFFFFF"/>
+                </a:solidFill>
+                <a:latin typeface="Arial" pitchFamily="34" charset="0"/>
+                <a:ea typeface="Arial" pitchFamily="34" charset="-122"/>
+                <a:cs typeface="Arial" pitchFamily="34" charset="-120"/>
+              </a:rPr>
+              <a:t>Code</a:t>
+            </a:r>
+            <a:endParaRPr lang="en-US" sz="1600" dirty="0"/>
+          </a:p>
+        </p:txBody>
+      </p:sp>
+      <p:sp>
+        <p:nvSpPr>
+          <p:cNvPr id="22" name="Text 19"/>
+          <p:cNvSpPr txBox="1"/>
+          <p:nvPr/>
+        </p:nvSpPr>
+        <p:spPr>
+          <a:xfrm>
+            <a:off x="9574134" y="3703320"/>
+            <a:ext cx="1977481" cy="914400"/>
+          </a:xfrm>
+          <a:prstGeom prst="rect">
+            <a:avLst/>
+          </a:prstGeom>
+          <a:noFill/>
+          <a:ln/>
+        </p:spPr>
+        <p:txBody>
+          <a:bodyPr wrap="square" lIns="0" tIns="0" rIns="0" bIns="0" rtlCol="0" anchor="t">
+            <a:normAutofit/>
+          </a:bodyPr>
+          <a:lstStyle/>
+          <a:p>
+            <a:pPr algn="ctr" indent="0" marL="0">
+              <a:buNone/>
+            </a:pPr>
+            <a:r>
+              <a:rPr lang="en-US" sz="1400" dirty="0">
+                <a:solidFill>
+                  <a:srgbClr val="55606D"/>
+                </a:solidFill>
+                <a:latin typeface="Arial" pitchFamily="34" charset="0"/>
+                <a:ea typeface="Arial" pitchFamily="34" charset="-122"/>
+                <a:cs typeface="Arial" pitchFamily="34" charset="-120"/>
+              </a:rPr>
+              <a:t>only what the layers above authorize</a:t>
+            </a:r>
+            <a:endParaRPr lang="en-US" sz="1400" dirty="0"/>
+          </a:p>
+        </p:txBody>
+      </p:sp>
+      <p:sp>
+        <p:nvSpPr>
+          <p:cNvPr id="23" name="Text 20"/>
+          <p:cNvSpPr txBox="1"/>
+          <p:nvPr/>
+        </p:nvSpPr>
+        <p:spPr>
+          <a:xfrm>
+            <a:off x="8751174" y="4709160"/>
+            <a:ext cx="2891881" cy="548640"/>
+          </a:xfrm>
+          <a:prstGeom prst="rect">
+            <a:avLst/>
+          </a:prstGeom>
+          <a:noFill/>
+          <a:ln/>
+        </p:spPr>
+        <p:txBody>
+          <a:bodyPr wrap="square" lIns="0" tIns="0" rIns="0" bIns="0" rtlCol="0" anchor="t">
+            <a:normAutofit/>
+          </a:bodyPr>
+          <a:lstStyle/>
+          <a:p>
+            <a:pPr algn="ctr" indent="0" marL="0">
+              <a:buNone/>
+            </a:pPr>
+            <a:r>
+              <a:rPr lang="en-US" sz="1200" b="1" dirty="0">
+                <a:solidFill>
+                  <a:srgbClr val="C44B2F"/>
+                </a:solidFill>
+                <a:latin typeface="Arial" pitchFamily="34" charset="0"/>
+                <a:ea typeface="Arial" pitchFamily="34" charset="-122"/>
+                <a:cs typeface="Arial" pitchFamily="34" charset="-120"/>
+              </a:rPr>
+              <a:t>a change enters at the top layer it touches and flows down</a:t>
+            </a:r>
+            <a:endParaRPr lang="en-US" sz="1200" dirty="0"/>
           </a:p>
         </p:txBody>
       </p:sp>
@@ -13334,7 +15277,7 @@
                 <a:ea typeface="Georgia" pitchFamily="34" charset="-122"/>
                 <a:cs typeface="Georgia" pitchFamily="34" charset="-120"/>
               </a:rPr>
-              <a:t>Fifty concerns carry shared practices into every document</a:t>
+              <a:t>Concerns and gates carry that control across every layer</a:t>
             </a:r>
             <a:endParaRPr lang="en-US" sz="3600" dirty="0"/>
           </a:p>
@@ -13373,7 +15316,7 @@
                 <a:ea typeface="Arial" pitchFamily="34" charset="-122"/>
                 <a:cs typeface="Arial" pitchFamily="34" charset="-120"/>
               </a:rPr>
-              <a:t>Sources: S9, S10 (appendix)</a:t>
+              <a:t>Sources: S9, S11, S19 (appendix)</a:t>
             </a:r>
             <a:endParaRPr lang="en-US" sz="900" dirty="0"/>
           </a:p>
@@ -13420,124 +15363,18 @@
       </p:sp>
       <p:sp>
         <p:nvSpPr>
-          <p:cNvPr id="8" name="Text 5"/>
-          <p:cNvSpPr txBox="1"/>
+          <p:cNvPr id="8" name="Shape 5"/>
+          <p:cNvSpPr/>
           <p:nvPr/>
         </p:nvSpPr>
         <p:spPr>
           <a:xfrm>
             <a:off x="548640" y="1965960"/>
-            <a:ext cx="4462653" cy="3840480"/>
-          </a:xfrm>
-          <a:prstGeom prst="rect">
-            <a:avLst/>
-          </a:prstGeom>
-          <a:noFill/>
-          <a:ln/>
-        </p:spPr>
-        <p:txBody>
-          <a:bodyPr wrap="square" lIns="0" tIns="0" rIns="0" bIns="0" rtlCol="0" anchor="t"/>
-          <a:lstStyle/>
-          <a:p>
-            <a:pPr marL="228600" indent="-228600">
-              <a:spcAft>
-                <a:spcPts val="1080"/>
-              </a:spcAft>
-              <a:buSzPct val="100000"/>
-              <a:buChar char="•"/>
-            </a:pPr>
-            <a:r>
-              <a:rPr lang="en-US" sz="1800" dirty="0">
-                <a:solidFill>
-                  <a:srgbClr val="1F2933"/>
-                </a:solidFill>
-                <a:latin typeface="Arial" pitchFamily="34" charset="0"/>
-                <a:ea typeface="Arial" pitchFamily="34" charset="-122"/>
-                <a:cs typeface="Arial" pitchFamily="34" charset="-120"/>
-              </a:rPr>
-              <a:t>A concern is a cross-cutting rule set: accessibility, security, verification, data quality</a:t>
-            </a:r>
-            <a:endParaRPr lang="en-US" sz="1800" dirty="0"/>
-          </a:p>
-          <a:p>
-            <a:pPr marL="228600" indent="-228600">
-              <a:spcAft>
-                <a:spcPts val="1080"/>
-              </a:spcAft>
-              <a:buSzPct val="100000"/>
-              <a:buChar char="•"/>
-            </a:pPr>
-            <a:r>
-              <a:rPr lang="en-US" sz="1800" dirty="0">
-                <a:solidFill>
-                  <a:srgbClr val="1F2933"/>
-                </a:solidFill>
-                <a:latin typeface="Arial" pitchFamily="34" charset="0"/>
-                <a:ea typeface="Arial" pitchFamily="34" charset="-122"/>
-                <a:cs typeface="Arial" pitchFamily="34" charset="-120"/>
-              </a:rPr>
-              <a:t>Each concern names the practices every downstream document and task inherits</a:t>
-            </a:r>
-            <a:endParaRPr lang="en-US" sz="1800" dirty="0"/>
-          </a:p>
-          <a:p>
-            <a:pPr marL="228600" indent="-228600">
-              <a:spcAft>
-                <a:spcPts val="1080"/>
-              </a:spcAft>
-              <a:buSzPct val="100000"/>
-              <a:buChar char="•"/>
-            </a:pPr>
-            <a:r>
-              <a:rPr lang="en-US" sz="1800" dirty="0">
-                <a:solidFill>
-                  <a:srgbClr val="1F2933"/>
-                </a:solidFill>
-                <a:latin typeface="Arial" pitchFamily="34" charset="0"/>
-                <a:ea typeface="Arial" pitchFamily="34" charset="-122"/>
-                <a:cs typeface="Arial" pitchFamily="34" charset="-120"/>
-              </a:rPr>
-              <a:t>Principles settle tensions the same way each time, starting with spec is the contract</a:t>
-            </a:r>
-            <a:endParaRPr lang="en-US" sz="1800" dirty="0"/>
-          </a:p>
-          <a:p>
-            <a:pPr marL="228600" indent="-228600">
-              <a:spcAft>
-                <a:spcPts val="1080"/>
-              </a:spcAft>
-              <a:buSzPct val="100000"/>
-              <a:buChar char="•"/>
-            </a:pPr>
-            <a:r>
-              <a:rPr lang="en-US" sz="1800" dirty="0">
-                <a:solidFill>
-                  <a:srgbClr val="1F2933"/>
-                </a:solidFill>
-                <a:latin typeface="Arial" pitchFamily="34" charset="0"/>
-                <a:ea typeface="Arial" pitchFamily="34" charset="-122"/>
-                <a:cs typeface="Arial" pitchFamily="34" charset="-120"/>
-              </a:rPr>
-              <a:t>Exclusive slots hold one choice each: one frontend framework, one runtime, one auth provider</a:t>
-            </a:r>
-            <a:endParaRPr lang="en-US" sz="1800" dirty="0"/>
-          </a:p>
-        </p:txBody>
-      </p:sp>
-      <p:sp>
-        <p:nvSpPr>
-          <p:cNvPr id="9" name="Shape 6"/>
-          <p:cNvSpPr/>
-          <p:nvPr/>
-        </p:nvSpPr>
-        <p:spPr>
-          <a:xfrm>
-            <a:off x="5285613" y="1965960"/>
-            <a:ext cx="1383621" cy="3840480"/>
+            <a:ext cx="5410048" cy="3108960"/>
           </a:xfrm>
           <a:prstGeom prst="roundRect">
             <a:avLst>
-              <a:gd name="adj" fmla="val 6609"/>
+              <a:gd name="adj" fmla="val 2941"/>
             </a:avLst>
           </a:prstGeom>
           <a:solidFill>
@@ -13553,14 +15390,246 @@
       </p:sp>
       <p:sp>
         <p:nvSpPr>
-          <p:cNvPr id="10" name="Shape 7"/>
+          <p:cNvPr id="9" name="Text 6"/>
+          <p:cNvSpPr txBox="1"/>
+          <p:nvPr/>
+        </p:nvSpPr>
+        <p:spPr>
+          <a:xfrm>
+            <a:off x="822960" y="2148840"/>
+            <a:ext cx="4861408" cy="457200"/>
+          </a:xfrm>
+          <a:prstGeom prst="rect">
+            <a:avLst/>
+          </a:prstGeom>
+          <a:noFill/>
+          <a:ln/>
+        </p:spPr>
+        <p:txBody>
+          <a:bodyPr wrap="square" lIns="0" tIns="0" rIns="0" bIns="0" rtlCol="0" anchor="t">
+            <a:normAutofit/>
+          </a:bodyPr>
+          <a:lstStyle/>
+          <a:p>
+            <a:pPr algn="l" indent="0" marL="0">
+              <a:buNone/>
+            </a:pPr>
+            <a:r>
+              <a:rPr lang="en-US" sz="2000" b="1" dirty="0">
+                <a:solidFill>
+                  <a:srgbClr val="55606D"/>
+                </a:solidFill>
+                <a:latin typeface="Georgia" pitchFamily="34" charset="0"/>
+                <a:ea typeface="Georgia" pitchFamily="34" charset="-122"/>
+                <a:cs typeface="Georgia" pitchFamily="34" charset="-120"/>
+              </a:rPr>
+              <a:t>Without layered control</a:t>
+            </a:r>
+            <a:endParaRPr lang="en-US" sz="2000" dirty="0"/>
+          </a:p>
+        </p:txBody>
+      </p:sp>
+      <p:sp>
+        <p:nvSpPr>
+          <p:cNvPr id="10" name="Text 7"/>
+          <p:cNvSpPr txBox="1"/>
+          <p:nvPr/>
+        </p:nvSpPr>
+        <p:spPr>
+          <a:xfrm>
+            <a:off x="822960" y="2697480"/>
+            <a:ext cx="4861408" cy="594360"/>
+          </a:xfrm>
+          <a:prstGeom prst="rect">
+            <a:avLst/>
+          </a:prstGeom>
+          <a:noFill/>
+          <a:ln/>
+        </p:spPr>
+        <p:txBody>
+          <a:bodyPr wrap="square" lIns="0" tIns="0" rIns="0" bIns="0" rtlCol="0" anchor="t">
+            <a:normAutofit/>
+          </a:bodyPr>
+          <a:lstStyle/>
+          <a:p>
+            <a:pPr algn="l" indent="0" marL="0">
+              <a:buNone/>
+            </a:pPr>
+            <a:r>
+              <a:rPr lang="en-US" sz="1500" dirty="0">
+                <a:solidFill>
+                  <a:srgbClr val="1F2933"/>
+                </a:solidFill>
+                <a:latin typeface="Arial" pitchFamily="34" charset="0"/>
+                <a:ea typeface="Arial" pitchFamily="34" charset="-122"/>
+                <a:cs typeface="Arial" pitchFamily="34" charset="-120"/>
+              </a:rPr>
+              <a:t>Each agent re-decides framework, auth, and test approach per task</a:t>
+            </a:r>
+            <a:endParaRPr lang="en-US" sz="1500" dirty="0"/>
+          </a:p>
+        </p:txBody>
+      </p:sp>
+      <p:sp>
+        <p:nvSpPr>
+          <p:cNvPr id="11" name="Text 8"/>
+          <p:cNvSpPr txBox="1"/>
+          <p:nvPr/>
+        </p:nvSpPr>
+        <p:spPr>
+          <a:xfrm>
+            <a:off x="822960" y="3429000"/>
+            <a:ext cx="4861408" cy="594360"/>
+          </a:xfrm>
+          <a:prstGeom prst="rect">
+            <a:avLst/>
+          </a:prstGeom>
+          <a:noFill/>
+          <a:ln/>
+        </p:spPr>
+        <p:txBody>
+          <a:bodyPr wrap="square" lIns="0" tIns="0" rIns="0" bIns="0" rtlCol="0" anchor="t">
+            <a:normAutofit/>
+          </a:bodyPr>
+          <a:lstStyle/>
+          <a:p>
+            <a:pPr algn="l" indent="0" marL="0">
+              <a:buNone/>
+            </a:pPr>
+            <a:r>
+              <a:rPr lang="en-US" sz="1500" dirty="0">
+                <a:solidFill>
+                  <a:srgbClr val="1F2933"/>
+                </a:solidFill>
+                <a:latin typeface="Arial" pitchFamily="34" charset="0"/>
+                <a:ea typeface="Arial" pitchFamily="34" charset="-122"/>
+                <a:cs typeface="Arial" pitchFamily="34" charset="-120"/>
+              </a:rPr>
+              <a:t>Drift shows up in review or in production</a:t>
+            </a:r>
+            <a:endParaRPr lang="en-US" sz="1500" dirty="0"/>
+          </a:p>
+        </p:txBody>
+      </p:sp>
+      <p:sp>
+        <p:nvSpPr>
+          <p:cNvPr id="12" name="Text 9"/>
+          <p:cNvSpPr txBox="1"/>
+          <p:nvPr/>
+        </p:nvSpPr>
+        <p:spPr>
+          <a:xfrm>
+            <a:off x="822960" y="4160520"/>
+            <a:ext cx="4861408" cy="594360"/>
+          </a:xfrm>
+          <a:prstGeom prst="rect">
+            <a:avLst/>
+          </a:prstGeom>
+          <a:noFill/>
+          <a:ln/>
+        </p:spPr>
+        <p:txBody>
+          <a:bodyPr wrap="square" lIns="0" tIns="0" rIns="0" bIns="0" rtlCol="0" anchor="t">
+            <a:normAutofit/>
+          </a:bodyPr>
+          <a:lstStyle/>
+          <a:p>
+            <a:pPr algn="l" indent="0" marL="0">
+              <a:buNone/>
+            </a:pPr>
+            <a:r>
+              <a:rPr lang="en-US" sz="1500" dirty="0">
+                <a:solidFill>
+                  <a:srgbClr val="1F2933"/>
+                </a:solidFill>
+                <a:latin typeface="Arial" pitchFamily="34" charset="0"/>
+                <a:ea typeface="Arial" pitchFamily="34" charset="-122"/>
+                <a:cs typeface="Arial" pitchFamily="34" charset="-120"/>
+              </a:rPr>
+              <a:t>A claim of done goes unchecked</a:t>
+            </a:r>
+            <a:endParaRPr lang="en-US" sz="1500" dirty="0"/>
+          </a:p>
+        </p:txBody>
+      </p:sp>
+      <p:sp>
+        <p:nvSpPr>
+          <p:cNvPr id="13" name="Shape 10"/>
           <p:cNvSpPr/>
           <p:nvPr/>
         </p:nvSpPr>
         <p:spPr>
           <a:xfrm>
-            <a:off x="5666109" y="2423160"/>
-            <a:ext cx="622629" cy="622629"/>
+            <a:off x="6233008" y="1965960"/>
+            <a:ext cx="5410048" cy="3108960"/>
+          </a:xfrm>
+          <a:prstGeom prst="roundRect">
+            <a:avLst>
+              <a:gd name="adj" fmla="val 2941"/>
+            </a:avLst>
+          </a:prstGeom>
+          <a:solidFill>
+            <a:srgbClr val="FFFFFF"/>
+          </a:solidFill>
+          <a:ln w="9525">
+            <a:solidFill>
+              <a:srgbClr val="D6DCE4"/>
+            </a:solidFill>
+            <a:prstDash val="solid"/>
+          </a:ln>
+        </p:spPr>
+      </p:sp>
+      <p:sp>
+        <p:nvSpPr>
+          <p:cNvPr id="14" name="Text 11"/>
+          <p:cNvSpPr txBox="1"/>
+          <p:nvPr/>
+        </p:nvSpPr>
+        <p:spPr>
+          <a:xfrm>
+            <a:off x="6507328" y="2148840"/>
+            <a:ext cx="4861408" cy="457200"/>
+          </a:xfrm>
+          <a:prstGeom prst="rect">
+            <a:avLst/>
+          </a:prstGeom>
+          <a:noFill/>
+          <a:ln/>
+        </p:spPr>
+        <p:txBody>
+          <a:bodyPr wrap="square" lIns="0" tIns="0" rIns="0" bIns="0" rtlCol="0" anchor="t">
+            <a:normAutofit/>
+          </a:bodyPr>
+          <a:lstStyle/>
+          <a:p>
+            <a:pPr algn="l" indent="0" marL="0">
+              <a:buNone/>
+            </a:pPr>
+            <a:r>
+              <a:rPr lang="en-US" sz="2000" b="1" dirty="0">
+                <a:solidFill>
+                  <a:srgbClr val="3B6BA8"/>
+                </a:solidFill>
+                <a:latin typeface="Georgia" pitchFamily="34" charset="0"/>
+                <a:ea typeface="Georgia" pitchFamily="34" charset="-122"/>
+                <a:cs typeface="Georgia" pitchFamily="34" charset="-120"/>
+              </a:rPr>
+              <a:t>With layered control</a:t>
+            </a:r>
+            <a:endParaRPr lang="en-US" sz="2000" dirty="0"/>
+          </a:p>
+        </p:txBody>
+      </p:sp>
+      <p:sp>
+        <p:nvSpPr>
+          <p:cNvPr id="15" name="Shape 12"/>
+          <p:cNvSpPr/>
+          <p:nvPr/>
+        </p:nvSpPr>
+        <p:spPr>
+          <a:xfrm>
+            <a:off x="6507328" y="2743200"/>
+            <a:ext cx="292608" cy="292608"/>
           </a:xfrm>
           <a:prstGeom prst="ellipse">
             <a:avLst/>
@@ -13578,14 +15647,14 @@
       </p:sp>
       <p:sp>
         <p:nvSpPr>
-          <p:cNvPr id="11" name="Text 8"/>
+          <p:cNvPr id="16" name="Text 13"/>
           <p:cNvSpPr txBox="1"/>
           <p:nvPr/>
         </p:nvSpPr>
         <p:spPr>
           <a:xfrm>
-            <a:off x="5666109" y="2423160"/>
-            <a:ext cx="622629" cy="622629"/>
+            <a:off x="6507328" y="2743200"/>
+            <a:ext cx="292608" cy="292608"/>
           </a:xfrm>
           <a:prstGeom prst="rect">
             <a:avLst/>
@@ -13601,7 +15670,7 @@
               <a:buNone/>
             </a:pPr>
             <a:r>
-              <a:rPr lang="en-US" sz="2400" b="1" dirty="0">
+              <a:rPr lang="en-US" sz="1200" b="1" dirty="0">
                 <a:solidFill>
                   <a:srgbClr val="FFFFFF"/>
                 </a:solidFill>
@@ -13609,22 +15678,22 @@
                 <a:ea typeface="Georgia" pitchFamily="34" charset="-122"/>
                 <a:cs typeface="Georgia" pitchFamily="34" charset="-120"/>
               </a:rPr>
-              <a:t>1</a:t>
+              <a:t>✓</a:t>
             </a:r>
-            <a:endParaRPr lang="en-US" sz="2400" dirty="0"/>
+            <a:endParaRPr lang="en-US" sz="1200" dirty="0"/>
           </a:p>
         </p:txBody>
       </p:sp>
       <p:sp>
         <p:nvSpPr>
-          <p:cNvPr id="12" name="Text 9"/>
+          <p:cNvPr id="17" name="Text 14"/>
           <p:cNvSpPr txBox="1"/>
           <p:nvPr/>
         </p:nvSpPr>
         <p:spPr>
           <a:xfrm>
-            <a:off x="5358765" y="3274389"/>
-            <a:ext cx="1237317" cy="457200"/>
+            <a:off x="6964528" y="2697480"/>
+            <a:ext cx="4404208" cy="594360"/>
           </a:xfrm>
           <a:prstGeom prst="rect">
             <a:avLst/>
@@ -13638,11 +15707,11 @@
           </a:bodyPr>
           <a:lstStyle/>
           <a:p>
-            <a:pPr algn="ctr" indent="0" marL="0">
+            <a:pPr algn="l" indent="0" marL="0">
               <a:buNone/>
             </a:pPr>
             <a:r>
-              <a:rPr lang="en-US" sz="1600" b="1" dirty="0">
+              <a:rPr lang="en-US" sz="1500" dirty="0">
                 <a:solidFill>
                   <a:srgbClr val="1F2933"/>
                 </a:solidFill>
@@ -13650,436 +15719,22 @@
                 <a:ea typeface="Arial" pitchFamily="34" charset="-122"/>
                 <a:cs typeface="Arial" pitchFamily="34" charset="-120"/>
               </a:rPr>
-              <a:t>Concerns</a:t>
+              <a:t>The team selects a concern once and its practices propagate down</a:t>
             </a:r>
-            <a:endParaRPr lang="en-US" sz="1600" dirty="0"/>
+            <a:endParaRPr lang="en-US" sz="1500" dirty="0"/>
           </a:p>
         </p:txBody>
       </p:sp>
       <p:sp>
         <p:nvSpPr>
-          <p:cNvPr id="13" name="Text 10"/>
-          <p:cNvSpPr txBox="1"/>
-          <p:nvPr/>
-        </p:nvSpPr>
-        <p:spPr>
-          <a:xfrm>
-            <a:off x="5422773" y="3777309"/>
-            <a:ext cx="1109301" cy="1846251"/>
-          </a:xfrm>
-          <a:prstGeom prst="rect">
-            <a:avLst/>
-          </a:prstGeom>
-          <a:noFill/>
-          <a:ln/>
-        </p:spPr>
-        <p:txBody>
-          <a:bodyPr wrap="square" lIns="0" tIns="0" rIns="0" bIns="0" rtlCol="0" anchor="t">
-            <a:normAutofit/>
-          </a:bodyPr>
-          <a:lstStyle/>
-          <a:p>
-            <a:pPr algn="ctr" indent="0" marL="0">
-              <a:buNone/>
-            </a:pPr>
-            <a:r>
-              <a:rPr lang="en-US" sz="1300" dirty="0">
-                <a:solidFill>
-                  <a:srgbClr val="55606D"/>
-                </a:solidFill>
-                <a:latin typeface="Arial" pitchFamily="34" charset="0"/>
-                <a:ea typeface="Arial" pitchFamily="34" charset="-122"/>
-                <a:cs typeface="Arial" pitchFamily="34" charset="-120"/>
-              </a:rPr>
-              <a:t>50 cross-cutting rule sets</a:t>
-            </a:r>
-            <a:endParaRPr lang="en-US" sz="1300" dirty="0"/>
-          </a:p>
-        </p:txBody>
-      </p:sp>
-      <p:sp>
-        <p:nvSpPr>
-          <p:cNvPr id="14" name="Shape 11"/>
+          <p:cNvPr id="18" name="Shape 15"/>
           <p:cNvSpPr/>
           <p:nvPr/>
         </p:nvSpPr>
         <p:spPr>
           <a:xfrm>
-            <a:off x="6943554" y="1965960"/>
-            <a:ext cx="1383621" cy="3840480"/>
-          </a:xfrm>
-          <a:prstGeom prst="roundRect">
-            <a:avLst>
-              <a:gd name="adj" fmla="val 6609"/>
-            </a:avLst>
-          </a:prstGeom>
-          <a:solidFill>
-            <a:srgbClr val="F3F5F8"/>
-          </a:solidFill>
-          <a:ln w="9525">
-            <a:solidFill>
-              <a:srgbClr val="D6DCE4"/>
-            </a:solidFill>
-            <a:prstDash val="solid"/>
-          </a:ln>
-        </p:spPr>
-      </p:sp>
-      <p:sp>
-        <p:nvSpPr>
-          <p:cNvPr id="15" name="Shape 12"/>
-          <p:cNvSpPr/>
-          <p:nvPr/>
-        </p:nvSpPr>
-        <p:spPr>
-          <a:xfrm>
-            <a:off x="7324049" y="2423160"/>
-            <a:ext cx="622629" cy="622629"/>
-          </a:xfrm>
-          <a:prstGeom prst="ellipse">
-            <a:avLst/>
-          </a:prstGeom>
-          <a:solidFill>
-            <a:srgbClr val="6842A8"/>
-          </a:solidFill>
-          <a:ln w="12700">
-            <a:solidFill>
-              <a:srgbClr val="6842A8"/>
-            </a:solidFill>
-            <a:prstDash val="solid"/>
-          </a:ln>
-        </p:spPr>
-      </p:sp>
-      <p:sp>
-        <p:nvSpPr>
-          <p:cNvPr id="16" name="Text 13"/>
-          <p:cNvSpPr txBox="1"/>
-          <p:nvPr/>
-        </p:nvSpPr>
-        <p:spPr>
-          <a:xfrm>
-            <a:off x="7324049" y="2423160"/>
-            <a:ext cx="622629" cy="622629"/>
-          </a:xfrm>
-          <a:prstGeom prst="rect">
-            <a:avLst/>
-          </a:prstGeom>
-          <a:noFill/>
-          <a:ln/>
-        </p:spPr>
-        <p:txBody>
-          <a:bodyPr wrap="square" lIns="0" tIns="0" rIns="0" bIns="0" rtlCol="0" anchor="ctr"/>
-          <a:lstStyle/>
-          <a:p>
-            <a:pPr algn="ctr" indent="0" marL="0">
-              <a:buNone/>
-            </a:pPr>
-            <a:r>
-              <a:rPr lang="en-US" sz="2400" b="1" dirty="0">
-                <a:solidFill>
-                  <a:srgbClr val="FFFFFF"/>
-                </a:solidFill>
-                <a:latin typeface="Georgia" pitchFamily="34" charset="0"/>
-                <a:ea typeface="Georgia" pitchFamily="34" charset="-122"/>
-                <a:cs typeface="Georgia" pitchFamily="34" charset="-120"/>
-              </a:rPr>
-              <a:t>2</a:t>
-            </a:r>
-            <a:endParaRPr lang="en-US" sz="2400" dirty="0"/>
-          </a:p>
-        </p:txBody>
-      </p:sp>
-      <p:sp>
-        <p:nvSpPr>
-          <p:cNvPr id="17" name="Text 14"/>
-          <p:cNvSpPr txBox="1"/>
-          <p:nvPr/>
-        </p:nvSpPr>
-        <p:spPr>
-          <a:xfrm>
-            <a:off x="7016706" y="3274389"/>
-            <a:ext cx="1237317" cy="457200"/>
-          </a:xfrm>
-          <a:prstGeom prst="rect">
-            <a:avLst/>
-          </a:prstGeom>
-          <a:noFill/>
-          <a:ln/>
-        </p:spPr>
-        <p:txBody>
-          <a:bodyPr wrap="square" lIns="0" tIns="0" rIns="0" bIns="0" rtlCol="0" anchor="t">
-            <a:normAutofit/>
-          </a:bodyPr>
-          <a:lstStyle/>
-          <a:p>
-            <a:pPr algn="ctr" indent="0" marL="0">
-              <a:buNone/>
-            </a:pPr>
-            <a:r>
-              <a:rPr lang="en-US" sz="1600" b="1" dirty="0">
-                <a:solidFill>
-                  <a:srgbClr val="1F2933"/>
-                </a:solidFill>
-                <a:latin typeface="Arial" pitchFamily="34" charset="0"/>
-                <a:ea typeface="Arial" pitchFamily="34" charset="-122"/>
-                <a:cs typeface="Arial" pitchFamily="34" charset="-120"/>
-              </a:rPr>
-              <a:t>Principles</a:t>
-            </a:r>
-            <a:endParaRPr lang="en-US" sz="1600" dirty="0"/>
-          </a:p>
-        </p:txBody>
-      </p:sp>
-      <p:sp>
-        <p:nvSpPr>
-          <p:cNvPr id="18" name="Text 15"/>
-          <p:cNvSpPr txBox="1"/>
-          <p:nvPr/>
-        </p:nvSpPr>
-        <p:spPr>
-          <a:xfrm>
-            <a:off x="7080714" y="3777309"/>
-            <a:ext cx="1109301" cy="1846251"/>
-          </a:xfrm>
-          <a:prstGeom prst="rect">
-            <a:avLst/>
-          </a:prstGeom>
-          <a:noFill/>
-          <a:ln/>
-        </p:spPr>
-        <p:txBody>
-          <a:bodyPr wrap="square" lIns="0" tIns="0" rIns="0" bIns="0" rtlCol="0" anchor="t">
-            <a:normAutofit/>
-          </a:bodyPr>
-          <a:lstStyle/>
-          <a:p>
-            <a:pPr algn="ctr" indent="0" marL="0">
-              <a:buNone/>
-            </a:pPr>
-            <a:r>
-              <a:rPr lang="en-US" sz="1300" dirty="0">
-                <a:solidFill>
-                  <a:srgbClr val="55606D"/>
-                </a:solidFill>
-                <a:latin typeface="Arial" pitchFamily="34" charset="0"/>
-                <a:ea typeface="Arial" pitchFamily="34" charset="-122"/>
-                <a:cs typeface="Arial" pitchFamily="34" charset="-120"/>
-              </a:rPr>
-              <a:t>how tensions get resolved</a:t>
-            </a:r>
-            <a:endParaRPr lang="en-US" sz="1300" dirty="0"/>
-          </a:p>
-        </p:txBody>
-      </p:sp>
-      <p:sp>
-        <p:nvSpPr>
-          <p:cNvPr id="19" name="Shape 16"/>
-          <p:cNvSpPr/>
-          <p:nvPr/>
-        </p:nvSpPr>
-        <p:spPr>
-          <a:xfrm>
-            <a:off x="8601494" y="1965960"/>
-            <a:ext cx="1383621" cy="3840480"/>
-          </a:xfrm>
-          <a:prstGeom prst="roundRect">
-            <a:avLst>
-              <a:gd name="adj" fmla="val 6609"/>
-            </a:avLst>
-          </a:prstGeom>
-          <a:solidFill>
-            <a:srgbClr val="F3F5F8"/>
-          </a:solidFill>
-          <a:ln w="9525">
-            <a:solidFill>
-              <a:srgbClr val="D6DCE4"/>
-            </a:solidFill>
-            <a:prstDash val="solid"/>
-          </a:ln>
-        </p:spPr>
-      </p:sp>
-      <p:sp>
-        <p:nvSpPr>
-          <p:cNvPr id="20" name="Shape 17"/>
-          <p:cNvSpPr/>
-          <p:nvPr/>
-        </p:nvSpPr>
-        <p:spPr>
-          <a:xfrm>
-            <a:off x="8981990" y="2423160"/>
-            <a:ext cx="622629" cy="622629"/>
-          </a:xfrm>
-          <a:prstGeom prst="ellipse">
-            <a:avLst/>
-          </a:prstGeom>
-          <a:solidFill>
-            <a:srgbClr val="C44B2F"/>
-          </a:solidFill>
-          <a:ln w="12700">
-            <a:solidFill>
-              <a:srgbClr val="C44B2F"/>
-            </a:solidFill>
-            <a:prstDash val="solid"/>
-          </a:ln>
-        </p:spPr>
-      </p:sp>
-      <p:sp>
-        <p:nvSpPr>
-          <p:cNvPr id="21" name="Text 18"/>
-          <p:cNvSpPr txBox="1"/>
-          <p:nvPr/>
-        </p:nvSpPr>
-        <p:spPr>
-          <a:xfrm>
-            <a:off x="8981990" y="2423160"/>
-            <a:ext cx="622629" cy="622629"/>
-          </a:xfrm>
-          <a:prstGeom prst="rect">
-            <a:avLst/>
-          </a:prstGeom>
-          <a:noFill/>
-          <a:ln/>
-        </p:spPr>
-        <p:txBody>
-          <a:bodyPr wrap="square" lIns="0" tIns="0" rIns="0" bIns="0" rtlCol="0" anchor="ctr"/>
-          <a:lstStyle/>
-          <a:p>
-            <a:pPr algn="ctr" indent="0" marL="0">
-              <a:buNone/>
-            </a:pPr>
-            <a:r>
-              <a:rPr lang="en-US" sz="2400" b="1" dirty="0">
-                <a:solidFill>
-                  <a:srgbClr val="FFFFFF"/>
-                </a:solidFill>
-                <a:latin typeface="Georgia" pitchFamily="34" charset="0"/>
-                <a:ea typeface="Georgia" pitchFamily="34" charset="-122"/>
-                <a:cs typeface="Georgia" pitchFamily="34" charset="-120"/>
-              </a:rPr>
-              <a:t>3</a:t>
-            </a:r>
-            <a:endParaRPr lang="en-US" sz="2400" dirty="0"/>
-          </a:p>
-        </p:txBody>
-      </p:sp>
-      <p:sp>
-        <p:nvSpPr>
-          <p:cNvPr id="22" name="Text 19"/>
-          <p:cNvSpPr txBox="1"/>
-          <p:nvPr/>
-        </p:nvSpPr>
-        <p:spPr>
-          <a:xfrm>
-            <a:off x="8674646" y="3274389"/>
-            <a:ext cx="1237317" cy="457200"/>
-          </a:xfrm>
-          <a:prstGeom prst="rect">
-            <a:avLst/>
-          </a:prstGeom>
-          <a:noFill/>
-          <a:ln/>
-        </p:spPr>
-        <p:txBody>
-          <a:bodyPr wrap="square" lIns="0" tIns="0" rIns="0" bIns="0" rtlCol="0" anchor="t">
-            <a:normAutofit/>
-          </a:bodyPr>
-          <a:lstStyle/>
-          <a:p>
-            <a:pPr algn="ctr" indent="0" marL="0">
-              <a:buNone/>
-            </a:pPr>
-            <a:r>
-              <a:rPr lang="en-US" sz="1600" b="1" dirty="0">
-                <a:solidFill>
-                  <a:srgbClr val="1F2933"/>
-                </a:solidFill>
-                <a:latin typeface="Arial" pitchFamily="34" charset="0"/>
-                <a:ea typeface="Arial" pitchFamily="34" charset="-122"/>
-                <a:cs typeface="Arial" pitchFamily="34" charset="-120"/>
-              </a:rPr>
-              <a:t>Slots</a:t>
-            </a:r>
-            <a:endParaRPr lang="en-US" sz="1600" dirty="0"/>
-          </a:p>
-        </p:txBody>
-      </p:sp>
-      <p:sp>
-        <p:nvSpPr>
-          <p:cNvPr id="23" name="Text 20"/>
-          <p:cNvSpPr txBox="1"/>
-          <p:nvPr/>
-        </p:nvSpPr>
-        <p:spPr>
-          <a:xfrm>
-            <a:off x="8738654" y="3777309"/>
-            <a:ext cx="1109301" cy="1846251"/>
-          </a:xfrm>
-          <a:prstGeom prst="rect">
-            <a:avLst/>
-          </a:prstGeom>
-          <a:noFill/>
-          <a:ln/>
-        </p:spPr>
-        <p:txBody>
-          <a:bodyPr wrap="square" lIns="0" tIns="0" rIns="0" bIns="0" rtlCol="0" anchor="t">
-            <a:normAutofit/>
-          </a:bodyPr>
-          <a:lstStyle/>
-          <a:p>
-            <a:pPr algn="ctr" indent="0" marL="0">
-              <a:buNone/>
-            </a:pPr>
-            <a:r>
-              <a:rPr lang="en-US" sz="1300" dirty="0">
-                <a:solidFill>
-                  <a:srgbClr val="55606D"/>
-                </a:solidFill>
-                <a:latin typeface="Arial" pitchFamily="34" charset="0"/>
-                <a:ea typeface="Arial" pitchFamily="34" charset="-122"/>
-                <a:cs typeface="Arial" pitchFamily="34" charset="-120"/>
-              </a:rPr>
-              <a:t>one filler per exclusive position</a:t>
-            </a:r>
-            <a:endParaRPr lang="en-US" sz="1300" dirty="0"/>
-          </a:p>
-        </p:txBody>
-      </p:sp>
-      <p:sp>
-        <p:nvSpPr>
-          <p:cNvPr id="24" name="Shape 21"/>
-          <p:cNvSpPr/>
-          <p:nvPr/>
-        </p:nvSpPr>
-        <p:spPr>
-          <a:xfrm>
-            <a:off x="10259435" y="1965960"/>
-            <a:ext cx="1383621" cy="3840480"/>
-          </a:xfrm>
-          <a:prstGeom prst="roundRect">
-            <a:avLst>
-              <a:gd name="adj" fmla="val 6609"/>
-            </a:avLst>
-          </a:prstGeom>
-          <a:solidFill>
-            <a:srgbClr val="F3F5F8"/>
-          </a:solidFill>
-          <a:ln w="9525">
-            <a:solidFill>
-              <a:srgbClr val="D6DCE4"/>
-            </a:solidFill>
-            <a:prstDash val="solid"/>
-          </a:ln>
-        </p:spPr>
-      </p:sp>
-      <p:sp>
-        <p:nvSpPr>
-          <p:cNvPr id="25" name="Shape 22"/>
-          <p:cNvSpPr/>
-          <p:nvPr/>
-        </p:nvSpPr>
-        <p:spPr>
-          <a:xfrm>
-            <a:off x="10639930" y="2423160"/>
-            <a:ext cx="622629" cy="622629"/>
+            <a:off x="6507328" y="3474720"/>
+            <a:ext cx="292608" cy="292608"/>
           </a:xfrm>
           <a:prstGeom prst="ellipse">
             <a:avLst/>
@@ -14097,14 +15752,14 @@
       </p:sp>
       <p:sp>
         <p:nvSpPr>
-          <p:cNvPr id="26" name="Text 23"/>
+          <p:cNvPr id="19" name="Text 16"/>
           <p:cNvSpPr txBox="1"/>
           <p:nvPr/>
         </p:nvSpPr>
         <p:spPr>
           <a:xfrm>
-            <a:off x="10639930" y="2423160"/>
-            <a:ext cx="622629" cy="622629"/>
+            <a:off x="6507328" y="3474720"/>
+            <a:ext cx="292608" cy="292608"/>
           </a:xfrm>
           <a:prstGeom prst="rect">
             <a:avLst/>
@@ -14120,7 +15775,7 @@
               <a:buNone/>
             </a:pPr>
             <a:r>
-              <a:rPr lang="en-US" sz="2400" b="1" dirty="0">
+              <a:rPr lang="en-US" sz="1200" b="1" dirty="0">
                 <a:solidFill>
                   <a:srgbClr val="FFFFFF"/>
                 </a:solidFill>
@@ -14128,22 +15783,22 @@
                 <a:ea typeface="Georgia" pitchFamily="34" charset="-122"/>
                 <a:cs typeface="Georgia" pitchFamily="34" charset="-120"/>
               </a:rPr>
-              <a:t>4</a:t>
+              <a:t>✓</a:t>
             </a:r>
-            <a:endParaRPr lang="en-US" sz="2400" dirty="0"/>
+            <a:endParaRPr lang="en-US" sz="1200" dirty="0"/>
           </a:p>
         </p:txBody>
       </p:sp>
       <p:sp>
         <p:nvSpPr>
-          <p:cNvPr id="27" name="Text 24"/>
+          <p:cNvPr id="20" name="Text 17"/>
           <p:cNvSpPr txBox="1"/>
           <p:nvPr/>
         </p:nvSpPr>
         <p:spPr>
           <a:xfrm>
-            <a:off x="10332587" y="3274389"/>
-            <a:ext cx="1237317" cy="457200"/>
+            <a:off x="6964528" y="3429000"/>
+            <a:ext cx="4404208" cy="594360"/>
           </a:xfrm>
           <a:prstGeom prst="rect">
             <a:avLst/>
@@ -14157,11 +15812,11 @@
           </a:bodyPr>
           <a:lstStyle/>
           <a:p>
-            <a:pPr algn="ctr" indent="0" marL="0">
+            <a:pPr algn="l" indent="0" marL="0">
               <a:buNone/>
             </a:pPr>
             <a:r>
-              <a:rPr lang="en-US" sz="1600" b="1" dirty="0">
+              <a:rPr lang="en-US" sz="1500" dirty="0">
                 <a:solidFill>
                   <a:srgbClr val="1F2933"/>
                 </a:solidFill>
@@ -14169,22 +15824,86 @@
                 <a:ea typeface="Arial" pitchFamily="34" charset="-122"/>
                 <a:cs typeface="Arial" pitchFamily="34" charset="-120"/>
               </a:rPr>
-              <a:t>Spread</a:t>
+              <a:t>Gates stop work moving down a layer</a:t>
             </a:r>
-            <a:endParaRPr lang="en-US" sz="1600" dirty="0"/>
+            <a:endParaRPr lang="en-US" sz="1500" dirty="0"/>
           </a:p>
         </p:txBody>
       </p:sp>
       <p:sp>
         <p:nvSpPr>
-          <p:cNvPr id="28" name="Text 25"/>
+          <p:cNvPr id="21" name="Shape 18"/>
+          <p:cNvSpPr/>
+          <p:nvPr/>
+        </p:nvSpPr>
+        <p:spPr>
+          <a:xfrm>
+            <a:off x="6507328" y="4206240"/>
+            <a:ext cx="292608" cy="292608"/>
+          </a:xfrm>
+          <a:prstGeom prst="ellipse">
+            <a:avLst/>
+          </a:prstGeom>
+          <a:solidFill>
+            <a:srgbClr val="3B6BA8"/>
+          </a:solidFill>
+          <a:ln w="12700">
+            <a:solidFill>
+              <a:srgbClr val="3B6BA8"/>
+            </a:solidFill>
+            <a:prstDash val="solid"/>
+          </a:ln>
+        </p:spPr>
+      </p:sp>
+      <p:sp>
+        <p:nvSpPr>
+          <p:cNvPr id="22" name="Text 19"/>
           <p:cNvSpPr txBox="1"/>
           <p:nvPr/>
         </p:nvSpPr>
         <p:spPr>
           <a:xfrm>
-            <a:off x="10396595" y="3777309"/>
-            <a:ext cx="1109301" cy="1846251"/>
+            <a:off x="6507328" y="4206240"/>
+            <a:ext cx="292608" cy="292608"/>
+          </a:xfrm>
+          <a:prstGeom prst="rect">
+            <a:avLst/>
+          </a:prstGeom>
+          <a:noFill/>
+          <a:ln/>
+        </p:spPr>
+        <p:txBody>
+          <a:bodyPr wrap="square" lIns="0" tIns="0" rIns="0" bIns="0" rtlCol="0" anchor="ctr"/>
+          <a:lstStyle/>
+          <a:p>
+            <a:pPr algn="ctr" indent="0" marL="0">
+              <a:buNone/>
+            </a:pPr>
+            <a:r>
+              <a:rPr lang="en-US" sz="1200" b="1" dirty="0">
+                <a:solidFill>
+                  <a:srgbClr val="FFFFFF"/>
+                </a:solidFill>
+                <a:latin typeface="Georgia" pitchFamily="34" charset="0"/>
+                <a:ea typeface="Georgia" pitchFamily="34" charset="-122"/>
+                <a:cs typeface="Georgia" pitchFamily="34" charset="-120"/>
+              </a:rPr>
+              <a:t>✓</a:t>
+            </a:r>
+            <a:endParaRPr lang="en-US" sz="1200" dirty="0"/>
+          </a:p>
+        </p:txBody>
+      </p:sp>
+      <p:sp>
+        <p:nvSpPr>
+          <p:cNvPr id="23" name="Text 20"/>
+          <p:cNvSpPr txBox="1"/>
+          <p:nvPr/>
+        </p:nvSpPr>
+        <p:spPr>
+          <a:xfrm>
+            <a:off x="6964528" y="4160520"/>
+            <a:ext cx="4404208" cy="594360"/>
           </a:xfrm>
           <a:prstGeom prst="rect">
             <a:avLst/>
@@ -14198,21 +15917,62 @@
           </a:bodyPr>
           <a:lstStyle/>
           <a:p>
-            <a:pPr algn="ctr" indent="0" marL="0">
+            <a:pPr algn="l" indent="0" marL="0">
               <a:buNone/>
             </a:pPr>
             <a:r>
-              <a:rPr lang="en-US" sz="1300" dirty="0">
+              <a:rPr lang="en-US" sz="1500" dirty="0">
                 <a:solidFill>
-                  <a:srgbClr val="55606D"/>
+                  <a:srgbClr val="1F2933"/>
                 </a:solidFill>
                 <a:latin typeface="Arial" pitchFamily="34" charset="0"/>
                 <a:ea typeface="Arial" pitchFamily="34" charset="-122"/>
                 <a:cs typeface="Arial" pitchFamily="34" charset="-120"/>
               </a:rPr>
-              <a:t>into every document and task</a:t>
+              <a:t>Every claim cites evidence a validator can check</a:t>
             </a:r>
-            <a:endParaRPr lang="en-US" sz="1300" dirty="0"/>
+            <a:endParaRPr lang="en-US" sz="1500" dirty="0"/>
+          </a:p>
+        </p:txBody>
+      </p:sp>
+      <p:sp>
+        <p:nvSpPr>
+          <p:cNvPr id="24" name="Text 21"/>
+          <p:cNvSpPr txBox="1"/>
+          <p:nvPr/>
+        </p:nvSpPr>
+        <p:spPr>
+          <a:xfrm>
+            <a:off x="548640" y="5257800"/>
+            <a:ext cx="11094415" cy="548640"/>
+          </a:xfrm>
+          <a:prstGeom prst="rect">
+            <a:avLst/>
+          </a:prstGeom>
+          <a:noFill/>
+          <a:ln/>
+        </p:spPr>
+        <p:txBody>
+          <a:bodyPr wrap="square" lIns="0" tIns="0" rIns="0" bIns="0" rtlCol="0" anchor="ctr">
+            <a:normAutofit/>
+          </a:bodyPr>
+          <a:lstStyle/>
+          <a:p>
+            <a:pPr algn="l" indent="0" marL="0">
+              <a:buNone/>
+            </a:pPr>
+            <a:r>
+              <a:rPr lang="en-US" sz="1500" b="1" dirty="0">
+                <a:solidFill>
+                  <a:srgbClr val="C44B2F"/>
+                </a:solidFill>
+                <a:latin typeface="Arial" pitchFamily="34" charset="0"/>
+                <a:ea typeface="Arial" pitchFamily="34" charset="-122"/>
+                <a:cs typeface="Arial" pitchFamily="34" charset="-120"/>
+              </a:rPr>
+              <a:t>Verdict: the rules live in the layers, not in a prompt</a:t>
+            </a:r>
+            <a:endParaRPr lang="en-US" sz="1500" dirty="0"/>
           </a:p>
         </p:txBody>
       </p:sp>
@@ -14339,7 +16099,7 @@
               <a:buNone/>
             </a:pPr>
             <a:r>
-              <a:rPr lang="en-US" sz="3600" b="1" dirty="0">
+              <a:rPr lang="en-US" sz="3200" b="1" dirty="0">
                 <a:solidFill>
                   <a:srgbClr val="1F2933"/>
                 </a:solidFill>
@@ -14347,9 +16107,9 @@
                 <a:ea typeface="Georgia" pitchFamily="34" charset="-122"/>
                 <a:cs typeface="Georgia" pitchFamily="34" charset="-120"/>
               </a:rPr>
-              <a:t>Every shared practice ends in evidence a validator can check</a:t>
+              <a:t>Every layer also yields documents people outside engineering read</a:t>
             </a:r>
-            <a:endParaRPr lang="en-US" sz="3600" dirty="0"/>
+            <a:endParaRPr lang="en-US" sz="3200" dirty="0"/>
           </a:p>
         </p:txBody>
       </p:sp>
@@ -14386,7 +16146,7 @@
                 <a:ea typeface="Arial" pitchFamily="34" charset="-122"/>
                 <a:cs typeface="Arial" pitchFamily="34" charset="-120"/>
               </a:rPr>
-              <a:t>Sources: S11, S12 (appendix)</a:t>
+              <a:t>Sources: S16, S17 (appendix)</a:t>
             </a:r>
             <a:endParaRPr lang="en-US" sz="900" dirty="0"/>
           </a:p>
@@ -14431,621 +16191,861 @@
           </a:p>
         </p:txBody>
       </p:sp>
-      <p:sp>
-        <p:nvSpPr>
-          <p:cNvPr id="8" name="Shape 5"/>
-          <p:cNvSpPr/>
-          <p:nvPr/>
-        </p:nvSpPr>
-        <p:spPr>
-          <a:xfrm>
-            <a:off x="548640" y="1965960"/>
-            <a:ext cx="5410048" cy="3108960"/>
-          </a:xfrm>
-          <a:prstGeom prst="roundRect">
-            <a:avLst>
-              <a:gd name="adj" fmla="val 2941"/>
-            </a:avLst>
-          </a:prstGeom>
-          <a:solidFill>
-            <a:srgbClr val="F3F5F8"/>
-          </a:solidFill>
-          <a:ln w="9525">
-            <a:solidFill>
-              <a:srgbClr val="D6DCE4"/>
-            </a:solidFill>
-            <a:prstDash val="solid"/>
-          </a:ln>
-        </p:spPr>
-      </p:sp>
-      <p:sp>
-        <p:nvSpPr>
-          <p:cNvPr id="9" name="Text 6"/>
-          <p:cNvSpPr txBox="1"/>
-          <p:nvPr/>
-        </p:nvSpPr>
-        <p:spPr>
-          <a:xfrm>
-            <a:off x="822960" y="2148840"/>
-            <a:ext cx="4861408" cy="457200"/>
-          </a:xfrm>
-          <a:prstGeom prst="rect">
-            <a:avLst/>
-          </a:prstGeom>
-          <a:noFill/>
-          <a:ln/>
-        </p:spPr>
-        <p:txBody>
-          <a:bodyPr wrap="square" lIns="0" tIns="0" rIns="0" bIns="0" rtlCol="0" anchor="t">
-            <a:normAutofit/>
-          </a:bodyPr>
-          <a:lstStyle/>
-          <a:p>
-            <a:pPr algn="l" indent="0" marL="0">
-              <a:buNone/>
-            </a:pPr>
-            <a:r>
-              <a:rPr lang="en-US" sz="2000" b="1" dirty="0">
-                <a:solidFill>
-                  <a:srgbClr val="55606D"/>
-                </a:solidFill>
-                <a:latin typeface="Georgia" pitchFamily="34" charset="0"/>
-                <a:ea typeface="Georgia" pitchFamily="34" charset="-122"/>
-                <a:cs typeface="Georgia" pitchFamily="34" charset="-120"/>
-              </a:rPr>
-              <a:t>The claim</a:t>
-            </a:r>
-            <a:endParaRPr lang="en-US" sz="2000" dirty="0"/>
-          </a:p>
-        </p:txBody>
-      </p:sp>
-      <p:sp>
-        <p:nvSpPr>
-          <p:cNvPr id="10" name="Text 7"/>
-          <p:cNvSpPr txBox="1"/>
-          <p:nvPr/>
-        </p:nvSpPr>
-        <p:spPr>
-          <a:xfrm>
-            <a:off x="822960" y="2697480"/>
-            <a:ext cx="4861408" cy="594360"/>
-          </a:xfrm>
-          <a:prstGeom prst="rect">
-            <a:avLst/>
-          </a:prstGeom>
-          <a:noFill/>
-          <a:ln/>
-        </p:spPr>
-        <p:txBody>
-          <a:bodyPr wrap="square" lIns="0" tIns="0" rIns="0" bIns="0" rtlCol="0" anchor="t">
-            <a:normAutofit/>
-          </a:bodyPr>
-          <a:lstStyle/>
-          <a:p>
-            <a:pPr algn="l" indent="0" marL="0">
-              <a:buNone/>
-            </a:pPr>
-            <a:r>
-              <a:rPr lang="en-US" sz="1500" dirty="0">
-                <a:solidFill>
-                  <a:srgbClr val="1F2933"/>
-                </a:solidFill>
-                <a:latin typeface="Arial" pitchFamily="34" charset="0"/>
-                <a:ea typeface="Arial" pitchFamily="34" charset="-122"/>
-                <a:cs typeface="Arial" pitchFamily="34" charset="-120"/>
-              </a:rPr>
-              <a:t>A test covers a requirement</a:t>
-            </a:r>
-            <a:endParaRPr lang="en-US" sz="1500" dirty="0"/>
-          </a:p>
-        </p:txBody>
-      </p:sp>
-      <p:sp>
-        <p:nvSpPr>
-          <p:cNvPr id="11" name="Text 8"/>
-          <p:cNvSpPr txBox="1"/>
-          <p:nvPr/>
-        </p:nvSpPr>
-        <p:spPr>
-          <a:xfrm>
-            <a:off x="822960" y="3429000"/>
-            <a:ext cx="4861408" cy="594360"/>
-          </a:xfrm>
-          <a:prstGeom prst="rect">
-            <a:avLst/>
-          </a:prstGeom>
-          <a:noFill/>
-          <a:ln/>
-        </p:spPr>
-        <p:txBody>
-          <a:bodyPr wrap="square" lIns="0" tIns="0" rIns="0" bIns="0" rtlCol="0" anchor="t">
-            <a:normAutofit/>
-          </a:bodyPr>
-          <a:lstStyle/>
-          <a:p>
-            <a:pPr algn="l" indent="0" marL="0">
-              <a:buNone/>
-            </a:pPr>
-            <a:r>
-              <a:rPr lang="en-US" sz="1500" dirty="0">
-                <a:solidFill>
-                  <a:srgbClr val="1F2933"/>
-                </a:solidFill>
-                <a:latin typeface="Arial" pitchFamily="34" charset="0"/>
-                <a:ea typeface="Arial" pitchFamily="34" charset="-122"/>
-                <a:cs typeface="Arial" pitchFamily="34" charset="-120"/>
-              </a:rPr>
-              <a:t>The work is complete</a:t>
-            </a:r>
-            <a:endParaRPr lang="en-US" sz="1500" dirty="0"/>
-          </a:p>
-        </p:txBody>
-      </p:sp>
-      <p:sp>
-        <p:nvSpPr>
-          <p:cNvPr id="12" name="Text 9"/>
-          <p:cNvSpPr txBox="1"/>
-          <p:nvPr/>
-        </p:nvSpPr>
-        <p:spPr>
-          <a:xfrm>
-            <a:off x="822960" y="4160520"/>
-            <a:ext cx="4861408" cy="594360"/>
-          </a:xfrm>
-          <a:prstGeom prst="rect">
-            <a:avLst/>
-          </a:prstGeom>
-          <a:noFill/>
-          <a:ln/>
-        </p:spPr>
-        <p:txBody>
-          <a:bodyPr wrap="square" lIns="0" tIns="0" rIns="0" bIns="0" rtlCol="0" anchor="t">
-            <a:normAutofit/>
-          </a:bodyPr>
-          <a:lstStyle/>
-          <a:p>
-            <a:pPr algn="l" indent="0" marL="0">
-              <a:buNone/>
-            </a:pPr>
-            <a:r>
-              <a:rPr lang="en-US" sz="1500" dirty="0">
-                <a:solidFill>
-                  <a:srgbClr val="1F2933"/>
-                </a:solidFill>
-                <a:latin typeface="Arial" pitchFamily="34" charset="0"/>
-                <a:ea typeface="Arial" pitchFamily="34" charset="-122"/>
-                <a:cs typeface="Arial" pitchFamily="34" charset="-120"/>
-              </a:rPr>
-              <a:t>Someone promises a metric</a:t>
-            </a:r>
-            <a:endParaRPr lang="en-US" sz="1500" dirty="0"/>
-          </a:p>
-        </p:txBody>
-      </p:sp>
-      <p:sp>
-        <p:nvSpPr>
-          <p:cNvPr id="13" name="Shape 10"/>
-          <p:cNvSpPr/>
-          <p:nvPr/>
-        </p:nvSpPr>
-        <p:spPr>
-          <a:xfrm>
-            <a:off x="6233008" y="1965960"/>
-            <a:ext cx="5410048" cy="3108960"/>
-          </a:xfrm>
-          <a:prstGeom prst="roundRect">
-            <a:avLst>
-              <a:gd name="adj" fmla="val 2941"/>
-            </a:avLst>
-          </a:prstGeom>
-          <a:solidFill>
-            <a:srgbClr val="FFFFFF"/>
-          </a:solidFill>
-          <a:ln w="9525">
-            <a:solidFill>
-              <a:srgbClr val="D6DCE4"/>
-            </a:solidFill>
-            <a:prstDash val="solid"/>
-          </a:ln>
-        </p:spPr>
-      </p:sp>
-      <p:sp>
-        <p:nvSpPr>
-          <p:cNvPr id="14" name="Text 11"/>
-          <p:cNvSpPr txBox="1"/>
-          <p:nvPr/>
-        </p:nvSpPr>
-        <p:spPr>
-          <a:xfrm>
-            <a:off x="6507328" y="2148840"/>
-            <a:ext cx="4861408" cy="457200"/>
-          </a:xfrm>
-          <a:prstGeom prst="rect">
-            <a:avLst/>
-          </a:prstGeom>
-          <a:noFill/>
-          <a:ln/>
-        </p:spPr>
-        <p:txBody>
-          <a:bodyPr wrap="square" lIns="0" tIns="0" rIns="0" bIns="0" rtlCol="0" anchor="t">
-            <a:normAutofit/>
-          </a:bodyPr>
-          <a:lstStyle/>
-          <a:p>
-            <a:pPr algn="l" indent="0" marL="0">
-              <a:buNone/>
-            </a:pPr>
-            <a:r>
-              <a:rPr lang="en-US" sz="2000" b="1" dirty="0">
-                <a:solidFill>
-                  <a:srgbClr val="3B6BA8"/>
-                </a:solidFill>
-                <a:latin typeface="Georgia" pitchFamily="34" charset="0"/>
-                <a:ea typeface="Georgia" pitchFamily="34" charset="-122"/>
-                <a:cs typeface="Georgia" pitchFamily="34" charset="-120"/>
-              </a:rPr>
-              <a:t>The evidence HELIX requires</a:t>
-            </a:r>
-            <a:endParaRPr lang="en-US" sz="2000" dirty="0"/>
-          </a:p>
-        </p:txBody>
-      </p:sp>
-      <p:sp>
-        <p:nvSpPr>
-          <p:cNvPr id="15" name="Shape 12"/>
-          <p:cNvSpPr/>
-          <p:nvPr/>
-        </p:nvSpPr>
-        <p:spPr>
-          <a:xfrm>
-            <a:off x="6507328" y="2743200"/>
-            <a:ext cx="292608" cy="292608"/>
-          </a:xfrm>
-          <a:prstGeom prst="ellipse">
-            <a:avLst/>
-          </a:prstGeom>
-          <a:solidFill>
-            <a:srgbClr val="3B6BA8"/>
-          </a:solidFill>
-          <a:ln w="12700">
-            <a:solidFill>
-              <a:srgbClr val="3B6BA8"/>
-            </a:solidFill>
-            <a:prstDash val="solid"/>
-          </a:ln>
-        </p:spPr>
-      </p:sp>
-      <p:sp>
-        <p:nvSpPr>
-          <p:cNvPr id="16" name="Text 13"/>
-          <p:cNvSpPr txBox="1"/>
-          <p:nvPr/>
-        </p:nvSpPr>
-        <p:spPr>
-          <a:xfrm>
-            <a:off x="6507328" y="2743200"/>
-            <a:ext cx="292608" cy="292608"/>
-          </a:xfrm>
-          <a:prstGeom prst="rect">
-            <a:avLst/>
-          </a:prstGeom>
-          <a:noFill/>
-          <a:ln/>
-        </p:spPr>
-        <p:txBody>
-          <a:bodyPr wrap="square" lIns="0" tIns="0" rIns="0" bIns="0" rtlCol="0" anchor="ctr"/>
-          <a:lstStyle/>
-          <a:p>
-            <a:pPr algn="ctr" indent="0" marL="0">
-              <a:buNone/>
-            </a:pPr>
-            <a:r>
-              <a:rPr lang="en-US" sz="1200" b="1" dirty="0">
-                <a:solidFill>
-                  <a:srgbClr val="FFFFFF"/>
-                </a:solidFill>
-                <a:latin typeface="Georgia" pitchFamily="34" charset="0"/>
-                <a:ea typeface="Georgia" pitchFamily="34" charset="-122"/>
-                <a:cs typeface="Georgia" pitchFamily="34" charset="-120"/>
-              </a:rPr>
-              <a:t>✓</a:t>
-            </a:r>
-            <a:endParaRPr lang="en-US" sz="1200" dirty="0"/>
-          </a:p>
-        </p:txBody>
-      </p:sp>
-      <p:sp>
-        <p:nvSpPr>
-          <p:cNvPr id="17" name="Text 14"/>
-          <p:cNvSpPr txBox="1"/>
-          <p:nvPr/>
-        </p:nvSpPr>
-        <p:spPr>
-          <a:xfrm>
-            <a:off x="6964528" y="2697480"/>
-            <a:ext cx="4404208" cy="594360"/>
-          </a:xfrm>
-          <a:prstGeom prst="rect">
-            <a:avLst/>
-          </a:prstGeom>
-          <a:noFill/>
-          <a:ln/>
-        </p:spPr>
-        <p:txBody>
-          <a:bodyPr wrap="square" lIns="0" tIns="0" rIns="0" bIns="0" rtlCol="0" anchor="t">
-            <a:normAutofit/>
-          </a:bodyPr>
-          <a:lstStyle/>
-          <a:p>
-            <a:pPr algn="l" indent="0" marL="0">
-              <a:buNone/>
-            </a:pPr>
-            <a:r>
-              <a:rPr lang="en-US" sz="1500" dirty="0">
-                <a:solidFill>
-                  <a:srgbClr val="1F2933"/>
-                </a:solidFill>
-                <a:latin typeface="Arial" pitchFamily="34" charset="0"/>
-                <a:ea typeface="Arial" pitchFamily="34" charset="-122"/>
-                <a:cs typeface="Arial" pitchFamily="34" charset="-120"/>
-              </a:rPr>
-              <a:t>The test cites the requirement it exercises, by id</a:t>
-            </a:r>
-            <a:endParaRPr lang="en-US" sz="1500" dirty="0"/>
-          </a:p>
-        </p:txBody>
-      </p:sp>
-      <p:sp>
-        <p:nvSpPr>
-          <p:cNvPr id="18" name="Shape 15"/>
-          <p:cNvSpPr/>
-          <p:nvPr/>
-        </p:nvSpPr>
-        <p:spPr>
-          <a:xfrm>
-            <a:off x="6507328" y="3474720"/>
-            <a:ext cx="292608" cy="292608"/>
-          </a:xfrm>
-          <a:prstGeom prst="ellipse">
-            <a:avLst/>
-          </a:prstGeom>
-          <a:solidFill>
-            <a:srgbClr val="3B6BA8"/>
-          </a:solidFill>
-          <a:ln w="12700">
-            <a:solidFill>
-              <a:srgbClr val="3B6BA8"/>
-            </a:solidFill>
-            <a:prstDash val="solid"/>
-          </a:ln>
-        </p:spPr>
-      </p:sp>
-      <p:sp>
-        <p:nvSpPr>
-          <p:cNvPr id="19" name="Text 16"/>
-          <p:cNvSpPr txBox="1"/>
-          <p:nvPr/>
-        </p:nvSpPr>
-        <p:spPr>
-          <a:xfrm>
-            <a:off x="6507328" y="3474720"/>
-            <a:ext cx="292608" cy="292608"/>
-          </a:xfrm>
-          <a:prstGeom prst="rect">
-            <a:avLst/>
-          </a:prstGeom>
-          <a:noFill/>
-          <a:ln/>
-        </p:spPr>
-        <p:txBody>
-          <a:bodyPr wrap="square" lIns="0" tIns="0" rIns="0" bIns="0" rtlCol="0" anchor="ctr"/>
-          <a:lstStyle/>
-          <a:p>
-            <a:pPr algn="ctr" indent="0" marL="0">
-              <a:buNone/>
-            </a:pPr>
-            <a:r>
-              <a:rPr lang="en-US" sz="1200" b="1" dirty="0">
-                <a:solidFill>
-                  <a:srgbClr val="FFFFFF"/>
-                </a:solidFill>
-                <a:latin typeface="Georgia" pitchFamily="34" charset="0"/>
-                <a:ea typeface="Georgia" pitchFamily="34" charset="-122"/>
-                <a:cs typeface="Georgia" pitchFamily="34" charset="-120"/>
-              </a:rPr>
-              <a:t>✓</a:t>
-            </a:r>
-            <a:endParaRPr lang="en-US" sz="1200" dirty="0"/>
-          </a:p>
-        </p:txBody>
-      </p:sp>
-      <p:sp>
-        <p:nvSpPr>
-          <p:cNvPr id="20" name="Text 17"/>
-          <p:cNvSpPr txBox="1"/>
-          <p:nvPr/>
-        </p:nvSpPr>
-        <p:spPr>
-          <a:xfrm>
-            <a:off x="6964528" y="3429000"/>
-            <a:ext cx="4404208" cy="594360"/>
-          </a:xfrm>
-          <a:prstGeom prst="rect">
-            <a:avLst/>
-          </a:prstGeom>
-          <a:noFill/>
-          <a:ln/>
-        </p:spPr>
-        <p:txBody>
-          <a:bodyPr wrap="square" lIns="0" tIns="0" rIns="0" bIns="0" rtlCol="0" anchor="t">
-            <a:normAutofit/>
-          </a:bodyPr>
-          <a:lstStyle/>
-          <a:p>
-            <a:pPr algn="l" indent="0" marL="0">
-              <a:buNone/>
-            </a:pPr>
-            <a:r>
-              <a:rPr lang="en-US" sz="1500" dirty="0">
-                <a:solidFill>
-                  <a:srgbClr val="1F2933"/>
-                </a:solidFill>
-                <a:latin typeface="Arial" pitchFamily="34" charset="0"/>
-                <a:ea typeface="Arial" pitchFamily="34" charset="-122"/>
-                <a:cs typeface="Arial" pitchFamily="34" charset="-120"/>
-              </a:rPr>
-              <a:t>A validator ran and the record names the command and the guard branches</a:t>
-            </a:r>
-            <a:endParaRPr lang="en-US" sz="1500" dirty="0"/>
-          </a:p>
-        </p:txBody>
-      </p:sp>
-      <p:sp>
-        <p:nvSpPr>
-          <p:cNvPr id="21" name="Shape 18"/>
-          <p:cNvSpPr/>
-          <p:nvPr/>
-        </p:nvSpPr>
-        <p:spPr>
-          <a:xfrm>
-            <a:off x="6507328" y="4206240"/>
-            <a:ext cx="292608" cy="292608"/>
-          </a:xfrm>
-          <a:prstGeom prst="ellipse">
-            <a:avLst/>
-          </a:prstGeom>
-          <a:solidFill>
-            <a:srgbClr val="3B6BA8"/>
-          </a:solidFill>
-          <a:ln w="12700">
-            <a:solidFill>
-              <a:srgbClr val="3B6BA8"/>
-            </a:solidFill>
-            <a:prstDash val="solid"/>
-          </a:ln>
-        </p:spPr>
-      </p:sp>
-      <p:sp>
-        <p:nvSpPr>
-          <p:cNvPr id="22" name="Text 19"/>
-          <p:cNvSpPr txBox="1"/>
-          <p:nvPr/>
-        </p:nvSpPr>
-        <p:spPr>
-          <a:xfrm>
-            <a:off x="6507328" y="4206240"/>
-            <a:ext cx="292608" cy="292608"/>
-          </a:xfrm>
-          <a:prstGeom prst="rect">
-            <a:avLst/>
-          </a:prstGeom>
-          <a:noFill/>
-          <a:ln/>
-        </p:spPr>
-        <p:txBody>
-          <a:bodyPr wrap="square" lIns="0" tIns="0" rIns="0" bIns="0" rtlCol="0" anchor="ctr"/>
-          <a:lstStyle/>
-          <a:p>
-            <a:pPr algn="ctr" indent="0" marL="0">
-              <a:buNone/>
-            </a:pPr>
-            <a:r>
-              <a:rPr lang="en-US" sz="1200" b="1" dirty="0">
-                <a:solidFill>
-                  <a:srgbClr val="FFFFFF"/>
-                </a:solidFill>
-                <a:latin typeface="Georgia" pitchFamily="34" charset="0"/>
-                <a:ea typeface="Georgia" pitchFamily="34" charset="-122"/>
-                <a:cs typeface="Georgia" pitchFamily="34" charset="-120"/>
-              </a:rPr>
-              <a:t>✓</a:t>
-            </a:r>
-            <a:endParaRPr lang="en-US" sz="1200" dirty="0"/>
-          </a:p>
-        </p:txBody>
-      </p:sp>
-      <p:sp>
-        <p:nvSpPr>
-          <p:cNvPr id="23" name="Text 20"/>
-          <p:cNvSpPr txBox="1"/>
-          <p:nvPr/>
-        </p:nvSpPr>
-        <p:spPr>
-          <a:xfrm>
-            <a:off x="6964528" y="4160520"/>
-            <a:ext cx="4404208" cy="594360"/>
-          </a:xfrm>
-          <a:prstGeom prst="rect">
-            <a:avLst/>
-          </a:prstGeom>
-          <a:noFill/>
-          <a:ln/>
-        </p:spPr>
-        <p:txBody>
-          <a:bodyPr wrap="square" lIns="0" tIns="0" rIns="0" bIns="0" rtlCol="0" anchor="t">
-            <a:normAutofit/>
-          </a:bodyPr>
-          <a:lstStyle/>
-          <a:p>
-            <a:pPr algn="l" indent="0" marL="0">
-              <a:buNone/>
-            </a:pPr>
-            <a:r>
-              <a:rPr lang="en-US" sz="1500" dirty="0">
-                <a:solidFill>
-                  <a:srgbClr val="1F2933"/>
-                </a:solidFill>
-                <a:latin typeface="Arial" pitchFamily="34" charset="0"/>
-                <a:ea typeface="Arial" pitchFamily="34" charset="-122"/>
-                <a:cs typeface="Arial" pitchFamily="34" charset="-120"/>
-              </a:rPr>
-              <a:t>The metric definition and its dashboard row exist</a:t>
-            </a:r>
-            <a:endParaRPr lang="en-US" sz="1500" dirty="0"/>
-          </a:p>
-        </p:txBody>
-      </p:sp>
-      <p:sp>
-        <p:nvSpPr>
-          <p:cNvPr id="24" name="Text 21"/>
-          <p:cNvSpPr txBox="1"/>
-          <p:nvPr/>
-        </p:nvSpPr>
-        <p:spPr>
-          <a:xfrm>
-            <a:off x="548640" y="5257800"/>
-            <a:ext cx="11094415" cy="548640"/>
-          </a:xfrm>
-          <a:prstGeom prst="rect">
-            <a:avLst/>
-          </a:prstGeom>
-          <a:noFill/>
-          <a:ln/>
-        </p:spPr>
-        <p:txBody>
-          <a:bodyPr wrap="square" lIns="0" tIns="0" rIns="0" bIns="0" rtlCol="0" anchor="ctr">
-            <a:normAutofit/>
-          </a:bodyPr>
-          <a:lstStyle/>
-          <a:p>
-            <a:pPr algn="l" indent="0" marL="0">
-              <a:buNone/>
-            </a:pPr>
-            <a:r>
-              <a:rPr lang="en-US" sz="1500" b="1" dirty="0">
-                <a:solidFill>
-                  <a:srgbClr val="C44B2F"/>
-                </a:solidFill>
-                <a:latin typeface="Arial" pitchFamily="34" charset="0"/>
-                <a:ea typeface="Arial" pitchFamily="34" charset="-122"/>
-                <a:cs typeface="Arial" pitchFamily="34" charset="-120"/>
-              </a:rPr>
-              <a:t>Verdict: a claim without evidence blocks the work as a phantom claim</a:t>
-            </a:r>
-            <a:endParaRPr lang="en-US" sz="1500" dirty="0"/>
-          </a:p>
-        </p:txBody>
-      </p:sp>
+      <p:graphicFrame>
+        <p:nvGraphicFramePr>
+          <p:cNvPr id="9" name="Table 0"/>
+          <p:cNvGraphicFramePr>
+            <a:graphicFrameLocks noGrp="1"/>
+          </p:cNvGraphicFramePr>
+          <p:nvPr>
+            <p:extLst>
+              <p:ext uri="{D42A27DB-BD31-4B8C-83A1-F6EECF244321}">
+                <p14:modId xmlns:p14="http://schemas.microsoft.com/office/powerpoint/2010/main" val="1579011935"/>
+              </p:ext>
+            </p:extLst>
+          </p:nvPr>
+        </p:nvGraphicFramePr>
+        <p:xfrm>
+          <a:off x="548640" y="1965960"/>
+          <a:ext cx="11094415" cy="914400"/>
+        </p:xfrm>
+        <a:graphic>
+          <a:graphicData uri="http://schemas.openxmlformats.org/drawingml/2006/table">
+            <a:tbl>
+              <a:tblPr/>
+              <a:tblGrid>
+                <a:gridCol w="3328325"/>
+                <a:gridCol w="3883045"/>
+                <a:gridCol w="3883045"/>
+              </a:tblGrid>
+              <a:tr h="594360">
+                <a:tc>
+                  <a:txBody>
+                    <a:bodyPr/>
+                    <a:lstStyle/>
+                    <a:p>
+                      <a:pPr indent="0" marL="0">
+                        <a:buNone/>
+                      </a:pPr>
+                      <a:r>
+                        <a:rPr lang="en-US" sz="1500" b="1" dirty="0">
+                          <a:solidFill>
+                            <a:srgbClr val="FFFFFF"/>
+                          </a:solidFill>
+                          <a:latin typeface="Arial" pitchFamily="34" charset="0"/>
+                          <a:ea typeface="Arial" pitchFamily="34" charset="-122"/>
+                          <a:cs typeface="Arial" pitchFamily="34" charset="-120"/>
+                        </a:rPr>
+                        <a:t>Output</a:t>
+                      </a:r>
+                      <a:endParaRPr lang="en-US" sz="1500" dirty="0">
+                        <a:latin typeface="Arial" charset="0"/>
+                        <a:ea typeface="Arial" charset="0"/>
+                        <a:cs typeface="Arial" charset="0"/>
+                      </a:endParaRPr>
+                    </a:p>
+                  </a:txBody>
+                  <a:tcPr marL="73152" marR="73152" marT="73152" marB="73152" anchor="ctr">
+                    <a:lnL w="9525" cap="flat" cmpd="sng" algn="ctr">
+                      <a:solidFill>
+                        <a:srgbClr val="D6DCE4"/>
+                      </a:solidFill>
+                      <a:prstDash val="solid"/>
+                      <a:round/>
+                      <a:headEnd type="none" w="med" len="med"/>
+                      <a:tailEnd type="none" w="med" len="med"/>
+                    </a:lnL>
+                    <a:lnR w="9525" cap="flat" cmpd="sng" algn="ctr">
+                      <a:solidFill>
+                        <a:srgbClr val="D6DCE4"/>
+                      </a:solidFill>
+                      <a:prstDash val="solid"/>
+                      <a:round/>
+                      <a:headEnd type="none" w="med" len="med"/>
+                      <a:tailEnd type="none" w="med" len="med"/>
+                    </a:lnR>
+                    <a:lnT w="9525" cap="flat" cmpd="sng" algn="ctr">
+                      <a:solidFill>
+                        <a:srgbClr val="D6DCE4"/>
+                      </a:solidFill>
+                      <a:prstDash val="solid"/>
+                      <a:round/>
+                      <a:headEnd type="none" w="med" len="med"/>
+                      <a:tailEnd type="none" w="med" len="med"/>
+                    </a:lnT>
+                    <a:lnB w="9525" cap="flat" cmpd="sng" algn="ctr">
+                      <a:solidFill>
+                        <a:srgbClr val="D6DCE4"/>
+                      </a:solidFill>
+                      <a:prstDash val="solid"/>
+                      <a:round/>
+                      <a:headEnd type="none" w="med" len="med"/>
+                      <a:tailEnd type="none" w="med" len="med"/>
+                    </a:lnB>
+                    <a:solidFill>
+                      <a:srgbClr val="3B6BA8"/>
+                    </a:solidFill>
+                  </a:tcPr>
+                </a:tc>
+                <a:tc>
+                  <a:txBody>
+                    <a:bodyPr/>
+                    <a:lstStyle/>
+                    <a:p>
+                      <a:pPr indent="0" marL="0">
+                        <a:buNone/>
+                      </a:pPr>
+                      <a:r>
+                        <a:rPr lang="en-US" sz="1500" b="1" dirty="0">
+                          <a:solidFill>
+                            <a:srgbClr val="FFFFFF"/>
+                          </a:solidFill>
+                          <a:latin typeface="Arial" pitchFamily="34" charset="0"/>
+                          <a:ea typeface="Arial" pitchFamily="34" charset="-122"/>
+                          <a:cs typeface="Arial" pitchFamily="34" charset="-120"/>
+                        </a:rPr>
+                        <a:t>Who reads it</a:t>
+                      </a:r>
+                      <a:endParaRPr lang="en-US" sz="1500" dirty="0">
+                        <a:latin typeface="Arial" charset="0"/>
+                        <a:ea typeface="Arial" charset="0"/>
+                        <a:cs typeface="Arial" charset="0"/>
+                      </a:endParaRPr>
+                    </a:p>
+                  </a:txBody>
+                  <a:tcPr marL="73152" marR="73152" marT="73152" marB="73152" anchor="ctr">
+                    <a:lnL w="9525" cap="flat" cmpd="sng" algn="ctr">
+                      <a:solidFill>
+                        <a:srgbClr val="D6DCE4"/>
+                      </a:solidFill>
+                      <a:prstDash val="solid"/>
+                      <a:round/>
+                      <a:headEnd type="none" w="med" len="med"/>
+                      <a:tailEnd type="none" w="med" len="med"/>
+                    </a:lnL>
+                    <a:lnR w="9525" cap="flat" cmpd="sng" algn="ctr">
+                      <a:solidFill>
+                        <a:srgbClr val="D6DCE4"/>
+                      </a:solidFill>
+                      <a:prstDash val="solid"/>
+                      <a:round/>
+                      <a:headEnd type="none" w="med" len="med"/>
+                      <a:tailEnd type="none" w="med" len="med"/>
+                    </a:lnR>
+                    <a:lnT w="9525" cap="flat" cmpd="sng" algn="ctr">
+                      <a:solidFill>
+                        <a:srgbClr val="D6DCE4"/>
+                      </a:solidFill>
+                      <a:prstDash val="solid"/>
+                      <a:round/>
+                      <a:headEnd type="none" w="med" len="med"/>
+                      <a:tailEnd type="none" w="med" len="med"/>
+                    </a:lnT>
+                    <a:lnB w="9525" cap="flat" cmpd="sng" algn="ctr">
+                      <a:solidFill>
+                        <a:srgbClr val="D6DCE4"/>
+                      </a:solidFill>
+                      <a:prstDash val="solid"/>
+                      <a:round/>
+                      <a:headEnd type="none" w="med" len="med"/>
+                      <a:tailEnd type="none" w="med" len="med"/>
+                    </a:lnB>
+                    <a:solidFill>
+                      <a:srgbClr val="3B6BA8"/>
+                    </a:solidFill>
+                  </a:tcPr>
+                </a:tc>
+                <a:tc>
+                  <a:txBody>
+                    <a:bodyPr/>
+                    <a:lstStyle/>
+                    <a:p>
+                      <a:pPr indent="0" marL="0">
+                        <a:buNone/>
+                      </a:pPr>
+                      <a:r>
+                        <a:rPr lang="en-US" sz="1500" b="1" dirty="0">
+                          <a:solidFill>
+                            <a:srgbClr val="FFFFFF"/>
+                          </a:solidFill>
+                          <a:latin typeface="Arial" pitchFamily="34" charset="0"/>
+                          <a:ea typeface="Arial" pitchFamily="34" charset="-122"/>
+                          <a:cs typeface="Arial" pitchFamily="34" charset="-120"/>
+                        </a:rPr>
+                        <a:t>Comes from</a:t>
+                      </a:r>
+                      <a:endParaRPr lang="en-US" sz="1500" dirty="0">
+                        <a:latin typeface="Arial" charset="0"/>
+                        <a:ea typeface="Arial" charset="0"/>
+                        <a:cs typeface="Arial" charset="0"/>
+                      </a:endParaRPr>
+                    </a:p>
+                  </a:txBody>
+                  <a:tcPr marL="73152" marR="73152" marT="73152" marB="73152" anchor="ctr">
+                    <a:lnL w="9525" cap="flat" cmpd="sng" algn="ctr">
+                      <a:solidFill>
+                        <a:srgbClr val="D6DCE4"/>
+                      </a:solidFill>
+                      <a:prstDash val="solid"/>
+                      <a:round/>
+                      <a:headEnd type="none" w="med" len="med"/>
+                      <a:tailEnd type="none" w="med" len="med"/>
+                    </a:lnL>
+                    <a:lnR w="9525" cap="flat" cmpd="sng" algn="ctr">
+                      <a:solidFill>
+                        <a:srgbClr val="D6DCE4"/>
+                      </a:solidFill>
+                      <a:prstDash val="solid"/>
+                      <a:round/>
+                      <a:headEnd type="none" w="med" len="med"/>
+                      <a:tailEnd type="none" w="med" len="med"/>
+                    </a:lnR>
+                    <a:lnT w="9525" cap="flat" cmpd="sng" algn="ctr">
+                      <a:solidFill>
+                        <a:srgbClr val="D6DCE4"/>
+                      </a:solidFill>
+                      <a:prstDash val="solid"/>
+                      <a:round/>
+                      <a:headEnd type="none" w="med" len="med"/>
+                      <a:tailEnd type="none" w="med" len="med"/>
+                    </a:lnT>
+                    <a:lnB w="9525" cap="flat" cmpd="sng" algn="ctr">
+                      <a:solidFill>
+                        <a:srgbClr val="D6DCE4"/>
+                      </a:solidFill>
+                      <a:prstDash val="solid"/>
+                      <a:round/>
+                      <a:headEnd type="none" w="med" len="med"/>
+                      <a:tailEnd type="none" w="med" len="med"/>
+                    </a:lnB>
+                    <a:solidFill>
+                      <a:srgbClr val="3B6BA8"/>
+                    </a:solidFill>
+                  </a:tcPr>
+                </a:tc>
+              </a:tr>
+              <a:tr h="594360">
+                <a:tc>
+                  <a:txBody>
+                    <a:bodyPr/>
+                    <a:lstStyle/>
+                    <a:p>
+                      <a:pPr indent="0" marL="0">
+                        <a:buNone/>
+                      </a:pPr>
+                      <a:r>
+                        <a:rPr lang="en-US" sz="1500" b="1" dirty="0">
+                          <a:solidFill>
+                            <a:srgbClr val="55606D"/>
+                          </a:solidFill>
+                          <a:latin typeface="Arial" pitchFamily="34" charset="0"/>
+                          <a:ea typeface="Arial" pitchFamily="34" charset="-122"/>
+                          <a:cs typeface="Arial" pitchFamily="34" charset="-120"/>
+                        </a:rPr>
+                        <a:t>Status report</a:t>
+                      </a:r>
+                      <a:endParaRPr lang="en-US" sz="1500" dirty="0">
+                        <a:latin typeface="Arial" charset="0"/>
+                        <a:ea typeface="Arial" charset="0"/>
+                        <a:cs typeface="Arial" charset="0"/>
+                      </a:endParaRPr>
+                    </a:p>
+                  </a:txBody>
+                  <a:tcPr marL="73152" marR="73152" marT="73152" marB="73152" anchor="ctr">
+                    <a:lnL w="9525" cap="flat" cmpd="sng" algn="ctr">
+                      <a:solidFill>
+                        <a:srgbClr val="D6DCE4"/>
+                      </a:solidFill>
+                      <a:prstDash val="solid"/>
+                      <a:round/>
+                      <a:headEnd type="none" w="med" len="med"/>
+                      <a:tailEnd type="none" w="med" len="med"/>
+                    </a:lnL>
+                    <a:lnR w="9525" cap="flat" cmpd="sng" algn="ctr">
+                      <a:solidFill>
+                        <a:srgbClr val="D6DCE4"/>
+                      </a:solidFill>
+                      <a:prstDash val="solid"/>
+                      <a:round/>
+                      <a:headEnd type="none" w="med" len="med"/>
+                      <a:tailEnd type="none" w="med" len="med"/>
+                    </a:lnR>
+                    <a:lnT w="9525" cap="flat" cmpd="sng" algn="ctr">
+                      <a:solidFill>
+                        <a:srgbClr val="D6DCE4"/>
+                      </a:solidFill>
+                      <a:prstDash val="solid"/>
+                      <a:round/>
+                      <a:headEnd type="none" w="med" len="med"/>
+                      <a:tailEnd type="none" w="med" len="med"/>
+                    </a:lnT>
+                    <a:lnB w="9525" cap="flat" cmpd="sng" algn="ctr">
+                      <a:solidFill>
+                        <a:srgbClr val="D6DCE4"/>
+                      </a:solidFill>
+                      <a:prstDash val="solid"/>
+                      <a:round/>
+                      <a:headEnd type="none" w="med" len="med"/>
+                      <a:tailEnd type="none" w="med" len="med"/>
+                    </a:lnB>
+                    <a:solidFill>
+                      <a:srgbClr val="FFFFFF"/>
+                    </a:solidFill>
+                  </a:tcPr>
+                </a:tc>
+                <a:tc>
+                  <a:txBody>
+                    <a:bodyPr/>
+                    <a:lstStyle/>
+                    <a:p>
+                      <a:pPr indent="0" marL="0">
+                        <a:buNone/>
+                      </a:pPr>
+                      <a:r>
+                        <a:rPr lang="en-US" sz="1500" dirty="0">
+                          <a:solidFill>
+                            <a:srgbClr val="1F2933"/>
+                          </a:solidFill>
+                          <a:latin typeface="Arial" pitchFamily="34" charset="0"/>
+                          <a:ea typeface="Arial" pitchFamily="34" charset="-122"/>
+                          <a:cs typeface="Arial" pitchFamily="34" charset="-120"/>
+                        </a:rPr>
+                        <a:t>sponsors and clients</a:t>
+                      </a:r>
+                      <a:endParaRPr lang="en-US" sz="1500" dirty="0">
+                        <a:latin typeface="Arial" charset="0"/>
+                        <a:ea typeface="Arial" charset="0"/>
+                        <a:cs typeface="Arial" charset="0"/>
+                      </a:endParaRPr>
+                    </a:p>
+                  </a:txBody>
+                  <a:tcPr marL="73152" marR="73152" marT="73152" marB="73152" anchor="ctr">
+                    <a:lnL w="9525" cap="flat" cmpd="sng" algn="ctr">
+                      <a:solidFill>
+                        <a:srgbClr val="D6DCE4"/>
+                      </a:solidFill>
+                      <a:prstDash val="solid"/>
+                      <a:round/>
+                      <a:headEnd type="none" w="med" len="med"/>
+                      <a:tailEnd type="none" w="med" len="med"/>
+                    </a:lnL>
+                    <a:lnR w="9525" cap="flat" cmpd="sng" algn="ctr">
+                      <a:solidFill>
+                        <a:srgbClr val="D6DCE4"/>
+                      </a:solidFill>
+                      <a:prstDash val="solid"/>
+                      <a:round/>
+                      <a:headEnd type="none" w="med" len="med"/>
+                      <a:tailEnd type="none" w="med" len="med"/>
+                    </a:lnR>
+                    <a:lnT w="9525" cap="flat" cmpd="sng" algn="ctr">
+                      <a:solidFill>
+                        <a:srgbClr val="D6DCE4"/>
+                      </a:solidFill>
+                      <a:prstDash val="solid"/>
+                      <a:round/>
+                      <a:headEnd type="none" w="med" len="med"/>
+                      <a:tailEnd type="none" w="med" len="med"/>
+                    </a:lnT>
+                    <a:lnB w="9525" cap="flat" cmpd="sng" algn="ctr">
+                      <a:solidFill>
+                        <a:srgbClr val="D6DCE4"/>
+                      </a:solidFill>
+                      <a:prstDash val="solid"/>
+                      <a:round/>
+                      <a:headEnd type="none" w="med" len="med"/>
+                      <a:tailEnd type="none" w="med" len="med"/>
+                    </a:lnB>
+                    <a:solidFill>
+                      <a:srgbClr val="FFFFFF"/>
+                    </a:solidFill>
+                  </a:tcPr>
+                </a:tc>
+                <a:tc>
+                  <a:txBody>
+                    <a:bodyPr/>
+                    <a:lstStyle/>
+                    <a:p>
+                      <a:pPr indent="0" marL="0">
+                        <a:buNone/>
+                      </a:pPr>
+                      <a:r>
+                        <a:rPr lang="en-US" sz="1500" dirty="0">
+                          <a:solidFill>
+                            <a:srgbClr val="1F2933"/>
+                          </a:solidFill>
+                          <a:latin typeface="Arial" pitchFamily="34" charset="0"/>
+                          <a:ea typeface="Arial" pitchFamily="34" charset="-122"/>
+                          <a:cs typeface="Arial" pitchFamily="34" charset="-120"/>
+                        </a:rPr>
+                        <a:t>the iteration plan, evidence per claim</a:t>
+                      </a:r>
+                      <a:endParaRPr lang="en-US" sz="1500" dirty="0">
+                        <a:latin typeface="Arial" charset="0"/>
+                        <a:ea typeface="Arial" charset="0"/>
+                        <a:cs typeface="Arial" charset="0"/>
+                      </a:endParaRPr>
+                    </a:p>
+                  </a:txBody>
+                  <a:tcPr marL="73152" marR="73152" marT="73152" marB="73152" anchor="ctr">
+                    <a:lnL w="9525" cap="flat" cmpd="sng" algn="ctr">
+                      <a:solidFill>
+                        <a:srgbClr val="D6DCE4"/>
+                      </a:solidFill>
+                      <a:prstDash val="solid"/>
+                      <a:round/>
+                      <a:headEnd type="none" w="med" len="med"/>
+                      <a:tailEnd type="none" w="med" len="med"/>
+                    </a:lnL>
+                    <a:lnR w="9525" cap="flat" cmpd="sng" algn="ctr">
+                      <a:solidFill>
+                        <a:srgbClr val="D6DCE4"/>
+                      </a:solidFill>
+                      <a:prstDash val="solid"/>
+                      <a:round/>
+                      <a:headEnd type="none" w="med" len="med"/>
+                      <a:tailEnd type="none" w="med" len="med"/>
+                    </a:lnR>
+                    <a:lnT w="9525" cap="flat" cmpd="sng" algn="ctr">
+                      <a:solidFill>
+                        <a:srgbClr val="D6DCE4"/>
+                      </a:solidFill>
+                      <a:prstDash val="solid"/>
+                      <a:round/>
+                      <a:headEnd type="none" w="med" len="med"/>
+                      <a:tailEnd type="none" w="med" len="med"/>
+                    </a:lnT>
+                    <a:lnB w="9525" cap="flat" cmpd="sng" algn="ctr">
+                      <a:solidFill>
+                        <a:srgbClr val="D6DCE4"/>
+                      </a:solidFill>
+                      <a:prstDash val="solid"/>
+                      <a:round/>
+                      <a:headEnd type="none" w="med" len="med"/>
+                      <a:tailEnd type="none" w="med" len="med"/>
+                    </a:lnB>
+                    <a:solidFill>
+                      <a:srgbClr val="FFFFFF"/>
+                    </a:solidFill>
+                  </a:tcPr>
+                </a:tc>
+              </a:tr>
+              <a:tr h="658368">
+                <a:tc>
+                  <a:txBody>
+                    <a:bodyPr/>
+                    <a:lstStyle/>
+                    <a:p>
+                      <a:pPr indent="0" marL="0">
+                        <a:buNone/>
+                      </a:pPr>
+                      <a:r>
+                        <a:rPr lang="en-US" sz="1500" b="1" dirty="0">
+                          <a:solidFill>
+                            <a:srgbClr val="55606D"/>
+                          </a:solidFill>
+                          <a:latin typeface="Arial" pitchFamily="34" charset="0"/>
+                          <a:ea typeface="Arial" pitchFamily="34" charset="-122"/>
+                          <a:cs typeface="Arial" pitchFamily="34" charset="-120"/>
+                        </a:rPr>
+                        <a:t>Deck or brief</a:t>
+                      </a:r>
+                      <a:endParaRPr lang="en-US" sz="1500" dirty="0">
+                        <a:latin typeface="Arial" charset="0"/>
+                        <a:ea typeface="Arial" charset="0"/>
+                        <a:cs typeface="Arial" charset="0"/>
+                      </a:endParaRPr>
+                    </a:p>
+                  </a:txBody>
+                  <a:tcPr marL="73152" marR="73152" marT="73152" marB="73152" anchor="ctr">
+                    <a:lnL w="9525" cap="flat" cmpd="sng" algn="ctr">
+                      <a:solidFill>
+                        <a:srgbClr val="D6DCE4"/>
+                      </a:solidFill>
+                      <a:prstDash val="solid"/>
+                      <a:round/>
+                      <a:headEnd type="none" w="med" len="med"/>
+                      <a:tailEnd type="none" w="med" len="med"/>
+                    </a:lnL>
+                    <a:lnR w="9525" cap="flat" cmpd="sng" algn="ctr">
+                      <a:solidFill>
+                        <a:srgbClr val="D6DCE4"/>
+                      </a:solidFill>
+                      <a:prstDash val="solid"/>
+                      <a:round/>
+                      <a:headEnd type="none" w="med" len="med"/>
+                      <a:tailEnd type="none" w="med" len="med"/>
+                    </a:lnR>
+                    <a:lnT w="9525" cap="flat" cmpd="sng" algn="ctr">
+                      <a:solidFill>
+                        <a:srgbClr val="D6DCE4"/>
+                      </a:solidFill>
+                      <a:prstDash val="solid"/>
+                      <a:round/>
+                      <a:headEnd type="none" w="med" len="med"/>
+                      <a:tailEnd type="none" w="med" len="med"/>
+                    </a:lnT>
+                    <a:lnB w="9525" cap="flat" cmpd="sng" algn="ctr">
+                      <a:solidFill>
+                        <a:srgbClr val="D6DCE4"/>
+                      </a:solidFill>
+                      <a:prstDash val="solid"/>
+                      <a:round/>
+                      <a:headEnd type="none" w="med" len="med"/>
+                      <a:tailEnd type="none" w="med" len="med"/>
+                    </a:lnB>
+                    <a:solidFill>
+                      <a:srgbClr val="F3F5F8"/>
+                    </a:solidFill>
+                  </a:tcPr>
+                </a:tc>
+                <a:tc>
+                  <a:txBody>
+                    <a:bodyPr/>
+                    <a:lstStyle/>
+                    <a:p>
+                      <a:pPr indent="0" marL="0">
+                        <a:buNone/>
+                      </a:pPr>
+                      <a:r>
+                        <a:rPr lang="en-US" sz="1500" dirty="0">
+                          <a:solidFill>
+                            <a:srgbClr val="1F2933"/>
+                          </a:solidFill>
+                          <a:latin typeface="Arial" pitchFamily="34" charset="0"/>
+                          <a:ea typeface="Arial" pitchFamily="34" charset="-122"/>
+                          <a:cs typeface="Arial" pitchFamily="34" charset="-120"/>
+                        </a:rPr>
+                        <a:t>executives and customers</a:t>
+                      </a:r>
+                      <a:endParaRPr lang="en-US" sz="1500" dirty="0">
+                        <a:latin typeface="Arial" charset="0"/>
+                        <a:ea typeface="Arial" charset="0"/>
+                        <a:cs typeface="Arial" charset="0"/>
+                      </a:endParaRPr>
+                    </a:p>
+                  </a:txBody>
+                  <a:tcPr marL="73152" marR="73152" marT="73152" marB="73152" anchor="ctr">
+                    <a:lnL w="9525" cap="flat" cmpd="sng" algn="ctr">
+                      <a:solidFill>
+                        <a:srgbClr val="D6DCE4"/>
+                      </a:solidFill>
+                      <a:prstDash val="solid"/>
+                      <a:round/>
+                      <a:headEnd type="none" w="med" len="med"/>
+                      <a:tailEnd type="none" w="med" len="med"/>
+                    </a:lnL>
+                    <a:lnR w="9525" cap="flat" cmpd="sng" algn="ctr">
+                      <a:solidFill>
+                        <a:srgbClr val="D6DCE4"/>
+                      </a:solidFill>
+                      <a:prstDash val="solid"/>
+                      <a:round/>
+                      <a:headEnd type="none" w="med" len="med"/>
+                      <a:tailEnd type="none" w="med" len="med"/>
+                    </a:lnR>
+                    <a:lnT w="9525" cap="flat" cmpd="sng" algn="ctr">
+                      <a:solidFill>
+                        <a:srgbClr val="D6DCE4"/>
+                      </a:solidFill>
+                      <a:prstDash val="solid"/>
+                      <a:round/>
+                      <a:headEnd type="none" w="med" len="med"/>
+                      <a:tailEnd type="none" w="med" len="med"/>
+                    </a:lnT>
+                    <a:lnB w="9525" cap="flat" cmpd="sng" algn="ctr">
+                      <a:solidFill>
+                        <a:srgbClr val="D6DCE4"/>
+                      </a:solidFill>
+                      <a:prstDash val="solid"/>
+                      <a:round/>
+                      <a:headEnd type="none" w="med" len="med"/>
+                      <a:tailEnd type="none" w="med" len="med"/>
+                    </a:lnB>
+                    <a:solidFill>
+                      <a:srgbClr val="F3F5F8"/>
+                    </a:solidFill>
+                  </a:tcPr>
+                </a:tc>
+                <a:tc>
+                  <a:txBody>
+                    <a:bodyPr/>
+                    <a:lstStyle/>
+                    <a:p>
+                      <a:pPr indent="0" marL="0">
+                        <a:buNone/>
+                      </a:pPr>
+                      <a:r>
+                        <a:rPr lang="en-US" sz="1500" dirty="0">
+                          <a:solidFill>
+                            <a:srgbClr val="1F2933"/>
+                          </a:solidFill>
+                          <a:latin typeface="Arial" pitchFamily="34" charset="0"/>
+                          <a:ea typeface="Arial" pitchFamily="34" charset="-122"/>
+                          <a:cs typeface="Arial" pitchFamily="34" charset="-120"/>
+                        </a:rPr>
+                        <a:t>any governed document set, every number sourced</a:t>
+                      </a:r>
+                      <a:endParaRPr lang="en-US" sz="1500" dirty="0">
+                        <a:latin typeface="Arial" charset="0"/>
+                        <a:ea typeface="Arial" charset="0"/>
+                        <a:cs typeface="Arial" charset="0"/>
+                      </a:endParaRPr>
+                    </a:p>
+                  </a:txBody>
+                  <a:tcPr marL="73152" marR="73152" marT="73152" marB="73152" anchor="ctr">
+                    <a:lnL w="9525" cap="flat" cmpd="sng" algn="ctr">
+                      <a:solidFill>
+                        <a:srgbClr val="D6DCE4"/>
+                      </a:solidFill>
+                      <a:prstDash val="solid"/>
+                      <a:round/>
+                      <a:headEnd type="none" w="med" len="med"/>
+                      <a:tailEnd type="none" w="med" len="med"/>
+                    </a:lnL>
+                    <a:lnR w="9525" cap="flat" cmpd="sng" algn="ctr">
+                      <a:solidFill>
+                        <a:srgbClr val="D6DCE4"/>
+                      </a:solidFill>
+                      <a:prstDash val="solid"/>
+                      <a:round/>
+                      <a:headEnd type="none" w="med" len="med"/>
+                      <a:tailEnd type="none" w="med" len="med"/>
+                    </a:lnR>
+                    <a:lnT w="9525" cap="flat" cmpd="sng" algn="ctr">
+                      <a:solidFill>
+                        <a:srgbClr val="D6DCE4"/>
+                      </a:solidFill>
+                      <a:prstDash val="solid"/>
+                      <a:round/>
+                      <a:headEnd type="none" w="med" len="med"/>
+                      <a:tailEnd type="none" w="med" len="med"/>
+                    </a:lnT>
+                    <a:lnB w="9525" cap="flat" cmpd="sng" algn="ctr">
+                      <a:solidFill>
+                        <a:srgbClr val="D6DCE4"/>
+                      </a:solidFill>
+                      <a:prstDash val="solid"/>
+                      <a:round/>
+                      <a:headEnd type="none" w="med" len="med"/>
+                      <a:tailEnd type="none" w="med" len="med"/>
+                    </a:lnB>
+                    <a:solidFill>
+                      <a:srgbClr val="F3F5F8"/>
+                    </a:solidFill>
+                  </a:tcPr>
+                </a:tc>
+              </a:tr>
+              <a:tr h="594360">
+                <a:tc>
+                  <a:txBody>
+                    <a:bodyPr/>
+                    <a:lstStyle/>
+                    <a:p>
+                      <a:pPr indent="0" marL="0">
+                        <a:buNone/>
+                      </a:pPr>
+                      <a:r>
+                        <a:rPr lang="en-US" sz="1500" b="1" dirty="0">
+                          <a:solidFill>
+                            <a:srgbClr val="55606D"/>
+                          </a:solidFill>
+                          <a:latin typeface="Arial" pitchFamily="34" charset="0"/>
+                          <a:ea typeface="Arial" pitchFamily="34" charset="-122"/>
+                          <a:cs typeface="Arial" pitchFamily="34" charset="-120"/>
+                        </a:rPr>
+                        <a:t>Release notes</a:t>
+                      </a:r>
+                      <a:endParaRPr lang="en-US" sz="1500" dirty="0">
+                        <a:latin typeface="Arial" charset="0"/>
+                        <a:ea typeface="Arial" charset="0"/>
+                        <a:cs typeface="Arial" charset="0"/>
+                      </a:endParaRPr>
+                    </a:p>
+                  </a:txBody>
+                  <a:tcPr marL="73152" marR="73152" marT="73152" marB="73152" anchor="ctr">
+                    <a:lnL w="9525" cap="flat" cmpd="sng" algn="ctr">
+                      <a:solidFill>
+                        <a:srgbClr val="D6DCE4"/>
+                      </a:solidFill>
+                      <a:prstDash val="solid"/>
+                      <a:round/>
+                      <a:headEnd type="none" w="med" len="med"/>
+                      <a:tailEnd type="none" w="med" len="med"/>
+                    </a:lnL>
+                    <a:lnR w="9525" cap="flat" cmpd="sng" algn="ctr">
+                      <a:solidFill>
+                        <a:srgbClr val="D6DCE4"/>
+                      </a:solidFill>
+                      <a:prstDash val="solid"/>
+                      <a:round/>
+                      <a:headEnd type="none" w="med" len="med"/>
+                      <a:tailEnd type="none" w="med" len="med"/>
+                    </a:lnR>
+                    <a:lnT w="9525" cap="flat" cmpd="sng" algn="ctr">
+                      <a:solidFill>
+                        <a:srgbClr val="D6DCE4"/>
+                      </a:solidFill>
+                      <a:prstDash val="solid"/>
+                      <a:round/>
+                      <a:headEnd type="none" w="med" len="med"/>
+                      <a:tailEnd type="none" w="med" len="med"/>
+                    </a:lnT>
+                    <a:lnB w="9525" cap="flat" cmpd="sng" algn="ctr">
+                      <a:solidFill>
+                        <a:srgbClr val="D6DCE4"/>
+                      </a:solidFill>
+                      <a:prstDash val="solid"/>
+                      <a:round/>
+                      <a:headEnd type="none" w="med" len="med"/>
+                      <a:tailEnd type="none" w="med" len="med"/>
+                    </a:lnB>
+                    <a:solidFill>
+                      <a:srgbClr val="FFFFFF"/>
+                    </a:solidFill>
+                  </a:tcPr>
+                </a:tc>
+                <a:tc>
+                  <a:txBody>
+                    <a:bodyPr/>
+                    <a:lstStyle/>
+                    <a:p>
+                      <a:pPr indent="0" marL="0">
+                        <a:buNone/>
+                      </a:pPr>
+                      <a:r>
+                        <a:rPr lang="en-US" sz="1500" dirty="0">
+                          <a:solidFill>
+                            <a:srgbClr val="1F2933"/>
+                          </a:solidFill>
+                          <a:latin typeface="Arial" pitchFamily="34" charset="0"/>
+                          <a:ea typeface="Arial" pitchFamily="34" charset="-122"/>
+                          <a:cs typeface="Arial" pitchFamily="34" charset="-120"/>
+                        </a:rPr>
+                        <a:t>users and support</a:t>
+                      </a:r>
+                      <a:endParaRPr lang="en-US" sz="1500" dirty="0">
+                        <a:latin typeface="Arial" charset="0"/>
+                        <a:ea typeface="Arial" charset="0"/>
+                        <a:cs typeface="Arial" charset="0"/>
+                      </a:endParaRPr>
+                    </a:p>
+                  </a:txBody>
+                  <a:tcPr marL="73152" marR="73152" marT="73152" marB="73152" anchor="ctr">
+                    <a:lnL w="9525" cap="flat" cmpd="sng" algn="ctr">
+                      <a:solidFill>
+                        <a:srgbClr val="D6DCE4"/>
+                      </a:solidFill>
+                      <a:prstDash val="solid"/>
+                      <a:round/>
+                      <a:headEnd type="none" w="med" len="med"/>
+                      <a:tailEnd type="none" w="med" len="med"/>
+                    </a:lnL>
+                    <a:lnR w="9525" cap="flat" cmpd="sng" algn="ctr">
+                      <a:solidFill>
+                        <a:srgbClr val="D6DCE4"/>
+                      </a:solidFill>
+                      <a:prstDash val="solid"/>
+                      <a:round/>
+                      <a:headEnd type="none" w="med" len="med"/>
+                      <a:tailEnd type="none" w="med" len="med"/>
+                    </a:lnR>
+                    <a:lnT w="9525" cap="flat" cmpd="sng" algn="ctr">
+                      <a:solidFill>
+                        <a:srgbClr val="D6DCE4"/>
+                      </a:solidFill>
+                      <a:prstDash val="solid"/>
+                      <a:round/>
+                      <a:headEnd type="none" w="med" len="med"/>
+                      <a:tailEnd type="none" w="med" len="med"/>
+                    </a:lnT>
+                    <a:lnB w="9525" cap="flat" cmpd="sng" algn="ctr">
+                      <a:solidFill>
+                        <a:srgbClr val="D6DCE4"/>
+                      </a:solidFill>
+                      <a:prstDash val="solid"/>
+                      <a:round/>
+                      <a:headEnd type="none" w="med" len="med"/>
+                      <a:tailEnd type="none" w="med" len="med"/>
+                    </a:lnB>
+                    <a:solidFill>
+                      <a:srgbClr val="FFFFFF"/>
+                    </a:solidFill>
+                  </a:tcPr>
+                </a:tc>
+                <a:tc>
+                  <a:txBody>
+                    <a:bodyPr/>
+                    <a:lstStyle/>
+                    <a:p>
+                      <a:pPr indent="0" marL="0">
+                        <a:buNone/>
+                      </a:pPr>
+                      <a:r>
+                        <a:rPr lang="en-US" sz="1500" dirty="0">
+                          <a:solidFill>
+                            <a:srgbClr val="1F2933"/>
+                          </a:solidFill>
+                          <a:latin typeface="Arial" pitchFamily="34" charset="0"/>
+                          <a:ea typeface="Arial" pitchFamily="34" charset="-122"/>
+                          <a:cs typeface="Arial" pitchFamily="34" charset="-120"/>
+                        </a:rPr>
+                        <a:t>the deploy documents</a:t>
+                      </a:r>
+                      <a:endParaRPr lang="en-US" sz="1500" dirty="0">
+                        <a:latin typeface="Arial" charset="0"/>
+                        <a:ea typeface="Arial" charset="0"/>
+                        <a:cs typeface="Arial" charset="0"/>
+                      </a:endParaRPr>
+                    </a:p>
+                  </a:txBody>
+                  <a:tcPr marL="73152" marR="73152" marT="73152" marB="73152" anchor="ctr">
+                    <a:lnL w="9525" cap="flat" cmpd="sng" algn="ctr">
+                      <a:solidFill>
+                        <a:srgbClr val="D6DCE4"/>
+                      </a:solidFill>
+                      <a:prstDash val="solid"/>
+                      <a:round/>
+                      <a:headEnd type="none" w="med" len="med"/>
+                      <a:tailEnd type="none" w="med" len="med"/>
+                    </a:lnL>
+                    <a:lnR w="9525" cap="flat" cmpd="sng" algn="ctr">
+                      <a:solidFill>
+                        <a:srgbClr val="D6DCE4"/>
+                      </a:solidFill>
+                      <a:prstDash val="solid"/>
+                      <a:round/>
+                      <a:headEnd type="none" w="med" len="med"/>
+                      <a:tailEnd type="none" w="med" len="med"/>
+                    </a:lnR>
+                    <a:lnT w="9525" cap="flat" cmpd="sng" algn="ctr">
+                      <a:solidFill>
+                        <a:srgbClr val="D6DCE4"/>
+                      </a:solidFill>
+                      <a:prstDash val="solid"/>
+                      <a:round/>
+                      <a:headEnd type="none" w="med" len="med"/>
+                      <a:tailEnd type="none" w="med" len="med"/>
+                    </a:lnT>
+                    <a:lnB w="9525" cap="flat" cmpd="sng" algn="ctr">
+                      <a:solidFill>
+                        <a:srgbClr val="D6DCE4"/>
+                      </a:solidFill>
+                      <a:prstDash val="solid"/>
+                      <a:round/>
+                      <a:headEnd type="none" w="med" len="med"/>
+                      <a:tailEnd type="none" w="med" len="med"/>
+                    </a:lnB>
+                    <a:solidFill>
+                      <a:srgbClr val="FFFFFF"/>
+                    </a:solidFill>
+                  </a:tcPr>
+                </a:tc>
+              </a:tr>
+            </a:tbl>
+          </a:graphicData>
+        </a:graphic>
+      </p:graphicFrame>
     </p:spTree>
   </p:cSld>
   <p:clrMapOvr>
@@ -15169,7 +17169,7 @@
               <a:buNone/>
             </a:pPr>
             <a:r>
-              <a:rPr lang="en-US" sz="3600" b="1" dirty="0">
+              <a:rPr lang="en-US" sz="2800" b="1" dirty="0">
                 <a:solidFill>
                   <a:srgbClr val="1F2933"/>
                 </a:solidFill>
@@ -15177,9 +17177,9 @@
                 <a:ea typeface="Georgia" pitchFamily="34" charset="-122"/>
                 <a:cs typeface="Georgia" pitchFamily="34" charset="-120"/>
               </a:rPr>
-              <a:t>HELIX checks your documents and leaves your runtime and stack alone</a:t>
+              <a:t>One alignment gate caught three drifted documents before anyone coded</a:t>
             </a:r>
-            <a:endParaRPr lang="en-US" sz="3600" dirty="0"/>
+            <a:endParaRPr lang="en-US" sz="2800" dirty="0"/>
           </a:p>
         </p:txBody>
       </p:sp>
@@ -15216,7 +17216,7 @@
                 <a:ea typeface="Arial" pitchFamily="34" charset="-122"/>
                 <a:cs typeface="Arial" pitchFamily="34" charset="-120"/>
               </a:rPr>
-              <a:t>Sources: S13, S14, S15 (appendix)</a:t>
+              <a:t>Sources: S8 (appendix)</a:t>
             </a:r>
             <a:endParaRPr lang="en-US" sz="900" dirty="0"/>
           </a:p>
@@ -15298,7 +17298,7 @@
                 <a:ea typeface="Arial" pitchFamily="34" charset="-122"/>
                 <a:cs typeface="Arial" pitchFamily="34" charset="-120"/>
               </a:rPr>
-              <a:t>No command-line tool, tracker, queue, or execution engine ships with it</a:t>
+              <a:t>A team asked its agent to add OAuth login</a:t>
             </a:r>
             <a:endParaRPr lang="en-US" sz="1800" dirty="0"/>
           </a:p>
@@ -15319,7 +17319,7 @@
                 <a:ea typeface="Arial" pitchFamily="34" charset="-122"/>
                 <a:cs typeface="Arial" pitchFamily="34" charset="-120"/>
               </a:rPr>
-              <a:t>It installs on six hosts today, from Claude Code to Databricks Genie</a:t>
+              <a:t>The alignment check found 3 affected feature specs and 2 affected designs</a:t>
             </a:r>
             <a:endParaRPr lang="en-US" sz="1800" dirty="0"/>
           </a:p>
@@ -15340,7 +17340,7 @@
                 <a:ea typeface="Arial" pitchFamily="34" charset="-122"/>
                 <a:cs typeface="Arial" pitchFamily="34" charset="-120"/>
               </a:rPr>
-              <a:t>Your technology choices stay yours; HELIX imposes none</a:t>
+              <a:t>It flagged 1 recorded decision that conflicted with the OAuth pattern</a:t>
             </a:r>
             <a:endParaRPr lang="en-US" sz="1800" dirty="0"/>
           </a:p>
@@ -15361,7 +17361,7 @@
                 <a:ea typeface="Arial" pitchFamily="34" charset="-122"/>
                 <a:cs typeface="Arial" pitchFamily="34" charset="-120"/>
               </a:rPr>
-              <a:t>How much an agent does without asking is a three-position dial you set</a:t>
+              <a:t>It listed 4 missing user stories and 1 test plan to revise</a:t>
             </a:r>
             <a:endParaRPr lang="en-US" sz="1800" dirty="0"/>
           </a:p>
@@ -15376,17 +17376,17 @@
         <p:spPr>
           <a:xfrm>
             <a:off x="5285613" y="1965960"/>
-            <a:ext cx="6357442" cy="3840480"/>
+            <a:ext cx="1383621" cy="3840480"/>
           </a:xfrm>
           <a:prstGeom prst="roundRect">
             <a:avLst>
-              <a:gd name="adj" fmla="val 2381"/>
+              <a:gd name="adj" fmla="val 6609"/>
             </a:avLst>
           </a:prstGeom>
           <a:solidFill>
             <a:srgbClr val="F3F5F8"/>
           </a:solidFill>
-          <a:ln w="12700">
+          <a:ln w="9525">
             <a:solidFill>
               <a:srgbClr val="D6DCE4"/>
             </a:solidFill>
@@ -15396,14 +17396,78 @@
       </p:sp>
       <p:sp>
         <p:nvSpPr>
-          <p:cNvPr id="10" name="Text 7"/>
+          <p:cNvPr id="10" name="Shape 7"/>
+          <p:cNvSpPr/>
+          <p:nvPr/>
+        </p:nvSpPr>
+        <p:spPr>
+          <a:xfrm>
+            <a:off x="5666109" y="2423160"/>
+            <a:ext cx="622629" cy="622629"/>
+          </a:xfrm>
+          <a:prstGeom prst="ellipse">
+            <a:avLst/>
+          </a:prstGeom>
+          <a:solidFill>
+            <a:srgbClr val="3B6BA8"/>
+          </a:solidFill>
+          <a:ln w="12700">
+            <a:solidFill>
+              <a:srgbClr val="3B6BA8"/>
+            </a:solidFill>
+            <a:prstDash val="solid"/>
+          </a:ln>
+        </p:spPr>
+      </p:sp>
+      <p:sp>
+        <p:nvSpPr>
+          <p:cNvPr id="11" name="Text 8"/>
           <p:cNvSpPr txBox="1"/>
           <p:nvPr/>
         </p:nvSpPr>
         <p:spPr>
           <a:xfrm>
-            <a:off x="5559933" y="2148840"/>
-            <a:ext cx="5808802" cy="365760"/>
+            <a:off x="5666109" y="2423160"/>
+            <a:ext cx="622629" cy="622629"/>
+          </a:xfrm>
+          <a:prstGeom prst="rect">
+            <a:avLst/>
+          </a:prstGeom>
+          <a:noFill/>
+          <a:ln/>
+        </p:spPr>
+        <p:txBody>
+          <a:bodyPr wrap="square" lIns="0" tIns="0" rIns="0" bIns="0" rtlCol="0" anchor="ctr"/>
+          <a:lstStyle/>
+          <a:p>
+            <a:pPr algn="ctr" indent="0" marL="0">
+              <a:buNone/>
+            </a:pPr>
+            <a:r>
+              <a:rPr lang="en-US" sz="2400" b="1" dirty="0">
+                <a:solidFill>
+                  <a:srgbClr val="FFFFFF"/>
+                </a:solidFill>
+                <a:latin typeface="Georgia" pitchFamily="34" charset="0"/>
+                <a:ea typeface="Georgia" pitchFamily="34" charset="-122"/>
+                <a:cs typeface="Georgia" pitchFamily="34" charset="-120"/>
+              </a:rPr>
+              <a:t>1</a:t>
+            </a:r>
+            <a:endParaRPr lang="en-US" sz="2400" dirty="0"/>
+          </a:p>
+        </p:txBody>
+      </p:sp>
+      <p:sp>
+        <p:nvSpPr>
+          <p:cNvPr id="12" name="Text 9"/>
+          <p:cNvSpPr txBox="1"/>
+          <p:nvPr/>
+        </p:nvSpPr>
+        <p:spPr>
+          <a:xfrm>
+            <a:off x="5358765" y="3274389"/>
+            <a:ext cx="1237317" cy="457200"/>
           </a:xfrm>
           <a:prstGeom prst="rect">
             <a:avLst/>
@@ -15421,7 +17485,48 @@
               <a:buNone/>
             </a:pPr>
             <a:r>
-              <a:rPr lang="en-US" sz="1400" b="1" dirty="0">
+              <a:rPr lang="en-US" sz="1600" b="1" dirty="0">
+                <a:solidFill>
+                  <a:srgbClr val="1F2933"/>
+                </a:solidFill>
+                <a:latin typeface="Arial" pitchFamily="34" charset="0"/>
+                <a:ea typeface="Arial" pitchFamily="34" charset="-122"/>
+                <a:cs typeface="Arial" pitchFamily="34" charset="-120"/>
+              </a:rPr>
+              <a:t>3 specs</a:t>
+            </a:r>
+            <a:endParaRPr lang="en-US" sz="1600" dirty="0"/>
+          </a:p>
+        </p:txBody>
+      </p:sp>
+      <p:sp>
+        <p:nvSpPr>
+          <p:cNvPr id="13" name="Text 10"/>
+          <p:cNvSpPr txBox="1"/>
+          <p:nvPr/>
+        </p:nvSpPr>
+        <p:spPr>
+          <a:xfrm>
+            <a:off x="5422773" y="3777309"/>
+            <a:ext cx="1109301" cy="1846251"/>
+          </a:xfrm>
+          <a:prstGeom prst="rect">
+            <a:avLst/>
+          </a:prstGeom>
+          <a:noFill/>
+          <a:ln/>
+        </p:spPr>
+        <p:txBody>
+          <a:bodyPr wrap="square" lIns="0" tIns="0" rIns="0" bIns="0" rtlCol="0" anchor="t">
+            <a:normAutofit/>
+          </a:bodyPr>
+          <a:lstStyle/>
+          <a:p>
+            <a:pPr algn="ctr" indent="0" marL="0">
+              <a:buNone/>
+            </a:pPr>
+            <a:r>
+              <a:rPr lang="en-US" sz="1300" dirty="0">
                 <a:solidFill>
                   <a:srgbClr val="55606D"/>
                 </a:solidFill>
@@ -15429,22 +17534,113 @@
                 <a:ea typeface="Arial" pitchFamily="34" charset="-122"/>
                 <a:cs typeface="Arial" pitchFamily="34" charset="-120"/>
               </a:rPr>
-              <a:t>your runtime and tools</a:t>
+              <a:t>affected by the change</a:t>
             </a:r>
-            <a:endParaRPr lang="en-US" sz="1400" dirty="0"/>
+            <a:endParaRPr lang="en-US" sz="1300" dirty="0"/>
           </a:p>
         </p:txBody>
       </p:sp>
       <p:sp>
         <p:nvSpPr>
-          <p:cNvPr id="11" name="Text 8"/>
+          <p:cNvPr id="14" name="Shape 11"/>
+          <p:cNvSpPr/>
+          <p:nvPr/>
+        </p:nvSpPr>
+        <p:spPr>
+          <a:xfrm>
+            <a:off x="6943554" y="1965960"/>
+            <a:ext cx="1383621" cy="3840480"/>
+          </a:xfrm>
+          <a:prstGeom prst="roundRect">
+            <a:avLst>
+              <a:gd name="adj" fmla="val 6609"/>
+            </a:avLst>
+          </a:prstGeom>
+          <a:solidFill>
+            <a:srgbClr val="F3F5F8"/>
+          </a:solidFill>
+          <a:ln w="9525">
+            <a:solidFill>
+              <a:srgbClr val="D6DCE4"/>
+            </a:solidFill>
+            <a:prstDash val="solid"/>
+          </a:ln>
+        </p:spPr>
+      </p:sp>
+      <p:sp>
+        <p:nvSpPr>
+          <p:cNvPr id="15" name="Shape 12"/>
+          <p:cNvSpPr/>
+          <p:nvPr/>
+        </p:nvSpPr>
+        <p:spPr>
+          <a:xfrm>
+            <a:off x="7324049" y="2423160"/>
+            <a:ext cx="622629" cy="622629"/>
+          </a:xfrm>
+          <a:prstGeom prst="ellipse">
+            <a:avLst/>
+          </a:prstGeom>
+          <a:solidFill>
+            <a:srgbClr val="6842A8"/>
+          </a:solidFill>
+          <a:ln w="12700">
+            <a:solidFill>
+              <a:srgbClr val="6842A8"/>
+            </a:solidFill>
+            <a:prstDash val="solid"/>
+          </a:ln>
+        </p:spPr>
+      </p:sp>
+      <p:sp>
+        <p:nvSpPr>
+          <p:cNvPr id="16" name="Text 13"/>
           <p:cNvSpPr txBox="1"/>
           <p:nvPr/>
         </p:nvSpPr>
         <p:spPr>
           <a:xfrm>
-            <a:off x="5559933" y="2514600"/>
-            <a:ext cx="5808802" cy="320040"/>
+            <a:off x="7324049" y="2423160"/>
+            <a:ext cx="622629" cy="622629"/>
+          </a:xfrm>
+          <a:prstGeom prst="rect">
+            <a:avLst/>
+          </a:prstGeom>
+          <a:noFill/>
+          <a:ln/>
+        </p:spPr>
+        <p:txBody>
+          <a:bodyPr wrap="square" lIns="0" tIns="0" rIns="0" bIns="0" rtlCol="0" anchor="ctr"/>
+          <a:lstStyle/>
+          <a:p>
+            <a:pPr algn="ctr" indent="0" marL="0">
+              <a:buNone/>
+            </a:pPr>
+            <a:r>
+              <a:rPr lang="en-US" sz="2400" b="1" dirty="0">
+                <a:solidFill>
+                  <a:srgbClr val="FFFFFF"/>
+                </a:solidFill>
+                <a:latin typeface="Georgia" pitchFamily="34" charset="0"/>
+                <a:ea typeface="Georgia" pitchFamily="34" charset="-122"/>
+                <a:cs typeface="Georgia" pitchFamily="34" charset="-120"/>
+              </a:rPr>
+              <a:t>2</a:t>
+            </a:r>
+            <a:endParaRPr lang="en-US" sz="2400" dirty="0"/>
+          </a:p>
+        </p:txBody>
+      </p:sp>
+      <p:sp>
+        <p:nvSpPr>
+          <p:cNvPr id="17" name="Text 14"/>
+          <p:cNvSpPr txBox="1"/>
+          <p:nvPr/>
+        </p:nvSpPr>
+        <p:spPr>
+          <a:xfrm>
+            <a:off x="7016706" y="3274389"/>
+            <a:ext cx="1237317" cy="457200"/>
           </a:xfrm>
           <a:prstGeom prst="rect">
             <a:avLst/>
@@ -15462,7 +17658,48 @@
               <a:buNone/>
             </a:pPr>
             <a:r>
-              <a:rPr lang="en-US" sz="1200" dirty="0">
+              <a:rPr lang="en-US" sz="1600" b="1" dirty="0">
+                <a:solidFill>
+                  <a:srgbClr val="1F2933"/>
+                </a:solidFill>
+                <a:latin typeface="Arial" pitchFamily="34" charset="0"/>
+                <a:ea typeface="Arial" pitchFamily="34" charset="-122"/>
+                <a:cs typeface="Arial" pitchFamily="34" charset="-120"/>
+              </a:rPr>
+              <a:t>1 decision</a:t>
+            </a:r>
+            <a:endParaRPr lang="en-US" sz="1600" dirty="0"/>
+          </a:p>
+        </p:txBody>
+      </p:sp>
+      <p:sp>
+        <p:nvSpPr>
+          <p:cNvPr id="18" name="Text 15"/>
+          <p:cNvSpPr txBox="1"/>
+          <p:nvPr/>
+        </p:nvSpPr>
+        <p:spPr>
+          <a:xfrm>
+            <a:off x="7080714" y="3777309"/>
+            <a:ext cx="1109301" cy="1846251"/>
+          </a:xfrm>
+          <a:prstGeom prst="rect">
+            <a:avLst/>
+          </a:prstGeom>
+          <a:noFill/>
+          <a:ln/>
+        </p:spPr>
+        <p:txBody>
+          <a:bodyPr wrap="square" lIns="0" tIns="0" rIns="0" bIns="0" rtlCol="0" anchor="t">
+            <a:normAutofit/>
+          </a:bodyPr>
+          <a:lstStyle/>
+          <a:p>
+            <a:pPr algn="ctr" indent="0" marL="0">
+              <a:buNone/>
+            </a:pPr>
+            <a:r>
+              <a:rPr lang="en-US" sz="1300" dirty="0">
                 <a:solidFill>
                   <a:srgbClr val="55606D"/>
                 </a:solidFill>
@@ -15470,34 +17707,34 @@
                 <a:ea typeface="Arial" pitchFamily="34" charset="-122"/>
                 <a:cs typeface="Arial" pitchFamily="34" charset="-120"/>
               </a:rPr>
-              <a:t>tracker, queue, CI, stack, judgment</a:t>
+              <a:t>in conflict with OAuth</a:t>
             </a:r>
-            <a:endParaRPr lang="en-US" sz="1200" dirty="0"/>
+            <a:endParaRPr lang="en-US" sz="1300" dirty="0"/>
           </a:p>
         </p:txBody>
       </p:sp>
       <p:sp>
         <p:nvSpPr>
-          <p:cNvPr id="12" name="Shape 9"/>
+          <p:cNvPr id="19" name="Shape 16"/>
           <p:cNvSpPr/>
           <p:nvPr/>
         </p:nvSpPr>
         <p:spPr>
           <a:xfrm>
-            <a:off x="7092734" y="3383280"/>
-            <a:ext cx="2743200" cy="1371600"/>
+            <a:off x="8601494" y="1965960"/>
+            <a:ext cx="1383621" cy="3840480"/>
           </a:xfrm>
           <a:prstGeom prst="roundRect">
             <a:avLst>
-              <a:gd name="adj" fmla="val 6667"/>
+              <a:gd name="adj" fmla="val 6609"/>
             </a:avLst>
           </a:prstGeom>
           <a:solidFill>
-            <a:srgbClr val="3B6BA8"/>
+            <a:srgbClr val="F3F5F8"/>
           </a:solidFill>
           <a:ln w="9525">
             <a:solidFill>
-              <a:srgbClr val="3B6BA8"/>
+              <a:srgbClr val="D6DCE4"/>
             </a:solidFill>
             <a:prstDash val="solid"/>
           </a:ln>
@@ -15505,14 +17742,39 @@
       </p:sp>
       <p:sp>
         <p:nvSpPr>
-          <p:cNvPr id="13" name="Text 10"/>
+          <p:cNvPr id="20" name="Shape 17"/>
+          <p:cNvSpPr/>
+          <p:nvPr/>
+        </p:nvSpPr>
+        <p:spPr>
+          <a:xfrm>
+            <a:off x="8981990" y="2423160"/>
+            <a:ext cx="622629" cy="622629"/>
+          </a:xfrm>
+          <a:prstGeom prst="ellipse">
+            <a:avLst/>
+          </a:prstGeom>
+          <a:solidFill>
+            <a:srgbClr val="C44B2F"/>
+          </a:solidFill>
+          <a:ln w="12700">
+            <a:solidFill>
+              <a:srgbClr val="C44B2F"/>
+            </a:solidFill>
+            <a:prstDash val="solid"/>
+          </a:ln>
+        </p:spPr>
+      </p:sp>
+      <p:sp>
+        <p:nvSpPr>
+          <p:cNvPr id="21" name="Text 18"/>
           <p:cNvSpPr txBox="1"/>
           <p:nvPr/>
         </p:nvSpPr>
         <p:spPr>
           <a:xfrm>
-            <a:off x="7275614" y="3611880"/>
-            <a:ext cx="2377440" cy="457200"/>
+            <a:off x="8981990" y="2423160"/>
+            <a:ext cx="622629" cy="622629"/>
           </a:xfrm>
           <a:prstGeom prst="rect">
             <a:avLst/>
@@ -15521,16 +17783,14 @@
           <a:ln/>
         </p:spPr>
         <p:txBody>
-          <a:bodyPr wrap="square" lIns="0" tIns="0" rIns="0" bIns="0" rtlCol="0" anchor="t">
-            <a:normAutofit/>
-          </a:bodyPr>
+          <a:bodyPr wrap="square" lIns="0" tIns="0" rIns="0" bIns="0" rtlCol="0" anchor="ctr"/>
           <a:lstStyle/>
           <a:p>
             <a:pPr algn="ctr" indent="0" marL="0">
               <a:buNone/>
             </a:pPr>
             <a:r>
-              <a:rPr lang="en-US" sz="1800" b="1" dirty="0">
+              <a:rPr lang="en-US" sz="2400" b="1" dirty="0">
                 <a:solidFill>
                   <a:srgbClr val="FFFFFF"/>
                 </a:solidFill>
@@ -15538,22 +17798,22 @@
                 <a:ea typeface="Georgia" pitchFamily="34" charset="-122"/>
                 <a:cs typeface="Georgia" pitchFamily="34" charset="-120"/>
               </a:rPr>
-              <a:t>HELIX</a:t>
+              <a:t>3</a:t>
             </a:r>
-            <a:endParaRPr lang="en-US" sz="1800" dirty="0"/>
+            <a:endParaRPr lang="en-US" sz="2400" dirty="0"/>
           </a:p>
         </p:txBody>
       </p:sp>
       <p:sp>
         <p:nvSpPr>
-          <p:cNvPr id="14" name="Text 11"/>
+          <p:cNvPr id="22" name="Text 19"/>
           <p:cNvSpPr txBox="1"/>
           <p:nvPr/>
         </p:nvSpPr>
         <p:spPr>
           <a:xfrm>
-            <a:off x="7275614" y="4114800"/>
-            <a:ext cx="2377440" cy="457200"/>
+            <a:off x="8674646" y="3274389"/>
+            <a:ext cx="1237317" cy="457200"/>
           </a:xfrm>
           <a:prstGeom prst="rect">
             <a:avLst/>
@@ -15571,80 +17831,30 @@
               <a:buNone/>
             </a:pPr>
             <a:r>
-              <a:rPr lang="en-US" sz="1300" dirty="0">
+              <a:rPr lang="en-US" sz="1600" b="1" dirty="0">
                 <a:solidFill>
-                  <a:srgbClr val="FFFFFF"/>
+                  <a:srgbClr val="1F2933"/>
                 </a:solidFill>
                 <a:latin typeface="Arial" pitchFamily="34" charset="0"/>
                 <a:ea typeface="Arial" pitchFamily="34" charset="-122"/>
                 <a:cs typeface="Arial" pitchFamily="34" charset="-120"/>
               </a:rPr>
-              <a:t>templates plus one skill</a:t>
+              <a:t>4 stories</a:t>
             </a:r>
-            <a:endParaRPr lang="en-US" sz="1300" dirty="0"/>
+            <a:endParaRPr lang="en-US" sz="1600" dirty="0"/>
           </a:p>
         </p:txBody>
       </p:sp>
       <p:sp>
         <p:nvSpPr>
-          <p:cNvPr id="15" name="Shape 12"/>
-          <p:cNvSpPr/>
-          <p:nvPr/>
-        </p:nvSpPr>
-        <p:spPr>
-          <a:xfrm>
-            <a:off x="9927374" y="4069080"/>
-            <a:ext cx="914400" cy="0"/>
-          </a:xfrm>
-          <a:prstGeom prst="line">
-            <a:avLst/>
-          </a:prstGeom>
-          <a:noFill/>
-          <a:ln w="25400">
-            <a:solidFill>
-              <a:srgbClr val="C44B2F"/>
-            </a:solidFill>
-            <a:prstDash val="solid"/>
-            <a:headEnd type="none"/>
-            <a:tailEnd type="triangle"/>
-          </a:ln>
-        </p:spPr>
-      </p:sp>
-      <p:sp>
-        <p:nvSpPr>
-          <p:cNvPr id="16" name="Shape 13"/>
-          <p:cNvSpPr/>
-          <p:nvPr/>
-        </p:nvSpPr>
-        <p:spPr>
-          <a:xfrm>
-            <a:off x="6086894" y="4069080"/>
-            <a:ext cx="914400" cy="0"/>
-          </a:xfrm>
-          <a:prstGeom prst="line">
-            <a:avLst/>
-          </a:prstGeom>
-          <a:noFill/>
-          <a:ln w="25400">
-            <a:solidFill>
-              <a:srgbClr val="C44B2F"/>
-            </a:solidFill>
-            <a:prstDash val="solid"/>
-            <a:headEnd type="triangle"/>
-            <a:tailEnd type="none"/>
-          </a:ln>
-        </p:spPr>
-      </p:sp>
-      <p:sp>
-        <p:nvSpPr>
-          <p:cNvPr id="17" name="Text 14"/>
+          <p:cNvPr id="23" name="Text 20"/>
           <p:cNvSpPr txBox="1"/>
           <p:nvPr/>
         </p:nvSpPr>
         <p:spPr>
           <a:xfrm>
-            <a:off x="5559933" y="5120640"/>
-            <a:ext cx="5808802" cy="548640"/>
+            <a:off x="8738654" y="3777309"/>
+            <a:ext cx="1109301" cy="1846251"/>
           </a:xfrm>
           <a:prstGeom prst="rect">
             <a:avLst/>
@@ -15653,7 +17863,7 @@
           <a:ln/>
         </p:spPr>
         <p:txBody>
-          <a:bodyPr wrap="square" lIns="0" tIns="0" rIns="0" bIns="0" rtlCol="0" anchor="b">
+          <a:bodyPr wrap="square" lIns="0" tIns="0" rIns="0" bIns="0" rtlCol="0" anchor="t">
             <a:normAutofit/>
           </a:bodyPr>
           <a:lstStyle/>
@@ -15662,7 +17872,7 @@
               <a:buNone/>
             </a:pPr>
             <a:r>
-              <a:rPr lang="en-US" sz="1200" dirty="0">
+              <a:rPr lang="en-US" sz="1300" dirty="0">
                 <a:solidFill>
                   <a:srgbClr val="55606D"/>
                 </a:solidFill>
@@ -15670,9 +17880,182 @@
                 <a:ea typeface="Arial" pitchFamily="34" charset="-122"/>
                 <a:cs typeface="Arial" pitchFamily="34" charset="-120"/>
               </a:rPr>
-              <a:t>reads and writes your documents, asks before anything irreversible</a:t>
+              <a:t>missing and now listed</a:t>
             </a:r>
-            <a:endParaRPr lang="en-US" sz="1200" dirty="0"/>
+            <a:endParaRPr lang="en-US" sz="1300" dirty="0"/>
+          </a:p>
+        </p:txBody>
+      </p:sp>
+      <p:sp>
+        <p:nvSpPr>
+          <p:cNvPr id="24" name="Shape 21"/>
+          <p:cNvSpPr/>
+          <p:nvPr/>
+        </p:nvSpPr>
+        <p:spPr>
+          <a:xfrm>
+            <a:off x="10259435" y="1965960"/>
+            <a:ext cx="1383621" cy="3840480"/>
+          </a:xfrm>
+          <a:prstGeom prst="roundRect">
+            <a:avLst>
+              <a:gd name="adj" fmla="val 6609"/>
+            </a:avLst>
+          </a:prstGeom>
+          <a:solidFill>
+            <a:srgbClr val="F3F5F8"/>
+          </a:solidFill>
+          <a:ln w="9525">
+            <a:solidFill>
+              <a:srgbClr val="D6DCE4"/>
+            </a:solidFill>
+            <a:prstDash val="solid"/>
+          </a:ln>
+        </p:spPr>
+      </p:sp>
+      <p:sp>
+        <p:nvSpPr>
+          <p:cNvPr id="25" name="Shape 22"/>
+          <p:cNvSpPr/>
+          <p:nvPr/>
+        </p:nvSpPr>
+        <p:spPr>
+          <a:xfrm>
+            <a:off x="10639930" y="2423160"/>
+            <a:ext cx="622629" cy="622629"/>
+          </a:xfrm>
+          <a:prstGeom prst="ellipse">
+            <a:avLst/>
+          </a:prstGeom>
+          <a:solidFill>
+            <a:srgbClr val="3B6BA8"/>
+          </a:solidFill>
+          <a:ln w="12700">
+            <a:solidFill>
+              <a:srgbClr val="3B6BA8"/>
+            </a:solidFill>
+            <a:prstDash val="solid"/>
+          </a:ln>
+        </p:spPr>
+      </p:sp>
+      <p:sp>
+        <p:nvSpPr>
+          <p:cNvPr id="26" name="Text 23"/>
+          <p:cNvSpPr txBox="1"/>
+          <p:nvPr/>
+        </p:nvSpPr>
+        <p:spPr>
+          <a:xfrm>
+            <a:off x="10639930" y="2423160"/>
+            <a:ext cx="622629" cy="622629"/>
+          </a:xfrm>
+          <a:prstGeom prst="rect">
+            <a:avLst/>
+          </a:prstGeom>
+          <a:noFill/>
+          <a:ln/>
+        </p:spPr>
+        <p:txBody>
+          <a:bodyPr wrap="square" lIns="0" tIns="0" rIns="0" bIns="0" rtlCol="0" anchor="ctr"/>
+          <a:lstStyle/>
+          <a:p>
+            <a:pPr algn="ctr" indent="0" marL="0">
+              <a:buNone/>
+            </a:pPr>
+            <a:r>
+              <a:rPr lang="en-US" sz="2400" b="1" dirty="0">
+                <a:solidFill>
+                  <a:srgbClr val="FFFFFF"/>
+                </a:solidFill>
+                <a:latin typeface="Georgia" pitchFamily="34" charset="0"/>
+                <a:ea typeface="Georgia" pitchFamily="34" charset="-122"/>
+                <a:cs typeface="Georgia" pitchFamily="34" charset="-120"/>
+              </a:rPr>
+              <a:t>4</a:t>
+            </a:r>
+            <a:endParaRPr lang="en-US" sz="2400" dirty="0"/>
+          </a:p>
+        </p:txBody>
+      </p:sp>
+      <p:sp>
+        <p:nvSpPr>
+          <p:cNvPr id="27" name="Text 24"/>
+          <p:cNvSpPr txBox="1"/>
+          <p:nvPr/>
+        </p:nvSpPr>
+        <p:spPr>
+          <a:xfrm>
+            <a:off x="10332587" y="3274389"/>
+            <a:ext cx="1237317" cy="457200"/>
+          </a:xfrm>
+          <a:prstGeom prst="rect">
+            <a:avLst/>
+          </a:prstGeom>
+          <a:noFill/>
+          <a:ln/>
+        </p:spPr>
+        <p:txBody>
+          <a:bodyPr wrap="square" lIns="0" tIns="0" rIns="0" bIns="0" rtlCol="0" anchor="t">
+            <a:normAutofit/>
+          </a:bodyPr>
+          <a:lstStyle/>
+          <a:p>
+            <a:pPr algn="ctr" indent="0" marL="0">
+              <a:buNone/>
+            </a:pPr>
+            <a:r>
+              <a:rPr lang="en-US" sz="1400" b="1" dirty="0">
+                <a:solidFill>
+                  <a:srgbClr val="1F2933"/>
+                </a:solidFill>
+                <a:latin typeface="Arial" pitchFamily="34" charset="0"/>
+                <a:ea typeface="Arial" pitchFamily="34" charset="-122"/>
+                <a:cs typeface="Arial" pitchFamily="34" charset="-120"/>
+              </a:rPr>
+              <a:t>1 test plan</a:t>
+            </a:r>
+            <a:endParaRPr lang="en-US" sz="1400" dirty="0"/>
+          </a:p>
+        </p:txBody>
+      </p:sp>
+      <p:sp>
+        <p:nvSpPr>
+          <p:cNvPr id="28" name="Text 25"/>
+          <p:cNvSpPr txBox="1"/>
+          <p:nvPr/>
+        </p:nvSpPr>
+        <p:spPr>
+          <a:xfrm>
+            <a:off x="10396595" y="3777309"/>
+            <a:ext cx="1109301" cy="1846251"/>
+          </a:xfrm>
+          <a:prstGeom prst="rect">
+            <a:avLst/>
+          </a:prstGeom>
+          <a:noFill/>
+          <a:ln/>
+        </p:spPr>
+        <p:txBody>
+          <a:bodyPr wrap="square" lIns="0" tIns="0" rIns="0" bIns="0" rtlCol="0" anchor="t">
+            <a:normAutofit/>
+          </a:bodyPr>
+          <a:lstStyle/>
+          <a:p>
+            <a:pPr algn="ctr" indent="0" marL="0">
+              <a:buNone/>
+            </a:pPr>
+            <a:r>
+              <a:rPr lang="en-US" sz="1300" dirty="0">
+                <a:solidFill>
+                  <a:srgbClr val="55606D"/>
+                </a:solidFill>
+                <a:latin typeface="Arial" pitchFamily="34" charset="0"/>
+                <a:ea typeface="Arial" pitchFamily="34" charset="-122"/>
+                <a:cs typeface="Arial" pitchFamily="34" charset="-120"/>
+              </a:rPr>
+              <a:t>to revise first</a:t>
+            </a:r>
+            <a:endParaRPr lang="en-US" sz="1300" dirty="0"/>
           </a:p>
         </p:txBody>
       </p:sp>
